--- a/modulo-01/01.07 - Implementando Atualizações de Banco de Dados usando Business Objects/01.07_Atualizando_dados_com_Business_Objects.pptx
+++ b/modulo-01/01.07 - Implementando Atualizações de Banco de Dados usando Business Objects/01.07_Atualizando_dados_com_Business_Objects.pptx
@@ -3201,7 +3201,7 @@
                   <a:srgbClr val="0064D9"/>
                 </a:solidFill>
               </a:rPr>
-              <a:t>CONSUMO · BO INTERFACE</a:t>
+              <a:t>CONSUMO · BO PROJECTION</a:t>
             </a:r>
             <a:endParaRPr lang="en-US" sz="1100" dirty="0"/>
           </a:p>
@@ -3239,7 +3239,7 @@
                   <a:srgbClr val="1D2D3E"/>
                 </a:solidFill>
               </a:rPr>
-              <a:t>A interface define o que o consumidor pode usar</a:t>
+              <a:t>A projeção define o que o app pode usar</a:t>
             </a:r>
             <a:endParaRPr lang="en-US" sz="2800" dirty="0"/>
           </a:p>
@@ -3254,11 +3254,11 @@
         <p:spPr>
           <a:xfrm>
             <a:off x="548640" y="1645920"/>
-            <a:ext cx="6675120" cy="3108960"/>
+            <a:ext cx="6675120" cy="3611880"/>
           </a:xfrm>
           <a:prstGeom prst="roundRect">
             <a:avLst>
-              <a:gd name="adj" fmla="val 2353"/>
+              <a:gd name="adj" fmla="val 2025"/>
             </a:avLst>
           </a:prstGeom>
           <a:solidFill>
@@ -3303,7 +3303,7 @@
         <p:spPr>
           <a:xfrm>
             <a:off x="640080" y="1700784"/>
-            <a:ext cx="1920240" cy="292608"/>
+            <a:ext cx="1842516" cy="292608"/>
           </a:xfrm>
           <a:prstGeom prst="rect">
             <a:avLst/>
@@ -3323,7 +3323,7 @@
         <p:spPr>
           <a:xfrm>
             <a:off x="640080" y="1700784"/>
-            <a:ext cx="1920240" cy="27432"/>
+            <a:ext cx="1842516" cy="27432"/>
           </a:xfrm>
           <a:prstGeom prst="rect">
             <a:avLst/>
@@ -3343,7 +3343,7 @@
         <p:spPr>
           <a:xfrm>
             <a:off x="731520" y="1719072"/>
-            <a:ext cx="1737360" cy="274320"/>
+            <a:ext cx="1659636" cy="274320"/>
           </a:xfrm>
           <a:prstGeom prst="rect">
             <a:avLst/>
@@ -3364,7 +3364,7 @@
                   <a:srgbClr val="FFFFFF"/>
                 </a:solidFill>
               </a:rPr>
-              <a:t>/dmo/i_agencytp.bdef</a:t>
+              <a:t>zc_pc_item_app.bdef</a:t>
             </a:r>
             <a:endParaRPr lang="en-US" sz="950" dirty="0"/>
           </a:p>
@@ -3400,7 +3400,7 @@
                   <a:srgbClr val="9DA5B4"/>
                 </a:solidFill>
               </a:rPr>
-              <a:t>/DMO/FLIGHT_DRAFT › /DMO/I_AGENCYTP (simplificada)</a:t>
+              <a:t>ZAVBS_PC_ESTOQUE › ZC_PC_ITEM_APP (simplificada)</a:t>
             </a:r>
             <a:endParaRPr lang="en-US" sz="850" dirty="0"/>
           </a:p>
@@ -3415,7 +3415,7 @@
         <p:spPr>
           <a:xfrm>
             <a:off x="685800" y="2395728"/>
-            <a:ext cx="320040" cy="2267712"/>
+            <a:ext cx="320040" cy="2770632"/>
           </a:xfrm>
           <a:prstGeom prst="rect">
             <a:avLst/>
@@ -3606,6 +3606,106 @@
             </a:r>
             <a:endParaRPr lang="en-US" sz="1050" dirty="0"/>
           </a:p>
+          <a:p>
+            <a:pPr algn="r" indent="0" marL="0">
+              <a:lnSpc>
+                <a:spcPct val="105000"/>
+              </a:lnSpc>
+              <a:buNone/>
+            </a:pPr>
+            <a:r>
+              <a:rPr lang="en-US" sz="1050" dirty="0">
+                <a:solidFill>
+                  <a:srgbClr val="6E7681"/>
+                </a:solidFill>
+                <a:latin typeface="Courier New" pitchFamily="34" charset="0"/>
+                <a:ea typeface="Courier New" pitchFamily="34" charset="-122"/>
+                <a:cs typeface="Courier New" pitchFamily="34" charset="-120"/>
+              </a:rPr>
+              <a:t>10</a:t>
+            </a:r>
+            <a:endParaRPr lang="en-US" sz="1050" dirty="0"/>
+          </a:p>
+          <a:p>
+            <a:pPr algn="r" indent="0" marL="0">
+              <a:lnSpc>
+                <a:spcPct val="105000"/>
+              </a:lnSpc>
+              <a:buNone/>
+            </a:pPr>
+            <a:r>
+              <a:rPr lang="en-US" sz="1050" dirty="0">
+                <a:solidFill>
+                  <a:srgbClr val="6E7681"/>
+                </a:solidFill>
+                <a:latin typeface="Courier New" pitchFamily="34" charset="0"/>
+                <a:ea typeface="Courier New" pitchFamily="34" charset="-122"/>
+                <a:cs typeface="Courier New" pitchFamily="34" charset="-120"/>
+              </a:rPr>
+              <a:t>11</a:t>
+            </a:r>
+            <a:endParaRPr lang="en-US" sz="1050" dirty="0"/>
+          </a:p>
+          <a:p>
+            <a:pPr algn="r" indent="0" marL="0">
+              <a:lnSpc>
+                <a:spcPct val="105000"/>
+              </a:lnSpc>
+              <a:buNone/>
+            </a:pPr>
+            <a:r>
+              <a:rPr lang="en-US" sz="1050" dirty="0">
+                <a:solidFill>
+                  <a:srgbClr val="6E7681"/>
+                </a:solidFill>
+                <a:latin typeface="Courier New" pitchFamily="34" charset="0"/>
+                <a:ea typeface="Courier New" pitchFamily="34" charset="-122"/>
+                <a:cs typeface="Courier New" pitchFamily="34" charset="-120"/>
+              </a:rPr>
+              <a:t>12</a:t>
+            </a:r>
+            <a:endParaRPr lang="en-US" sz="1050" dirty="0"/>
+          </a:p>
+          <a:p>
+            <a:pPr algn="r" indent="0" marL="0">
+              <a:lnSpc>
+                <a:spcPct val="105000"/>
+              </a:lnSpc>
+              <a:buNone/>
+            </a:pPr>
+            <a:r>
+              <a:rPr lang="en-US" sz="1050" dirty="0">
+                <a:solidFill>
+                  <a:srgbClr val="6E7681"/>
+                </a:solidFill>
+                <a:latin typeface="Courier New" pitchFamily="34" charset="0"/>
+                <a:ea typeface="Courier New" pitchFamily="34" charset="-122"/>
+                <a:cs typeface="Courier New" pitchFamily="34" charset="-120"/>
+              </a:rPr>
+              <a:t>13</a:t>
+            </a:r>
+            <a:endParaRPr lang="en-US" sz="1050" dirty="0"/>
+          </a:p>
+          <a:p>
+            <a:pPr algn="r" indent="0" marL="0">
+              <a:lnSpc>
+                <a:spcPct val="105000"/>
+              </a:lnSpc>
+              <a:buNone/>
+            </a:pPr>
+            <a:r>
+              <a:rPr lang="en-US" sz="1050" dirty="0">
+                <a:solidFill>
+                  <a:srgbClr val="6E7681"/>
+                </a:solidFill>
+                <a:latin typeface="Courier New" pitchFamily="34" charset="0"/>
+                <a:ea typeface="Courier New" pitchFamily="34" charset="-122"/>
+                <a:cs typeface="Courier New" pitchFamily="34" charset="-120"/>
+              </a:rPr>
+              <a:t>14</a:t>
+            </a:r>
+            <a:endParaRPr lang="en-US" sz="1050" dirty="0"/>
+          </a:p>
         </p:txBody>
       </p:sp>
       <p:sp>
@@ -3617,7 +3717,7 @@
         <p:spPr>
           <a:xfrm>
             <a:off x="1051560" y="2395728"/>
-            <a:ext cx="6035040" cy="2267712"/>
+            <a:ext cx="6035040" cy="2770632"/>
           </a:xfrm>
           <a:prstGeom prst="rect">
             <a:avLst/>
@@ -3638,13 +3738,13 @@
             <a:r>
               <a:rPr lang="en-US" sz="1050" dirty="0">
                 <a:solidFill>
-                  <a:srgbClr val="CCCCCC"/>
-                </a:solidFill>
-                <a:latin typeface="Courier New" pitchFamily="34" charset="0"/>
-                <a:ea typeface="Courier New" pitchFamily="34" charset="-122"/>
-                <a:cs typeface="Courier New" pitchFamily="34" charset="-120"/>
-              </a:rPr>
-              <a:t>interface</a:t>
+                  <a:srgbClr val="569CD6"/>
+                </a:solidFill>
+                <a:latin typeface="Courier New" pitchFamily="34" charset="0"/>
+                <a:ea typeface="Courier New" pitchFamily="34" charset="-122"/>
+                <a:cs typeface="Courier New" pitchFamily="34" charset="-120"/>
+              </a:rPr>
+              <a:t>projection</a:t>
             </a:r>
             <a:r>
               <a:rPr lang="en-US" sz="1050" dirty="0">
@@ -3675,7 +3775,7 @@
                 <a:ea typeface="Courier New" pitchFamily="34" charset="-122"/>
                 <a:cs typeface="Courier New" pitchFamily="34" charset="-120"/>
               </a:rPr>
-              <a:t>use</a:t>
+              <a:t>strict</a:t>
             </a:r>
             <a:r>
               <a:rPr lang="en-US" sz="1050" dirty="0">
@@ -3691,13 +3791,57 @@
             <a:r>
               <a:rPr lang="en-US" sz="1050" dirty="0">
                 <a:solidFill>
-                  <a:srgbClr val="569CD6"/>
-                </a:solidFill>
-                <a:latin typeface="Courier New" pitchFamily="34" charset="0"/>
-                <a:ea typeface="Courier New" pitchFamily="34" charset="-122"/>
-                <a:cs typeface="Courier New" pitchFamily="34" charset="-120"/>
-              </a:rPr>
-              <a:t>draft</a:t>
+                  <a:srgbClr val="CCCCCC"/>
+                </a:solidFill>
+                <a:latin typeface="Courier New" pitchFamily="34" charset="0"/>
+                <a:ea typeface="Courier New" pitchFamily="34" charset="-122"/>
+                <a:cs typeface="Courier New" pitchFamily="34" charset="-120"/>
+              </a:rPr>
+              <a:t>(</a:t>
+            </a:r>
+            <a:r>
+              <a:rPr lang="en-US" sz="1050" dirty="0">
+                <a:solidFill>
+                  <a:srgbClr val="CCCCCC"/>
+                </a:solidFill>
+                <a:latin typeface="Courier New" pitchFamily="34" charset="0"/>
+                <a:ea typeface="Courier New" pitchFamily="34" charset="-122"/>
+                <a:cs typeface="Courier New" pitchFamily="34" charset="-120"/>
+              </a:rPr>
+              <a:t> </a:t>
+            </a:r>
+            <a:r>
+              <a:rPr lang="en-US" sz="1050" dirty="0">
+                <a:solidFill>
+                  <a:srgbClr val="B5CEA8"/>
+                </a:solidFill>
+                <a:latin typeface="Courier New" pitchFamily="34" charset="0"/>
+                <a:ea typeface="Courier New" pitchFamily="34" charset="-122"/>
+                <a:cs typeface="Courier New" pitchFamily="34" charset="-120"/>
+              </a:rPr>
+              <a:t>2</a:t>
+            </a:r>
+            <a:r>
+              <a:rPr lang="en-US" sz="1050" dirty="0">
+                <a:solidFill>
+                  <a:srgbClr val="CCCCCC"/>
+                </a:solidFill>
+                <a:latin typeface="Courier New" pitchFamily="34" charset="0"/>
+                <a:ea typeface="Courier New" pitchFamily="34" charset="-122"/>
+                <a:cs typeface="Courier New" pitchFamily="34" charset="-120"/>
+              </a:rPr>
+              <a:t> </a:t>
+            </a:r>
+            <a:r>
+              <a:rPr lang="en-US" sz="1050" dirty="0">
+                <a:solidFill>
+                  <a:srgbClr val="CCCCCC"/>
+                </a:solidFill>
+                <a:latin typeface="Courier New" pitchFamily="34" charset="0"/>
+                <a:ea typeface="Courier New" pitchFamily="34" charset="-122"/>
+                <a:cs typeface="Courier New" pitchFamily="34" charset="-120"/>
+              </a:rPr>
+              <a:t>)</a:t>
             </a:r>
             <a:r>
               <a:rPr lang="en-US" sz="1050" dirty="0">
@@ -3722,13 +3866,46 @@
             <a:r>
               <a:rPr lang="en-US" sz="1050" dirty="0">
                 <a:solidFill>
-                  <a:srgbClr val="000000"/>
+                  <a:srgbClr val="569CD6"/>
+                </a:solidFill>
+                <a:latin typeface="Courier New" pitchFamily="34" charset="0"/>
+                <a:ea typeface="Courier New" pitchFamily="34" charset="-122"/>
+                <a:cs typeface="Courier New" pitchFamily="34" charset="-120"/>
+              </a:rPr>
+              <a:t>use</a:t>
+            </a:r>
+            <a:r>
+              <a:rPr lang="en-US" sz="1050" dirty="0">
+                <a:solidFill>
+                  <a:srgbClr val="CCCCCC"/>
                 </a:solidFill>
                 <a:latin typeface="Courier New" pitchFamily="34" charset="0"/>
                 <a:ea typeface="Courier New" pitchFamily="34" charset="-122"/>
                 <a:cs typeface="Courier New" pitchFamily="34" charset="-120"/>
               </a:rPr>
               <a:t> </a:t>
+            </a:r>
+            <a:r>
+              <a:rPr lang="en-US" sz="1050" dirty="0">
+                <a:solidFill>
+                  <a:srgbClr val="569CD6"/>
+                </a:solidFill>
+                <a:latin typeface="Courier New" pitchFamily="34" charset="0"/>
+                <a:ea typeface="Courier New" pitchFamily="34" charset="-122"/>
+                <a:cs typeface="Courier New" pitchFamily="34" charset="-120"/>
+              </a:rPr>
+              <a:t>draft</a:t>
+            </a:r>
+            <a:r>
+              <a:rPr lang="en-US" sz="1050" dirty="0">
+                <a:solidFill>
+                  <a:srgbClr val="CCCCCC"/>
+                </a:solidFill>
+                <a:latin typeface="Courier New" pitchFamily="34" charset="0"/>
+                <a:ea typeface="Courier New" pitchFamily="34" charset="-122"/>
+                <a:cs typeface="Courier New" pitchFamily="34" charset="-120"/>
+              </a:rPr>
+              <a:t>;</a:t>
             </a:r>
             <a:endParaRPr lang="en-US" sz="1050" dirty="0"/>
           </a:p>
@@ -3742,123 +3919,13 @@
             <a:r>
               <a:rPr lang="en-US" sz="1050" dirty="0">
                 <a:solidFill>
-                  <a:srgbClr val="569CD6"/>
-                </a:solidFill>
-                <a:latin typeface="Courier New" pitchFamily="34" charset="0"/>
-                <a:ea typeface="Courier New" pitchFamily="34" charset="-122"/>
-                <a:cs typeface="Courier New" pitchFamily="34" charset="-120"/>
-              </a:rPr>
-              <a:t>define</a:t>
-            </a:r>
-            <a:r>
-              <a:rPr lang="en-US" sz="1050" dirty="0">
-                <a:solidFill>
-                  <a:srgbClr val="CCCCCC"/>
+                  <a:srgbClr val="000000"/>
                 </a:solidFill>
                 <a:latin typeface="Courier New" pitchFamily="34" charset="0"/>
                 <a:ea typeface="Courier New" pitchFamily="34" charset="-122"/>
                 <a:cs typeface="Courier New" pitchFamily="34" charset="-120"/>
               </a:rPr>
               <a:t> </a:t>
-            </a:r>
-            <a:r>
-              <a:rPr lang="en-US" sz="1050" dirty="0">
-                <a:solidFill>
-                  <a:srgbClr val="569CD6"/>
-                </a:solidFill>
-                <a:latin typeface="Courier New" pitchFamily="34" charset="0"/>
-                <a:ea typeface="Courier New" pitchFamily="34" charset="-122"/>
-                <a:cs typeface="Courier New" pitchFamily="34" charset="-120"/>
-              </a:rPr>
-              <a:t>behavior</a:t>
-            </a:r>
-            <a:r>
-              <a:rPr lang="en-US" sz="1050" dirty="0">
-                <a:solidFill>
-                  <a:srgbClr val="CCCCCC"/>
-                </a:solidFill>
-                <a:latin typeface="Courier New" pitchFamily="34" charset="0"/>
-                <a:ea typeface="Courier New" pitchFamily="34" charset="-122"/>
-                <a:cs typeface="Courier New" pitchFamily="34" charset="-120"/>
-              </a:rPr>
-              <a:t> </a:t>
-            </a:r>
-            <a:r>
-              <a:rPr lang="en-US" sz="1050" dirty="0">
-                <a:solidFill>
-                  <a:srgbClr val="569CD6"/>
-                </a:solidFill>
-                <a:latin typeface="Courier New" pitchFamily="34" charset="0"/>
-                <a:ea typeface="Courier New" pitchFamily="34" charset="-122"/>
-                <a:cs typeface="Courier New" pitchFamily="34" charset="-120"/>
-              </a:rPr>
-              <a:t>for</a:t>
-            </a:r>
-            <a:r>
-              <a:rPr lang="en-US" sz="1050" dirty="0">
-                <a:solidFill>
-                  <a:srgbClr val="CCCCCC"/>
-                </a:solidFill>
-                <a:latin typeface="Courier New" pitchFamily="34" charset="0"/>
-                <a:ea typeface="Courier New" pitchFamily="34" charset="-122"/>
-                <a:cs typeface="Courier New" pitchFamily="34" charset="-120"/>
-              </a:rPr>
-              <a:t> </a:t>
-            </a:r>
-            <a:r>
-              <a:rPr lang="en-US" sz="1050" dirty="0">
-                <a:solidFill>
-                  <a:srgbClr val="CCCCCC"/>
-                </a:solidFill>
-                <a:latin typeface="Courier New" pitchFamily="34" charset="0"/>
-                <a:ea typeface="Courier New" pitchFamily="34" charset="-122"/>
-                <a:cs typeface="Courier New" pitchFamily="34" charset="-120"/>
-              </a:rPr>
-              <a:t>/DMO/I_AgencyTP</a:t>
-            </a:r>
-            <a:r>
-              <a:rPr lang="en-US" sz="1050" dirty="0">
-                <a:solidFill>
-                  <a:srgbClr val="CCCCCC"/>
-                </a:solidFill>
-                <a:latin typeface="Courier New" pitchFamily="34" charset="0"/>
-                <a:ea typeface="Courier New" pitchFamily="34" charset="-122"/>
-                <a:cs typeface="Courier New" pitchFamily="34" charset="-120"/>
-              </a:rPr>
-              <a:t> </a:t>
-            </a:r>
-            <a:r>
-              <a:rPr lang="en-US" sz="1050" dirty="0">
-                <a:solidFill>
-                  <a:srgbClr val="569CD6"/>
-                </a:solidFill>
-                <a:latin typeface="Courier New" pitchFamily="34" charset="0"/>
-                <a:ea typeface="Courier New" pitchFamily="34" charset="-122"/>
-                <a:cs typeface="Courier New" pitchFamily="34" charset="-120"/>
-              </a:rPr>
-              <a:t>alias</a:t>
-            </a:r>
-            <a:r>
-              <a:rPr lang="en-US" sz="1050" dirty="0">
-                <a:solidFill>
-                  <a:srgbClr val="CCCCCC"/>
-                </a:solidFill>
-                <a:latin typeface="Courier New" pitchFamily="34" charset="0"/>
-                <a:ea typeface="Courier New" pitchFamily="34" charset="-122"/>
-                <a:cs typeface="Courier New" pitchFamily="34" charset="-120"/>
-              </a:rPr>
-              <a:t> </a:t>
-            </a:r>
-            <a:r>
-              <a:rPr lang="en-US" sz="1050" dirty="0">
-                <a:solidFill>
-                  <a:srgbClr val="CCCCCC"/>
-                </a:solidFill>
-                <a:latin typeface="Courier New" pitchFamily="34" charset="0"/>
-                <a:ea typeface="Courier New" pitchFamily="34" charset="-122"/>
-                <a:cs typeface="Courier New" pitchFamily="34" charset="-120"/>
-              </a:rPr>
-              <a:t>/DMO/Agency</a:t>
             </a:r>
             <a:endParaRPr lang="en-US" sz="1050" dirty="0"/>
           </a:p>
@@ -3870,15 +3937,15 @@
               <a:buNone/>
             </a:pPr>
             <a:r>
-              <a:rPr lang="en-US" sz="1050" dirty="0">
-                <a:solidFill>
-                  <a:srgbClr val="CCCCCC"/>
-                </a:solidFill>
-                <a:latin typeface="Courier New" pitchFamily="34" charset="0"/>
-                <a:ea typeface="Courier New" pitchFamily="34" charset="-122"/>
-                <a:cs typeface="Courier New" pitchFamily="34" charset="-120"/>
-              </a:rPr>
-              <a:t>{</a:t>
+              <a:rPr lang="en-US" sz="1050" i="1" dirty="0">
+                <a:solidFill>
+                  <a:srgbClr val="6A9955"/>
+                </a:solidFill>
+                <a:latin typeface="Courier New" pitchFamily="34" charset="0"/>
+                <a:ea typeface="Courier New" pitchFamily="34" charset="-122"/>
+                <a:cs typeface="Courier New" pitchFamily="34" charset="-120"/>
+              </a:rPr>
+              <a:t>/* ReservarEstoque, LiberarReserva e BaixarEstoque</a:t>
             </a:r>
             <a:endParaRPr lang="en-US" sz="1050" dirty="0"/>
           </a:p>
@@ -3898,18 +3965,40 @@
                 <a:ea typeface="Courier New" pitchFamily="34" charset="-122"/>
                 <a:cs typeface="Courier New" pitchFamily="34" charset="-120"/>
               </a:rPr>
-              <a:t>  </a:t>
-            </a:r>
-            <a:r>
-              <a:rPr lang="en-US" sz="1050" dirty="0">
-                <a:solidFill>
-                  <a:srgbClr val="569CD6"/>
-                </a:solidFill>
-                <a:latin typeface="Courier New" pitchFamily="34" charset="0"/>
-                <a:ea typeface="Courier New" pitchFamily="34" charset="-122"/>
-                <a:cs typeface="Courier New" pitchFamily="34" charset="-120"/>
-              </a:rPr>
-              <a:t>use</a:t>
+              <a:t>   </a:t>
+            </a:r>
+            <a:r>
+              <a:rPr lang="en-US" sz="1050" dirty="0">
+                <a:solidFill>
+                  <a:srgbClr val="CCCCCC"/>
+                </a:solidFill>
+                <a:latin typeface="Courier New" pitchFamily="34" charset="0"/>
+                <a:ea typeface="Courier New" pitchFamily="34" charset="-122"/>
+                <a:cs typeface="Courier New" pitchFamily="34" charset="-120"/>
+              </a:rPr>
+              <a:t>N</a:t>
+            </a:r>
+            <a:r>
+              <a:rPr lang="en-US" sz="1050" dirty="0">
+                <a:solidFill>
+                  <a:srgbClr val="CCCCCC"/>
+                </a:solidFill>
+                <a:latin typeface="Courier New" pitchFamily="34" charset="0"/>
+                <a:ea typeface="Courier New" pitchFamily="34" charset="-122"/>
+                <a:cs typeface="Courier New" pitchFamily="34" charset="-120"/>
+              </a:rPr>
+              <a:t>Ã</a:t>
+            </a:r>
+            <a:r>
+              <a:rPr lang="en-US" sz="1050" dirty="0">
+                <a:solidFill>
+                  <a:srgbClr val="CCCCCC"/>
+                </a:solidFill>
+                <a:latin typeface="Courier New" pitchFamily="34" charset="0"/>
+                <a:ea typeface="Courier New" pitchFamily="34" charset="-122"/>
+                <a:cs typeface="Courier New" pitchFamily="34" charset="-120"/>
+              </a:rPr>
+              <a:t>O</a:t>
             </a:r>
             <a:r>
               <a:rPr lang="en-US" sz="1050" dirty="0">
@@ -3925,24 +4014,255 @@
             <a:r>
               <a:rPr lang="en-US" sz="1050" dirty="0">
                 <a:solidFill>
-                  <a:srgbClr val="569CD6"/>
-                </a:solidFill>
-                <a:latin typeface="Courier New" pitchFamily="34" charset="0"/>
-                <a:ea typeface="Courier New" pitchFamily="34" charset="-122"/>
-                <a:cs typeface="Courier New" pitchFamily="34" charset="-120"/>
-              </a:rPr>
-              <a:t>create</a:t>
-            </a:r>
-            <a:r>
-              <a:rPr lang="en-US" sz="1050" dirty="0">
-                <a:solidFill>
-                  <a:srgbClr val="CCCCCC"/>
-                </a:solidFill>
-                <a:latin typeface="Courier New" pitchFamily="34" charset="0"/>
-                <a:ea typeface="Courier New" pitchFamily="34" charset="-122"/>
-                <a:cs typeface="Courier New" pitchFamily="34" charset="-120"/>
-              </a:rPr>
-              <a:t>;</a:t>
+                  <a:srgbClr val="CCCCCC"/>
+                </a:solidFill>
+                <a:latin typeface="Courier New" pitchFamily="34" charset="0"/>
+                <a:ea typeface="Courier New" pitchFamily="34" charset="-122"/>
+                <a:cs typeface="Courier New" pitchFamily="34" charset="-120"/>
+              </a:rPr>
+              <a:t>s</a:t>
+            </a:r>
+            <a:r>
+              <a:rPr lang="en-US" sz="1050" dirty="0">
+                <a:solidFill>
+                  <a:srgbClr val="CCCCCC"/>
+                </a:solidFill>
+                <a:latin typeface="Courier New" pitchFamily="34" charset="0"/>
+                <a:ea typeface="Courier New" pitchFamily="34" charset="-122"/>
+                <a:cs typeface="Courier New" pitchFamily="34" charset="-120"/>
+              </a:rPr>
+              <a:t>ã</a:t>
+            </a:r>
+            <a:r>
+              <a:rPr lang="en-US" sz="1050" dirty="0">
+                <a:solidFill>
+                  <a:srgbClr val="CCCCCC"/>
+                </a:solidFill>
+                <a:latin typeface="Courier New" pitchFamily="34" charset="0"/>
+                <a:ea typeface="Courier New" pitchFamily="34" charset="-122"/>
+                <a:cs typeface="Courier New" pitchFamily="34" charset="-120"/>
+              </a:rPr>
+              <a:t>o</a:t>
+            </a:r>
+            <a:r>
+              <a:rPr lang="en-US" sz="1050" dirty="0">
+                <a:solidFill>
+                  <a:srgbClr val="CCCCCC"/>
+                </a:solidFill>
+                <a:latin typeface="Courier New" pitchFamily="34" charset="0"/>
+                <a:ea typeface="Courier New" pitchFamily="34" charset="-122"/>
+                <a:cs typeface="Courier New" pitchFamily="34" charset="-120"/>
+              </a:rPr>
+              <a:t> </a:t>
+            </a:r>
+            <a:r>
+              <a:rPr lang="en-US" sz="1050" dirty="0">
+                <a:solidFill>
+                  <a:srgbClr val="CCCCCC"/>
+                </a:solidFill>
+                <a:latin typeface="Courier New" pitchFamily="34" charset="0"/>
+                <a:ea typeface="Courier New" pitchFamily="34" charset="-122"/>
+                <a:cs typeface="Courier New" pitchFamily="34" charset="-120"/>
+              </a:rPr>
+              <a:t>expostas</a:t>
+            </a:r>
+            <a:r>
+              <a:rPr lang="en-US" sz="1050" dirty="0">
+                <a:solidFill>
+                  <a:srgbClr val="CCCCCC"/>
+                </a:solidFill>
+                <a:latin typeface="Courier New" pitchFamily="34" charset="0"/>
+                <a:ea typeface="Courier New" pitchFamily="34" charset="-122"/>
+                <a:cs typeface="Courier New" pitchFamily="34" charset="-120"/>
+              </a:rPr>
+              <a:t>:</a:t>
+            </a:r>
+            <a:r>
+              <a:rPr lang="en-US" sz="1050" dirty="0">
+                <a:solidFill>
+                  <a:srgbClr val="CCCCCC"/>
+                </a:solidFill>
+                <a:latin typeface="Courier New" pitchFamily="34" charset="0"/>
+                <a:ea typeface="Courier New" pitchFamily="34" charset="-122"/>
+                <a:cs typeface="Courier New" pitchFamily="34" charset="-120"/>
+              </a:rPr>
+              <a:t> </a:t>
+            </a:r>
+            <a:r>
+              <a:rPr lang="en-US" sz="1050" dirty="0">
+                <a:solidFill>
+                  <a:srgbClr val="CCCCCC"/>
+                </a:solidFill>
+                <a:latin typeface="Courier New" pitchFamily="34" charset="0"/>
+                <a:ea typeface="Courier New" pitchFamily="34" charset="-122"/>
+                <a:cs typeface="Courier New" pitchFamily="34" charset="-120"/>
+              </a:rPr>
+              <a:t>s</a:t>
+            </a:r>
+            <a:r>
+              <a:rPr lang="en-US" sz="1050" dirty="0">
+                <a:solidFill>
+                  <a:srgbClr val="CCCCCC"/>
+                </a:solidFill>
+                <a:latin typeface="Courier New" pitchFamily="34" charset="0"/>
+                <a:ea typeface="Courier New" pitchFamily="34" charset="-122"/>
+                <a:cs typeface="Courier New" pitchFamily="34" charset="-120"/>
+              </a:rPr>
+              <a:t>ó</a:t>
+            </a:r>
+            <a:r>
+              <a:rPr lang="en-US" sz="1050" dirty="0">
+                <a:solidFill>
+                  <a:srgbClr val="CCCCCC"/>
+                </a:solidFill>
+                <a:latin typeface="Courier New" pitchFamily="34" charset="0"/>
+                <a:ea typeface="Courier New" pitchFamily="34" charset="-122"/>
+                <a:cs typeface="Courier New" pitchFamily="34" charset="-120"/>
+              </a:rPr>
+              <a:t> </a:t>
+            </a:r>
+            <a:r>
+              <a:rPr lang="en-US" sz="1050" dirty="0">
+                <a:solidFill>
+                  <a:srgbClr val="CCCCCC"/>
+                </a:solidFill>
+                <a:latin typeface="Courier New" pitchFamily="34" charset="0"/>
+                <a:ea typeface="Courier New" pitchFamily="34" charset="-122"/>
+                <a:cs typeface="Courier New" pitchFamily="34" charset="-120"/>
+              </a:rPr>
+              <a:t>o</a:t>
+            </a:r>
+            <a:r>
+              <a:rPr lang="en-US" sz="1050" dirty="0">
+                <a:solidFill>
+                  <a:srgbClr val="CCCCCC"/>
+                </a:solidFill>
+                <a:latin typeface="Courier New" pitchFamily="34" charset="0"/>
+                <a:ea typeface="Courier New" pitchFamily="34" charset="-122"/>
+                <a:cs typeface="Courier New" pitchFamily="34" charset="-120"/>
+              </a:rPr>
+              <a:t> </a:t>
+            </a:r>
+            <a:r>
+              <a:rPr lang="en-US" sz="1050" dirty="0">
+                <a:solidFill>
+                  <a:srgbClr val="CCCCCC"/>
+                </a:solidFill>
+                <a:latin typeface="Courier New" pitchFamily="34" charset="0"/>
+                <a:ea typeface="Courier New" pitchFamily="34" charset="-122"/>
+                <a:cs typeface="Courier New" pitchFamily="34" charset="-120"/>
+              </a:rPr>
+              <a:t>BO</a:t>
+            </a:r>
+            <a:r>
+              <a:rPr lang="en-US" sz="1050" dirty="0">
+                <a:solidFill>
+                  <a:srgbClr val="CCCCCC"/>
+                </a:solidFill>
+                <a:latin typeface="Courier New" pitchFamily="34" charset="0"/>
+                <a:ea typeface="Courier New" pitchFamily="34" charset="-122"/>
+                <a:cs typeface="Courier New" pitchFamily="34" charset="-120"/>
+              </a:rPr>
+              <a:t> </a:t>
+            </a:r>
+            <a:r>
+              <a:rPr lang="en-US" sz="1050" dirty="0">
+                <a:solidFill>
+                  <a:srgbClr val="CCCCCC"/>
+                </a:solidFill>
+                <a:latin typeface="Courier New" pitchFamily="34" charset="0"/>
+                <a:ea typeface="Courier New" pitchFamily="34" charset="-122"/>
+                <a:cs typeface="Courier New" pitchFamily="34" charset="-120"/>
+              </a:rPr>
+              <a:t>Pedido</a:t>
+            </a:r>
+            <a:r>
+              <a:rPr lang="en-US" sz="1050" dirty="0">
+                <a:solidFill>
+                  <a:srgbClr val="CCCCCC"/>
+                </a:solidFill>
+                <a:latin typeface="Courier New" pitchFamily="34" charset="0"/>
+                <a:ea typeface="Courier New" pitchFamily="34" charset="-122"/>
+                <a:cs typeface="Courier New" pitchFamily="34" charset="-120"/>
+              </a:rPr>
+              <a:t> </a:t>
+            </a:r>
+            <a:r>
+              <a:rPr lang="en-US" sz="1050" dirty="0">
+                <a:solidFill>
+                  <a:srgbClr val="CCCCCC"/>
+                </a:solidFill>
+                <a:latin typeface="Courier New" pitchFamily="34" charset="0"/>
+                <a:ea typeface="Courier New" pitchFamily="34" charset="-122"/>
+                <a:cs typeface="Courier New" pitchFamily="34" charset="-120"/>
+              </a:rPr>
+              <a:t>movimenta</a:t>
+            </a:r>
+            <a:r>
+              <a:rPr lang="en-US" sz="1050" dirty="0">
+                <a:solidFill>
+                  <a:srgbClr val="CCCCCC"/>
+                </a:solidFill>
+                <a:latin typeface="Courier New" pitchFamily="34" charset="0"/>
+                <a:ea typeface="Courier New" pitchFamily="34" charset="-122"/>
+                <a:cs typeface="Courier New" pitchFamily="34" charset="-120"/>
+              </a:rPr>
+              <a:t> </a:t>
+            </a:r>
+            <a:r>
+              <a:rPr lang="en-US" sz="1050" dirty="0">
+                <a:solidFill>
+                  <a:srgbClr val="CCCCCC"/>
+                </a:solidFill>
+                <a:latin typeface="Courier New" pitchFamily="34" charset="0"/>
+                <a:ea typeface="Courier New" pitchFamily="34" charset="-122"/>
+                <a:cs typeface="Courier New" pitchFamily="34" charset="-120"/>
+              </a:rPr>
+              <a:t>estoque</a:t>
+            </a:r>
+            <a:r>
+              <a:rPr lang="en-US" sz="1050" dirty="0">
+                <a:solidFill>
+                  <a:srgbClr val="CCCCCC"/>
+                </a:solidFill>
+                <a:latin typeface="Courier New" pitchFamily="34" charset="0"/>
+                <a:ea typeface="Courier New" pitchFamily="34" charset="-122"/>
+                <a:cs typeface="Courier New" pitchFamily="34" charset="-120"/>
+              </a:rPr>
+              <a:t>.</a:t>
+            </a:r>
+            <a:r>
+              <a:rPr lang="en-US" sz="1050" dirty="0">
+                <a:solidFill>
+                  <a:srgbClr val="CCCCCC"/>
+                </a:solidFill>
+                <a:latin typeface="Courier New" pitchFamily="34" charset="0"/>
+                <a:ea typeface="Courier New" pitchFamily="34" charset="-122"/>
+                <a:cs typeface="Courier New" pitchFamily="34" charset="-120"/>
+              </a:rPr>
+              <a:t> </a:t>
+            </a:r>
+            <a:r>
+              <a:rPr lang="en-US" sz="1050" dirty="0">
+                <a:solidFill>
+                  <a:srgbClr val="CCCCCC"/>
+                </a:solidFill>
+                <a:latin typeface="Courier New" pitchFamily="34" charset="0"/>
+                <a:ea typeface="Courier New" pitchFamily="34" charset="-122"/>
+                <a:cs typeface="Courier New" pitchFamily="34" charset="-120"/>
+              </a:rPr>
+              <a:t>*</a:t>
+            </a:r>
+            <a:r>
+              <a:rPr lang="en-US" sz="1050" dirty="0">
+                <a:solidFill>
+                  <a:srgbClr val="CCCCCC"/>
+                </a:solidFill>
+                <a:latin typeface="Courier New" pitchFamily="34" charset="0"/>
+                <a:ea typeface="Courier New" pitchFamily="34" charset="-122"/>
+                <a:cs typeface="Courier New" pitchFamily="34" charset="-120"/>
+              </a:rPr>
+              <a:t>/</a:t>
             </a:r>
             <a:endParaRPr lang="en-US" sz="1050" dirty="0"/>
           </a:p>
@@ -3956,24 +4276,13 @@
             <a:r>
               <a:rPr lang="en-US" sz="1050" dirty="0">
                 <a:solidFill>
-                  <a:srgbClr val="CCCCCC"/>
-                </a:solidFill>
-                <a:latin typeface="Courier New" pitchFamily="34" charset="0"/>
-                <a:ea typeface="Courier New" pitchFamily="34" charset="-122"/>
-                <a:cs typeface="Courier New" pitchFamily="34" charset="-120"/>
-              </a:rPr>
-              <a:t>  </a:t>
-            </a:r>
-            <a:r>
-              <a:rPr lang="en-US" sz="1050" dirty="0">
-                <a:solidFill>
                   <a:srgbClr val="569CD6"/>
                 </a:solidFill>
                 <a:latin typeface="Courier New" pitchFamily="34" charset="0"/>
                 <a:ea typeface="Courier New" pitchFamily="34" charset="-122"/>
                 <a:cs typeface="Courier New" pitchFamily="34" charset="-120"/>
               </a:rPr>
-              <a:t>use</a:t>
+              <a:t>define</a:t>
             </a:r>
             <a:r>
               <a:rPr lang="en-US" sz="1050" dirty="0">
@@ -3995,18 +4304,95 @@
                 <a:ea typeface="Courier New" pitchFamily="34" charset="-122"/>
                 <a:cs typeface="Courier New" pitchFamily="34" charset="-120"/>
               </a:rPr>
-              <a:t>update</a:t>
-            </a:r>
-            <a:r>
-              <a:rPr lang="en-US" sz="1050" dirty="0">
-                <a:solidFill>
-                  <a:srgbClr val="CCCCCC"/>
-                </a:solidFill>
-                <a:latin typeface="Courier New" pitchFamily="34" charset="0"/>
-                <a:ea typeface="Courier New" pitchFamily="34" charset="-122"/>
-                <a:cs typeface="Courier New" pitchFamily="34" charset="-120"/>
-              </a:rPr>
-              <a:t>;</a:t>
+              <a:t>behavior</a:t>
+            </a:r>
+            <a:r>
+              <a:rPr lang="en-US" sz="1050" dirty="0">
+                <a:solidFill>
+                  <a:srgbClr val="CCCCCC"/>
+                </a:solidFill>
+                <a:latin typeface="Courier New" pitchFamily="34" charset="0"/>
+                <a:ea typeface="Courier New" pitchFamily="34" charset="-122"/>
+                <a:cs typeface="Courier New" pitchFamily="34" charset="-120"/>
+              </a:rPr>
+              <a:t> </a:t>
+            </a:r>
+            <a:r>
+              <a:rPr lang="en-US" sz="1050" dirty="0">
+                <a:solidFill>
+                  <a:srgbClr val="569CD6"/>
+                </a:solidFill>
+                <a:latin typeface="Courier New" pitchFamily="34" charset="0"/>
+                <a:ea typeface="Courier New" pitchFamily="34" charset="-122"/>
+                <a:cs typeface="Courier New" pitchFamily="34" charset="-120"/>
+              </a:rPr>
+              <a:t>for</a:t>
+            </a:r>
+            <a:r>
+              <a:rPr lang="en-US" sz="1050" dirty="0">
+                <a:solidFill>
+                  <a:srgbClr val="CCCCCC"/>
+                </a:solidFill>
+                <a:latin typeface="Courier New" pitchFamily="34" charset="0"/>
+                <a:ea typeface="Courier New" pitchFamily="34" charset="-122"/>
+                <a:cs typeface="Courier New" pitchFamily="34" charset="-120"/>
+              </a:rPr>
+              <a:t> </a:t>
+            </a:r>
+            <a:r>
+              <a:rPr lang="en-US" sz="1050" dirty="0">
+                <a:solidFill>
+                  <a:srgbClr val="CCCCCC"/>
+                </a:solidFill>
+                <a:latin typeface="Courier New" pitchFamily="34" charset="0"/>
+                <a:ea typeface="Courier New" pitchFamily="34" charset="-122"/>
+                <a:cs typeface="Courier New" pitchFamily="34" charset="-120"/>
+              </a:rPr>
+              <a:t>ZC_PC_ITEM_APP</a:t>
+            </a:r>
+            <a:r>
+              <a:rPr lang="en-US" sz="1050" dirty="0">
+                <a:solidFill>
+                  <a:srgbClr val="CCCCCC"/>
+                </a:solidFill>
+                <a:latin typeface="Courier New" pitchFamily="34" charset="0"/>
+                <a:ea typeface="Courier New" pitchFamily="34" charset="-122"/>
+                <a:cs typeface="Courier New" pitchFamily="34" charset="-120"/>
+              </a:rPr>
+              <a:t> </a:t>
+            </a:r>
+            <a:r>
+              <a:rPr lang="en-US" sz="1050" dirty="0">
+                <a:solidFill>
+                  <a:srgbClr val="569CD6"/>
+                </a:solidFill>
+                <a:latin typeface="Courier New" pitchFamily="34" charset="0"/>
+                <a:ea typeface="Courier New" pitchFamily="34" charset="-122"/>
+                <a:cs typeface="Courier New" pitchFamily="34" charset="-120"/>
+              </a:rPr>
+              <a:t>alias</a:t>
+            </a:r>
+            <a:r>
+              <a:rPr lang="en-US" sz="1050" dirty="0">
+                <a:solidFill>
+                  <a:srgbClr val="CCCCCC"/>
+                </a:solidFill>
+                <a:latin typeface="Courier New" pitchFamily="34" charset="0"/>
+                <a:ea typeface="Courier New" pitchFamily="34" charset="-122"/>
+                <a:cs typeface="Courier New" pitchFamily="34" charset="-120"/>
+              </a:rPr>
+              <a:t> </a:t>
+            </a:r>
+            <a:r>
+              <a:rPr lang="en-US" sz="1050" dirty="0">
+                <a:solidFill>
+                  <a:srgbClr val="CCCCCC"/>
+                </a:solidFill>
+                <a:latin typeface="Courier New" pitchFamily="34" charset="0"/>
+                <a:ea typeface="Courier New" pitchFamily="34" charset="-122"/>
+                <a:cs typeface="Courier New" pitchFamily="34" charset="-120"/>
+              </a:rPr>
+              <a:t>Item</a:t>
             </a:r>
             <a:endParaRPr lang="en-US" sz="1050" dirty="0"/>
           </a:p>
@@ -4020,17 +4406,6 @@
             <a:r>
               <a:rPr lang="en-US" sz="1050" dirty="0">
                 <a:solidFill>
-                  <a:srgbClr val="CCCCCC"/>
-                </a:solidFill>
-                <a:latin typeface="Courier New" pitchFamily="34" charset="0"/>
-                <a:ea typeface="Courier New" pitchFamily="34" charset="-122"/>
-                <a:cs typeface="Courier New" pitchFamily="34" charset="-120"/>
-              </a:rPr>
-              <a:t>  </a:t>
-            </a:r>
-            <a:r>
-              <a:rPr lang="en-US" sz="1050" dirty="0">
-                <a:solidFill>
                   <a:srgbClr val="569CD6"/>
                 </a:solidFill>
                 <a:latin typeface="Courier New" pitchFamily="34" charset="0"/>
@@ -4059,18 +4434,7 @@
                 <a:ea typeface="Courier New" pitchFamily="34" charset="-122"/>
                 <a:cs typeface="Courier New" pitchFamily="34" charset="-120"/>
               </a:rPr>
-              <a:t>delete</a:t>
-            </a:r>
-            <a:r>
-              <a:rPr lang="en-US" sz="1050" dirty="0">
-                <a:solidFill>
-                  <a:srgbClr val="CCCCCC"/>
-                </a:solidFill>
-                <a:latin typeface="Courier New" pitchFamily="34" charset="0"/>
-                <a:ea typeface="Courier New" pitchFamily="34" charset="-122"/>
-                <a:cs typeface="Courier New" pitchFamily="34" charset="-120"/>
-              </a:rPr>
-              <a:t>;</a:t>
+              <a:t>etag</a:t>
             </a:r>
             <a:endParaRPr lang="en-US" sz="1050" dirty="0"/>
           </a:p>
@@ -4090,6 +4454,304 @@
                 <a:ea typeface="Courier New" pitchFamily="34" charset="-122"/>
                 <a:cs typeface="Courier New" pitchFamily="34" charset="-120"/>
               </a:rPr>
+              <a:t>{</a:t>
+            </a:r>
+            <a:endParaRPr lang="en-US" sz="1050" dirty="0"/>
+          </a:p>
+          <a:p>
+            <a:pPr indent="0" marL="0">
+              <a:lnSpc>
+                <a:spcPct val="105000"/>
+              </a:lnSpc>
+              <a:buNone/>
+            </a:pPr>
+            <a:r>
+              <a:rPr lang="en-US" sz="1050" dirty="0">
+                <a:solidFill>
+                  <a:srgbClr val="CCCCCC"/>
+                </a:solidFill>
+                <a:latin typeface="Courier New" pitchFamily="34" charset="0"/>
+                <a:ea typeface="Courier New" pitchFamily="34" charset="-122"/>
+                <a:cs typeface="Courier New" pitchFamily="34" charset="-120"/>
+              </a:rPr>
+              <a:t>  </a:t>
+            </a:r>
+            <a:r>
+              <a:rPr lang="en-US" sz="1050" dirty="0">
+                <a:solidFill>
+                  <a:srgbClr val="569CD6"/>
+                </a:solidFill>
+                <a:latin typeface="Courier New" pitchFamily="34" charset="0"/>
+                <a:ea typeface="Courier New" pitchFamily="34" charset="-122"/>
+                <a:cs typeface="Courier New" pitchFamily="34" charset="-120"/>
+              </a:rPr>
+              <a:t>use</a:t>
+            </a:r>
+            <a:r>
+              <a:rPr lang="en-US" sz="1050" dirty="0">
+                <a:solidFill>
+                  <a:srgbClr val="CCCCCC"/>
+                </a:solidFill>
+                <a:latin typeface="Courier New" pitchFamily="34" charset="0"/>
+                <a:ea typeface="Courier New" pitchFamily="34" charset="-122"/>
+                <a:cs typeface="Courier New" pitchFamily="34" charset="-120"/>
+              </a:rPr>
+              <a:t> </a:t>
+            </a:r>
+            <a:r>
+              <a:rPr lang="en-US" sz="1050" dirty="0">
+                <a:solidFill>
+                  <a:srgbClr val="569CD6"/>
+                </a:solidFill>
+                <a:latin typeface="Courier New" pitchFamily="34" charset="0"/>
+                <a:ea typeface="Courier New" pitchFamily="34" charset="-122"/>
+                <a:cs typeface="Courier New" pitchFamily="34" charset="-120"/>
+              </a:rPr>
+              <a:t>create</a:t>
+            </a:r>
+            <a:r>
+              <a:rPr lang="en-US" sz="1050" dirty="0">
+                <a:solidFill>
+                  <a:srgbClr val="CCCCCC"/>
+                </a:solidFill>
+                <a:latin typeface="Courier New" pitchFamily="34" charset="0"/>
+                <a:ea typeface="Courier New" pitchFamily="34" charset="-122"/>
+                <a:cs typeface="Courier New" pitchFamily="34" charset="-120"/>
+              </a:rPr>
+              <a:t>;</a:t>
+            </a:r>
+            <a:endParaRPr lang="en-US" sz="1050" dirty="0"/>
+          </a:p>
+          <a:p>
+            <a:pPr indent="0" marL="0">
+              <a:lnSpc>
+                <a:spcPct val="105000"/>
+              </a:lnSpc>
+              <a:buNone/>
+            </a:pPr>
+            <a:r>
+              <a:rPr lang="en-US" sz="1050" dirty="0">
+                <a:solidFill>
+                  <a:srgbClr val="CCCCCC"/>
+                </a:solidFill>
+                <a:latin typeface="Courier New" pitchFamily="34" charset="0"/>
+                <a:ea typeface="Courier New" pitchFamily="34" charset="-122"/>
+                <a:cs typeface="Courier New" pitchFamily="34" charset="-120"/>
+              </a:rPr>
+              <a:t>  </a:t>
+            </a:r>
+            <a:r>
+              <a:rPr lang="en-US" sz="1050" dirty="0">
+                <a:solidFill>
+                  <a:srgbClr val="569CD6"/>
+                </a:solidFill>
+                <a:latin typeface="Courier New" pitchFamily="34" charset="0"/>
+                <a:ea typeface="Courier New" pitchFamily="34" charset="-122"/>
+                <a:cs typeface="Courier New" pitchFamily="34" charset="-120"/>
+              </a:rPr>
+              <a:t>use</a:t>
+            </a:r>
+            <a:r>
+              <a:rPr lang="en-US" sz="1050" dirty="0">
+                <a:solidFill>
+                  <a:srgbClr val="CCCCCC"/>
+                </a:solidFill>
+                <a:latin typeface="Courier New" pitchFamily="34" charset="0"/>
+                <a:ea typeface="Courier New" pitchFamily="34" charset="-122"/>
+                <a:cs typeface="Courier New" pitchFamily="34" charset="-120"/>
+              </a:rPr>
+              <a:t> </a:t>
+            </a:r>
+            <a:r>
+              <a:rPr lang="en-US" sz="1050" dirty="0">
+                <a:solidFill>
+                  <a:srgbClr val="569CD6"/>
+                </a:solidFill>
+                <a:latin typeface="Courier New" pitchFamily="34" charset="0"/>
+                <a:ea typeface="Courier New" pitchFamily="34" charset="-122"/>
+                <a:cs typeface="Courier New" pitchFamily="34" charset="-120"/>
+              </a:rPr>
+              <a:t>update</a:t>
+            </a:r>
+            <a:r>
+              <a:rPr lang="en-US" sz="1050" dirty="0">
+                <a:solidFill>
+                  <a:srgbClr val="CCCCCC"/>
+                </a:solidFill>
+                <a:latin typeface="Courier New" pitchFamily="34" charset="0"/>
+                <a:ea typeface="Courier New" pitchFamily="34" charset="-122"/>
+                <a:cs typeface="Courier New" pitchFamily="34" charset="-120"/>
+              </a:rPr>
+              <a:t>;</a:t>
+            </a:r>
+            <a:endParaRPr lang="en-US" sz="1050" dirty="0"/>
+          </a:p>
+          <a:p>
+            <a:pPr indent="0" marL="0">
+              <a:lnSpc>
+                <a:spcPct val="105000"/>
+              </a:lnSpc>
+              <a:buNone/>
+            </a:pPr>
+            <a:r>
+              <a:rPr lang="en-US" sz="1050" dirty="0">
+                <a:solidFill>
+                  <a:srgbClr val="CCCCCC"/>
+                </a:solidFill>
+                <a:latin typeface="Courier New" pitchFamily="34" charset="0"/>
+                <a:ea typeface="Courier New" pitchFamily="34" charset="-122"/>
+                <a:cs typeface="Courier New" pitchFamily="34" charset="-120"/>
+              </a:rPr>
+              <a:t>  </a:t>
+            </a:r>
+            <a:r>
+              <a:rPr lang="en-US" sz="1050" dirty="0">
+                <a:solidFill>
+                  <a:srgbClr val="569CD6"/>
+                </a:solidFill>
+                <a:latin typeface="Courier New" pitchFamily="34" charset="0"/>
+                <a:ea typeface="Courier New" pitchFamily="34" charset="-122"/>
+                <a:cs typeface="Courier New" pitchFamily="34" charset="-120"/>
+              </a:rPr>
+              <a:t>use</a:t>
+            </a:r>
+            <a:r>
+              <a:rPr lang="en-US" sz="1050" dirty="0">
+                <a:solidFill>
+                  <a:srgbClr val="CCCCCC"/>
+                </a:solidFill>
+                <a:latin typeface="Courier New" pitchFamily="34" charset="0"/>
+                <a:ea typeface="Courier New" pitchFamily="34" charset="-122"/>
+                <a:cs typeface="Courier New" pitchFamily="34" charset="-120"/>
+              </a:rPr>
+              <a:t> </a:t>
+            </a:r>
+            <a:r>
+              <a:rPr lang="en-US" sz="1050" dirty="0">
+                <a:solidFill>
+                  <a:srgbClr val="569CD6"/>
+                </a:solidFill>
+                <a:latin typeface="Courier New" pitchFamily="34" charset="0"/>
+                <a:ea typeface="Courier New" pitchFamily="34" charset="-122"/>
+                <a:cs typeface="Courier New" pitchFamily="34" charset="-120"/>
+              </a:rPr>
+              <a:t>delete</a:t>
+            </a:r>
+            <a:r>
+              <a:rPr lang="en-US" sz="1050" dirty="0">
+                <a:solidFill>
+                  <a:srgbClr val="CCCCCC"/>
+                </a:solidFill>
+                <a:latin typeface="Courier New" pitchFamily="34" charset="0"/>
+                <a:ea typeface="Courier New" pitchFamily="34" charset="-122"/>
+                <a:cs typeface="Courier New" pitchFamily="34" charset="-120"/>
+              </a:rPr>
+              <a:t>;</a:t>
+            </a:r>
+            <a:endParaRPr lang="en-US" sz="1050" dirty="0"/>
+          </a:p>
+          <a:p>
+            <a:pPr indent="0" marL="0">
+              <a:lnSpc>
+                <a:spcPct val="105000"/>
+              </a:lnSpc>
+              <a:buNone/>
+            </a:pPr>
+            <a:r>
+              <a:rPr lang="en-US" sz="1050" dirty="0">
+                <a:solidFill>
+                  <a:srgbClr val="CCCCCC"/>
+                </a:solidFill>
+                <a:latin typeface="Courier New" pitchFamily="34" charset="0"/>
+                <a:ea typeface="Courier New" pitchFamily="34" charset="-122"/>
+                <a:cs typeface="Courier New" pitchFamily="34" charset="-120"/>
+              </a:rPr>
+              <a:t>  </a:t>
+            </a:r>
+            <a:r>
+              <a:rPr lang="en-US" sz="1050" dirty="0">
+                <a:solidFill>
+                  <a:srgbClr val="569CD6"/>
+                </a:solidFill>
+                <a:latin typeface="Courier New" pitchFamily="34" charset="0"/>
+                <a:ea typeface="Courier New" pitchFamily="34" charset="-122"/>
+                <a:cs typeface="Courier New" pitchFamily="34" charset="-120"/>
+              </a:rPr>
+              <a:t>use</a:t>
+            </a:r>
+            <a:r>
+              <a:rPr lang="en-US" sz="1050" dirty="0">
+                <a:solidFill>
+                  <a:srgbClr val="CCCCCC"/>
+                </a:solidFill>
+                <a:latin typeface="Courier New" pitchFamily="34" charset="0"/>
+                <a:ea typeface="Courier New" pitchFamily="34" charset="-122"/>
+                <a:cs typeface="Courier New" pitchFamily="34" charset="-120"/>
+              </a:rPr>
+              <a:t> </a:t>
+            </a:r>
+            <a:r>
+              <a:rPr lang="en-US" sz="1050" dirty="0">
+                <a:solidFill>
+                  <a:srgbClr val="569CD6"/>
+                </a:solidFill>
+                <a:latin typeface="Courier New" pitchFamily="34" charset="0"/>
+                <a:ea typeface="Courier New" pitchFamily="34" charset="-122"/>
+                <a:cs typeface="Courier New" pitchFamily="34" charset="-120"/>
+              </a:rPr>
+              <a:t>action</a:t>
+            </a:r>
+            <a:r>
+              <a:rPr lang="en-US" sz="1050" dirty="0">
+                <a:solidFill>
+                  <a:srgbClr val="CCCCCC"/>
+                </a:solidFill>
+                <a:latin typeface="Courier New" pitchFamily="34" charset="0"/>
+                <a:ea typeface="Courier New" pitchFamily="34" charset="-122"/>
+                <a:cs typeface="Courier New" pitchFamily="34" charset="-120"/>
+              </a:rPr>
+              <a:t> </a:t>
+            </a:r>
+            <a:r>
+              <a:rPr lang="en-US" sz="1050" dirty="0">
+                <a:solidFill>
+                  <a:srgbClr val="CCCCCC"/>
+                </a:solidFill>
+                <a:latin typeface="Courier New" pitchFamily="34" charset="0"/>
+                <a:ea typeface="Courier New" pitchFamily="34" charset="-122"/>
+                <a:cs typeface="Courier New" pitchFamily="34" charset="-120"/>
+              </a:rPr>
+              <a:t>ImportarPlanilha</a:t>
+            </a:r>
+            <a:r>
+              <a:rPr lang="en-US" sz="1050" dirty="0">
+                <a:solidFill>
+                  <a:srgbClr val="CCCCCC"/>
+                </a:solidFill>
+                <a:latin typeface="Courier New" pitchFamily="34" charset="0"/>
+                <a:ea typeface="Courier New" pitchFamily="34" charset="-122"/>
+                <a:cs typeface="Courier New" pitchFamily="34" charset="-120"/>
+              </a:rPr>
+              <a:t>;</a:t>
+            </a:r>
+            <a:endParaRPr lang="en-US" sz="1050" dirty="0"/>
+          </a:p>
+          <a:p>
+            <a:pPr indent="0" marL="0">
+              <a:lnSpc>
+                <a:spcPct val="105000"/>
+              </a:lnSpc>
+              <a:buNone/>
+            </a:pPr>
+            <a:r>
+              <a:rPr lang="en-US" sz="1050" dirty="0">
+                <a:solidFill>
+                  <a:srgbClr val="CCCCCC"/>
+                </a:solidFill>
+                <a:latin typeface="Courier New" pitchFamily="34" charset="0"/>
+                <a:ea typeface="Courier New" pitchFamily="34" charset="-122"/>
+                <a:cs typeface="Courier New" pitchFamily="34" charset="-120"/>
+              </a:rPr>
               <a:t>}</a:t>
             </a:r>
             <a:endParaRPr lang="en-US" sz="1050" dirty="0"/>
@@ -4105,11 +4767,11 @@
         <p:spPr>
           <a:xfrm>
             <a:off x="7452360" y="1645920"/>
-            <a:ext cx="4190695" cy="3108960"/>
+            <a:ext cx="4190695" cy="3611880"/>
           </a:xfrm>
           <a:prstGeom prst="roundRect">
             <a:avLst>
-              <a:gd name="adj" fmla="val 2941"/>
+              <a:gd name="adj" fmla="val 2532"/>
             </a:avLst>
           </a:prstGeom>
           <a:solidFill>
@@ -4195,7 +4857,7 @@
         <p:spPr>
           <a:xfrm>
             <a:off x="8092440" y="1856232"/>
-            <a:ext cx="3367735" cy="868680"/>
+            <a:ext cx="3367735" cy="1036320"/>
           </a:xfrm>
           <a:prstGeom prst="rect">
             <a:avLst/>
@@ -4222,7 +4884,7 @@
                 <a:ea typeface="Courier New" pitchFamily="34" charset="-122"/>
                 <a:cs typeface="Courier New" pitchFamily="34" charset="-120"/>
               </a:rPr>
-              <a:t>interface;</a:t>
+              <a:t>projection;</a:t>
             </a:r>
             <a:endParaRPr lang="en-US" sz="1400" dirty="0"/>
           </a:p>
@@ -4236,7 +4898,7 @@
                   <a:srgbClr val="556B82"/>
                 </a:solidFill>
               </a:rPr>
-              <a:t>Uma camada de comportamento sobre o business object, sem implementação própria.</a:t>
+              <a:t>Uma camada de comportamento sobre o business object, voltada a um serviço.</a:t>
             </a:r>
             <a:endParaRPr lang="en-US" sz="1400" dirty="0"/>
           </a:p>
@@ -4250,7 +4912,7 @@
         </p:nvSpPr>
         <p:spPr>
           <a:xfrm>
-            <a:off x="7653528" y="2788920"/>
+            <a:off x="7653528" y="2956560"/>
             <a:ext cx="310896" cy="310896"/>
           </a:xfrm>
           <a:prstGeom prst="ellipse">
@@ -4270,7 +4932,7 @@
         </p:nvSpPr>
         <p:spPr>
           <a:xfrm>
-            <a:off x="7653528" y="2788920"/>
+            <a:off x="7653528" y="2956560"/>
             <a:ext cx="310896" cy="310896"/>
           </a:xfrm>
           <a:prstGeom prst="rect">
@@ -4306,8 +4968,8 @@
         </p:nvSpPr>
         <p:spPr>
           <a:xfrm>
-            <a:off x="8092440" y="2770632"/>
-            <a:ext cx="3367735" cy="868680"/>
+            <a:off x="8092440" y="2938272"/>
+            <a:ext cx="3367735" cy="1036320"/>
           </a:xfrm>
           <a:prstGeom prst="rect">
             <a:avLst/>
@@ -4353,7 +5015,7 @@
                   <a:srgbClr val="556B82"/>
                 </a:solidFill>
               </a:rPr>
-              <a:t>Só as operações listadas podem ser usadas pela EML; as outras dão erro de sintaxe.</a:t>
+              <a:t>Só o que for listado fica disponível; as actions de estoque ficam escondidas do app.</a:t>
             </a:r>
             <a:endParaRPr lang="en-US" sz="1400" dirty="0"/>
           </a:p>
@@ -4367,7 +5029,7 @@
         </p:nvSpPr>
         <p:spPr>
           <a:xfrm>
-            <a:off x="7653528" y="3703320"/>
+            <a:off x="7653528" y="4038600"/>
             <a:ext cx="310896" cy="310896"/>
           </a:xfrm>
           <a:prstGeom prst="ellipse">
@@ -4387,7 +5049,7 @@
         </p:nvSpPr>
         <p:spPr>
           <a:xfrm>
-            <a:off x="7653528" y="3703320"/>
+            <a:off x="7653528" y="4038600"/>
             <a:ext cx="310896" cy="310896"/>
           </a:xfrm>
           <a:prstGeom prst="rect">
@@ -4423,8 +5085,8 @@
         </p:nvSpPr>
         <p:spPr>
           <a:xfrm>
-            <a:off x="8092440" y="3685032"/>
-            <a:ext cx="3367735" cy="868680"/>
+            <a:off x="8092440" y="4020312"/>
+            <a:ext cx="3367735" cy="1036320"/>
           </a:xfrm>
           <a:prstGeom prst="rect">
             <a:avLst/>
@@ -4448,7 +5110,7 @@
                   <a:srgbClr val="1D2D3E"/>
                 </a:solidFill>
               </a:rPr>
-              <a:t>Mesmo alias</a:t>
+              <a:t>BO interface</a:t>
             </a:r>
             <a:endParaRPr lang="en-US" sz="1400" dirty="0"/>
           </a:p>
@@ -4462,7 +5124,7 @@
                   <a:srgbClr val="556B82"/>
                 </a:solidFill>
               </a:rPr>
-              <a:t>Os consumidores endereçam </a:t>
+              <a:t>Tem a mesma forma (</a:t>
             </a:r>
             <a:r>
               <a:rPr lang="en-US" sz="1050" dirty="0">
@@ -4473,7 +5135,7 @@
                 <a:ea typeface="Courier New" pitchFamily="34" charset="-122"/>
                 <a:cs typeface="Courier New" pitchFamily="34" charset="-120"/>
               </a:rPr>
-              <a:t>ENTITY /dmo/agency</a:t>
+              <a:t>interface;</a:t>
             </a:r>
             <a:r>
               <a:rPr lang="en-US" sz="1050" dirty="0">
@@ -4481,7 +5143,7 @@
                   <a:srgbClr val="556B82"/>
                 </a:solidFill>
               </a:rPr>
-              <a:t>.</a:t>
+              <a:t>), mas serve ao consumo por EML de outros componentes.</a:t>
             </a:r>
             <a:endParaRPr lang="en-US" sz="1400" dirty="0"/>
           </a:p>
@@ -4495,7 +5157,7 @@
         </p:nvSpPr>
         <p:spPr>
           <a:xfrm>
-            <a:off x="548640" y="4864608"/>
+            <a:off x="548640" y="5367528"/>
             <a:ext cx="11094415" cy="502920"/>
           </a:xfrm>
           <a:prstGeom prst="roundRect">
@@ -4517,7 +5179,7 @@
         </p:nvSpPr>
         <p:spPr>
           <a:xfrm>
-            <a:off x="1207008" y="4864608"/>
+            <a:off x="1207008" y="5367528"/>
             <a:ext cx="10225735" cy="502920"/>
           </a:xfrm>
           <a:prstGeom prst="rect">
@@ -4539,7 +5201,7 @@
                   <a:srgbClr val="0064D9"/>
                 </a:solidFill>
               </a:rPr>
-              <a:t>No exercício oficial  </a:t>
+              <a:t>No projeto  </a:t>
             </a:r>
             <a:r>
               <a:rPr lang="en-US" sz="1200" dirty="0">
@@ -4547,7 +5209,7 @@
                   <a:srgbClr val="1D2D3E"/>
                 </a:solidFill>
               </a:rPr>
-              <a:t>a EML acessa </a:t>
+              <a:t>só existem projeções (</a:t>
             </a:r>
             <a:r>
               <a:rPr lang="en-US" sz="1200" dirty="0">
@@ -4558,7 +5220,7 @@
                 <a:ea typeface="Courier New" pitchFamily="34" charset="-122"/>
                 <a:cs typeface="Courier New" pitchFamily="34" charset="-120"/>
               </a:rPr>
-              <a:t>/DMO/I_AgencyTP</a:t>
+              <a:t>ZC_*</a:t>
             </a:r>
             <a:r>
               <a:rPr lang="en-US" sz="1200" dirty="0">
@@ -4566,7 +5228,7 @@
                   <a:srgbClr val="1D2D3E"/>
                 </a:solidFill>
               </a:rPr>
-              <a:t>, a interface liberada, e não </a:t>
+              <a:t>), uma por app. A EML do pedido chama direto o BO </a:t>
             </a:r>
             <a:r>
               <a:rPr lang="en-US" sz="1200" dirty="0">
@@ -4577,7 +5239,7 @@
                 <a:ea typeface="Courier New" pitchFamily="34" charset="-122"/>
                 <a:cs typeface="Courier New" pitchFamily="34" charset="-120"/>
               </a:rPr>
-              <a:t>/DMO/R_AgencyTP</a:t>
+              <a:t>ZR_PC_ITEM</a:t>
             </a:r>
             <a:r>
               <a:rPr lang="en-US" sz="1200" dirty="0">
@@ -4585,7 +5247,7 @@
                   <a:srgbClr val="1D2D3E"/>
                 </a:solidFill>
               </a:rPr>
-              <a:t>.</a:t>
+              <a:t>, que está no mesmo projeto.</a:t>
             </a:r>
             <a:endParaRPr lang="en-US" sz="1400" dirty="0"/>
           </a:p>
@@ -4607,7 +5269,7 @@
         </p:blipFill>
         <p:spPr>
           <a:xfrm>
-            <a:off x="749808" y="4960620"/>
+            <a:off x="749808" y="5463540"/>
             <a:ext cx="310896" cy="310896"/>
           </a:xfrm>
           <a:prstGeom prst="rect">
@@ -5292,7 +5954,7 @@
         <p:spPr>
           <a:xfrm>
             <a:off x="640080" y="1700784"/>
-            <a:ext cx="1920240" cy="292608"/>
+            <a:ext cx="2308860" cy="292608"/>
           </a:xfrm>
           <a:prstGeom prst="rect">
             <a:avLst/>
@@ -5312,7 +5974,7 @@
         <p:spPr>
           <a:xfrm>
             <a:off x="640080" y="1700784"/>
-            <a:ext cx="1920240" cy="27432"/>
+            <a:ext cx="2308860" cy="27432"/>
           </a:xfrm>
           <a:prstGeom prst="rect">
             <a:avLst/>
@@ -5332,7 +5994,7 @@
         <p:spPr>
           <a:xfrm>
             <a:off x="731520" y="1719072"/>
-            <a:ext cx="1737360" cy="274320"/>
+            <a:ext cx="2125980" cy="274320"/>
           </a:xfrm>
           <a:prstGeom prst="rect">
             <a:avLst/>
@@ -5353,7 +6015,7 @@
                   <a:srgbClr val="FFFFFF"/>
                 </a:solidFill>
               </a:rPr>
-              <a:t>zcl_07_eml.clas.abap</a:t>
+              <a:t>zcl_pc_eml_demo.clas.abap</a:t>
             </a:r>
             <a:endParaRPr lang="en-US" sz="950" dirty="0"/>
           </a:p>
@@ -5389,7 +6051,7 @@
                   <a:srgbClr val="9DA5B4"/>
                 </a:solidFill>
               </a:rPr>
-              <a:t>ZS4D400_## › ZCL_07_EML › main</a:t>
+              <a:t>Exemplo sobre o BO ZR_PC_ITEM › main</a:t>
             </a:r>
             <a:endParaRPr lang="en-US" sz="850" dirty="0"/>
           </a:p>
@@ -5715,7 +6377,7 @@
                 <a:ea typeface="Courier New" pitchFamily="34" charset="-122"/>
                 <a:cs typeface="Courier New" pitchFamily="34" charset="-120"/>
               </a:rPr>
-              <a:t>agencies_in</a:t>
+              <a:t>itens_in</a:t>
             </a:r>
             <a:r>
               <a:rPr lang="en-US" sz="1050" dirty="0">
@@ -5841,13 +6503,13 @@
             <a:r>
               <a:rPr lang="en-US" sz="1050" dirty="0">
                 <a:solidFill>
-                  <a:srgbClr val="4EC9B0"/>
-                </a:solidFill>
-                <a:latin typeface="Courier New" pitchFamily="34" charset="0"/>
-                <a:ea typeface="Courier New" pitchFamily="34" charset="-122"/>
-                <a:cs typeface="Courier New" pitchFamily="34" charset="-120"/>
-              </a:rPr>
-              <a:t>/dmo/i_agencytp</a:t>
+                  <a:srgbClr val="CCCCCC"/>
+                </a:solidFill>
+                <a:latin typeface="Courier New" pitchFamily="34" charset="0"/>
+                <a:ea typeface="Courier New" pitchFamily="34" charset="-122"/>
+                <a:cs typeface="Courier New" pitchFamily="34" charset="-120"/>
+              </a:rPr>
+              <a:t>zr_pc_item</a:t>
             </a:r>
             <a:r>
               <a:rPr lang="en-US" sz="1050" dirty="0">
@@ -5900,7 +6562,7 @@
                 <a:ea typeface="Courier New" pitchFamily="34" charset="-122"/>
                 <a:cs typeface="Courier New" pitchFamily="34" charset="-120"/>
               </a:rPr>
-              <a:t>agencies_out</a:t>
+              <a:t>itens_out</a:t>
             </a:r>
             <a:r>
               <a:rPr lang="en-US" sz="1050" dirty="0">
@@ -6026,13 +6688,13 @@
             <a:r>
               <a:rPr lang="en-US" sz="1050" dirty="0">
                 <a:solidFill>
-                  <a:srgbClr val="4EC9B0"/>
-                </a:solidFill>
-                <a:latin typeface="Courier New" pitchFamily="34" charset="0"/>
-                <a:ea typeface="Courier New" pitchFamily="34" charset="-122"/>
-                <a:cs typeface="Courier New" pitchFamily="34" charset="-120"/>
-              </a:rPr>
-              <a:t>/dmo/i_agencytp</a:t>
+                  <a:srgbClr val="CCCCCC"/>
+                </a:solidFill>
+                <a:latin typeface="Courier New" pitchFamily="34" charset="0"/>
+                <a:ea typeface="Courier New" pitchFamily="34" charset="-122"/>
+                <a:cs typeface="Courier New" pitchFamily="34" charset="-120"/>
+              </a:rPr>
+              <a:t>zr_pc_item</a:t>
             </a:r>
             <a:r>
               <a:rPr lang="en-US" sz="1050" dirty="0">
@@ -6083,7 +6745,7 @@
                 <a:ea typeface="Courier New" pitchFamily="34" charset="-122"/>
                 <a:cs typeface="Courier New" pitchFamily="34" charset="-120"/>
               </a:rPr>
-              <a:t>agencies_in</a:t>
+              <a:t>itens_in</a:t>
             </a:r>
             <a:r>
               <a:rPr lang="en-US" sz="1050" dirty="0">
@@ -6204,7 +6866,7 @@
                 <a:ea typeface="Courier New" pitchFamily="34" charset="-122"/>
                 <a:cs typeface="Courier New" pitchFamily="34" charset="-120"/>
               </a:rPr>
-              <a:t>agencyid</a:t>
+              <a:t>ItemUUID</a:t>
             </a:r>
             <a:r>
               <a:rPr lang="en-US" sz="1050" dirty="0">
@@ -6242,13 +6904,13 @@
             <a:r>
               <a:rPr lang="en-US" sz="1050" dirty="0">
                 <a:solidFill>
-                  <a:srgbClr val="CE9178"/>
-                </a:solidFill>
-                <a:latin typeface="Courier New" pitchFamily="34" charset="0"/>
-                <a:ea typeface="Courier New" pitchFamily="34" charset="-122"/>
-                <a:cs typeface="Courier New" pitchFamily="34" charset="-120"/>
-              </a:rPr>
-              <a:t>'070001'</a:t>
+                  <a:srgbClr val="CCCCCC"/>
+                </a:solidFill>
+                <a:latin typeface="Courier New" pitchFamily="34" charset="0"/>
+                <a:ea typeface="Courier New" pitchFamily="34" charset="-122"/>
+                <a:cs typeface="Courier New" pitchFamily="34" charset="-120"/>
+              </a:rPr>
+              <a:t>item_uuid</a:t>
             </a:r>
             <a:r>
               <a:rPr lang="en-US" sz="1050" dirty="0">
@@ -6403,13 +7065,13 @@
             <a:r>
               <a:rPr lang="en-US" sz="1050" dirty="0">
                 <a:solidFill>
-                  <a:srgbClr val="4EC9B0"/>
-                </a:solidFill>
-                <a:latin typeface="Courier New" pitchFamily="34" charset="0"/>
-                <a:ea typeface="Courier New" pitchFamily="34" charset="-122"/>
-                <a:cs typeface="Courier New" pitchFamily="34" charset="-120"/>
-              </a:rPr>
-              <a:t>/dmo/i_agencytp</a:t>
+                  <a:srgbClr val="CCCCCC"/>
+                </a:solidFill>
+                <a:latin typeface="Courier New" pitchFamily="34" charset="0"/>
+                <a:ea typeface="Courier New" pitchFamily="34" charset="-122"/>
+                <a:cs typeface="Courier New" pitchFamily="34" charset="-120"/>
+              </a:rPr>
+              <a:t>zr_pc_item</a:t>
             </a:r>
             <a:endParaRPr lang="en-US" sz="1050" dirty="0"/>
           </a:p>
@@ -6456,13 +7118,13 @@
             <a:r>
               <a:rPr lang="en-US" sz="1050" dirty="0">
                 <a:solidFill>
-                  <a:srgbClr val="4EC9B0"/>
-                </a:solidFill>
-                <a:latin typeface="Courier New" pitchFamily="34" charset="0"/>
-                <a:ea typeface="Courier New" pitchFamily="34" charset="-122"/>
-                <a:cs typeface="Courier New" pitchFamily="34" charset="-120"/>
-              </a:rPr>
-              <a:t>/dmo/agency</a:t>
+                  <a:srgbClr val="CCCCCC"/>
+                </a:solidFill>
+                <a:latin typeface="Courier New" pitchFamily="34" charset="0"/>
+                <a:ea typeface="Courier New" pitchFamily="34" charset="-122"/>
+                <a:cs typeface="Courier New" pitchFamily="34" charset="-120"/>
+              </a:rPr>
+              <a:t>Item</a:t>
             </a:r>
             <a:endParaRPr lang="en-US" sz="1050" dirty="0"/>
           </a:p>
@@ -6537,7 +7199,7 @@
                 <a:ea typeface="Courier New" pitchFamily="34" charset="-122"/>
                 <a:cs typeface="Courier New" pitchFamily="34" charset="-120"/>
               </a:rPr>
-              <a:t>name</a:t>
+              <a:t>Sku</a:t>
             </a:r>
             <a:r>
               <a:rPr lang="en-US" sz="1050" dirty="0">
@@ -6559,7 +7221,29 @@
                 <a:ea typeface="Courier New" pitchFamily="34" charset="-122"/>
                 <a:cs typeface="Courier New" pitchFamily="34" charset="-120"/>
               </a:rPr>
-              <a:t>city</a:t>
+              <a:t>Nome</a:t>
+            </a:r>
+            <a:r>
+              <a:rPr lang="en-US" sz="1050" dirty="0">
+                <a:solidFill>
+                  <a:srgbClr val="CCCCCC"/>
+                </a:solidFill>
+                <a:latin typeface="Courier New" pitchFamily="34" charset="0"/>
+                <a:ea typeface="Courier New" pitchFamily="34" charset="-122"/>
+                <a:cs typeface="Courier New" pitchFamily="34" charset="-120"/>
+              </a:rPr>
+              <a:t> </a:t>
+            </a:r>
+            <a:r>
+              <a:rPr lang="en-US" sz="1050" dirty="0">
+                <a:solidFill>
+                  <a:srgbClr val="CCCCCC"/>
+                </a:solidFill>
+                <a:latin typeface="Courier New" pitchFamily="34" charset="0"/>
+                <a:ea typeface="Courier New" pitchFamily="34" charset="-122"/>
+                <a:cs typeface="Courier New" pitchFamily="34" charset="-120"/>
+              </a:rPr>
+              <a:t>QtdeDisponivel</a:t>
             </a:r>
             <a:r>
               <a:rPr lang="en-US" sz="1050" dirty="0">
@@ -6634,7 +7318,7 @@
                 <a:ea typeface="Courier New" pitchFamily="34" charset="-122"/>
                 <a:cs typeface="Courier New" pitchFamily="34" charset="-120"/>
               </a:rPr>
-              <a:t>agencies_in</a:t>
+              <a:t>itens_in</a:t>
             </a:r>
             <a:endParaRPr lang="en-US" sz="1050" dirty="0"/>
           </a:p>
@@ -6687,7 +7371,7 @@
                 <a:ea typeface="Courier New" pitchFamily="34" charset="-122"/>
                 <a:cs typeface="Courier New" pitchFamily="34" charset="-120"/>
               </a:rPr>
-              <a:t>agencies_out</a:t>
+              <a:t>itens_out</a:t>
             </a:r>
             <a:r>
               <a:rPr lang="en-US" sz="1050" dirty="0">
@@ -6793,7 +7477,7 @@
                 <a:ea typeface="Courier New" pitchFamily="34" charset="-122"/>
                 <a:cs typeface="Courier New" pitchFamily="34" charset="-120"/>
               </a:rPr>
-              <a:t>agencies_out</a:t>
+              <a:t>itens_out</a:t>
             </a:r>
             <a:r>
               <a:rPr lang="en-US" sz="1050" dirty="0">
@@ -9134,7 +9818,7 @@
         <p:spPr>
           <a:xfrm>
             <a:off x="640080" y="1700784"/>
-            <a:ext cx="1920240" cy="292608"/>
+            <a:ext cx="2308860" cy="292608"/>
           </a:xfrm>
           <a:prstGeom prst="rect">
             <a:avLst/>
@@ -9154,7 +9838,7 @@
         <p:spPr>
           <a:xfrm>
             <a:off x="640080" y="1700784"/>
-            <a:ext cx="1920240" cy="27432"/>
+            <a:ext cx="2308860" cy="27432"/>
           </a:xfrm>
           <a:prstGeom prst="rect">
             <a:avLst/>
@@ -9174,7 +9858,7 @@
         <p:spPr>
           <a:xfrm>
             <a:off x="731520" y="1719072"/>
-            <a:ext cx="1737360" cy="274320"/>
+            <a:ext cx="2125980" cy="274320"/>
           </a:xfrm>
           <a:prstGeom prst="rect">
             <a:avLst/>
@@ -9195,7 +9879,7 @@
                   <a:srgbClr val="FFFFFF"/>
                 </a:solidFill>
               </a:rPr>
-              <a:t>zcl_07_eml.clas.abap</a:t>
+              <a:t>zcl_pc_eml_demo.clas.abap</a:t>
             </a:r>
             <a:endParaRPr lang="en-US" sz="950" dirty="0"/>
           </a:p>
@@ -9231,7 +9915,7 @@
                   <a:srgbClr val="9DA5B4"/>
                 </a:solidFill>
               </a:rPr>
-              <a:t>ZS4D400_## › ZCL_07_EML › main</a:t>
+              <a:t>Exemplo sobre o BO ZR_PC_ITEM › main</a:t>
             </a:r>
             <a:endParaRPr lang="en-US" sz="850" dirty="0"/>
           </a:p>
@@ -9657,7 +10341,7 @@
                 <a:ea typeface="Courier New" pitchFamily="34" charset="-122"/>
                 <a:cs typeface="Courier New" pitchFamily="34" charset="-120"/>
               </a:rPr>
-              <a:t>agencies_upd</a:t>
+              <a:t>itens_upd</a:t>
             </a:r>
             <a:r>
               <a:rPr lang="en-US" sz="1050" dirty="0">
@@ -9761,13 +10445,13 @@
             <a:r>
               <a:rPr lang="en-US" sz="1050" dirty="0">
                 <a:solidFill>
-                  <a:srgbClr val="4EC9B0"/>
-                </a:solidFill>
-                <a:latin typeface="Courier New" pitchFamily="34" charset="0"/>
-                <a:ea typeface="Courier New" pitchFamily="34" charset="-122"/>
-                <a:cs typeface="Courier New" pitchFamily="34" charset="-120"/>
-              </a:rPr>
-              <a:t>/dmo/i_agencytp</a:t>
+                  <a:srgbClr val="CCCCCC"/>
+                </a:solidFill>
+                <a:latin typeface="Courier New" pitchFamily="34" charset="0"/>
+                <a:ea typeface="Courier New" pitchFamily="34" charset="-122"/>
+                <a:cs typeface="Courier New" pitchFamily="34" charset="-120"/>
+              </a:rPr>
+              <a:t>zr_pc_item</a:t>
             </a:r>
             <a:r>
               <a:rPr lang="en-US" sz="1050" dirty="0">
@@ -9798,7 +10482,7 @@
                 <a:ea typeface="Courier New" pitchFamily="34" charset="-122"/>
                 <a:cs typeface="Courier New" pitchFamily="34" charset="-120"/>
               </a:rPr>
-              <a:t>agencies_upd</a:t>
+              <a:t>itens_upd</a:t>
             </a:r>
             <a:r>
               <a:rPr lang="en-US" sz="1050" dirty="0">
@@ -9919,7 +10603,29 @@
                 <a:ea typeface="Courier New" pitchFamily="34" charset="-122"/>
                 <a:cs typeface="Courier New" pitchFamily="34" charset="-120"/>
               </a:rPr>
-              <a:t>agencyid</a:t>
+              <a:t>ItemUUID</a:t>
+            </a:r>
+            <a:r>
+              <a:rPr lang="en-US" sz="1050" dirty="0">
+                <a:solidFill>
+                  <a:srgbClr val="CCCCCC"/>
+                </a:solidFill>
+                <a:latin typeface="Courier New" pitchFamily="34" charset="0"/>
+                <a:ea typeface="Courier New" pitchFamily="34" charset="-122"/>
+                <a:cs typeface="Courier New" pitchFamily="34" charset="-120"/>
+              </a:rPr>
+              <a:t>    </a:t>
+            </a:r>
+            <a:r>
+              <a:rPr lang="en-US" sz="1050" dirty="0">
+                <a:solidFill>
+                  <a:srgbClr val="CCCCCC"/>
+                </a:solidFill>
+                <a:latin typeface="Courier New" pitchFamily="34" charset="0"/>
+                <a:ea typeface="Courier New" pitchFamily="34" charset="-122"/>
+                <a:cs typeface="Courier New" pitchFamily="34" charset="-120"/>
+              </a:rPr>
+              <a:t>=</a:t>
             </a:r>
             <a:r>
               <a:rPr lang="en-US" sz="1050" dirty="0">
@@ -9941,29 +10647,7 @@
                 <a:ea typeface="Courier New" pitchFamily="34" charset="-122"/>
                 <a:cs typeface="Courier New" pitchFamily="34" charset="-120"/>
               </a:rPr>
-              <a:t>=</a:t>
-            </a:r>
-            <a:r>
-              <a:rPr lang="en-US" sz="1050" dirty="0">
-                <a:solidFill>
-                  <a:srgbClr val="CCCCCC"/>
-                </a:solidFill>
-                <a:latin typeface="Courier New" pitchFamily="34" charset="0"/>
-                <a:ea typeface="Courier New" pitchFamily="34" charset="-122"/>
-                <a:cs typeface="Courier New" pitchFamily="34" charset="-120"/>
-              </a:rPr>
-              <a:t> </a:t>
-            </a:r>
-            <a:r>
-              <a:rPr lang="en-US" sz="1050" dirty="0">
-                <a:solidFill>
-                  <a:srgbClr val="CE9178"/>
-                </a:solidFill>
-                <a:latin typeface="Courier New" pitchFamily="34" charset="0"/>
-                <a:ea typeface="Courier New" pitchFamily="34" charset="-122"/>
-                <a:cs typeface="Courier New" pitchFamily="34" charset="-120"/>
-              </a:rPr>
-              <a:t>'070001'</a:t>
+              <a:t>item_uuid</a:t>
             </a:r>
             <a:endParaRPr lang="en-US" sz="1050" dirty="0"/>
           </a:p>
@@ -9983,29 +10667,29 @@
                 <a:ea typeface="Courier New" pitchFamily="34" charset="-122"/>
                 <a:cs typeface="Courier New" pitchFamily="34" charset="-120"/>
               </a:rPr>
-              <a:t>                          </a:t>
-            </a:r>
-            <a:r>
-              <a:rPr lang="en-US" sz="1050" dirty="0">
-                <a:solidFill>
-                  <a:srgbClr val="CCCCCC"/>
-                </a:solidFill>
-                <a:latin typeface="Courier New" pitchFamily="34" charset="0"/>
-                <a:ea typeface="Courier New" pitchFamily="34" charset="-122"/>
-                <a:cs typeface="Courier New" pitchFamily="34" charset="-120"/>
-              </a:rPr>
-              <a:t>name</a:t>
-            </a:r>
-            <a:r>
-              <a:rPr lang="en-US" sz="1050" dirty="0">
-                <a:solidFill>
-                  <a:srgbClr val="CCCCCC"/>
-                </a:solidFill>
-                <a:latin typeface="Courier New" pitchFamily="34" charset="0"/>
-                <a:ea typeface="Courier New" pitchFamily="34" charset="-122"/>
-                <a:cs typeface="Courier New" pitchFamily="34" charset="-120"/>
-              </a:rPr>
-              <a:t>     </a:t>
+              <a:t>                       </a:t>
+            </a:r>
+            <a:r>
+              <a:rPr lang="en-US" sz="1050" dirty="0">
+                <a:solidFill>
+                  <a:srgbClr val="CCCCCC"/>
+                </a:solidFill>
+                <a:latin typeface="Courier New" pitchFamily="34" charset="0"/>
+                <a:ea typeface="Courier New" pitchFamily="34" charset="-122"/>
+                <a:cs typeface="Courier New" pitchFamily="34" charset="-120"/>
+              </a:rPr>
+              <a:t>QtdeEstoque</a:t>
+            </a:r>
+            <a:r>
+              <a:rPr lang="en-US" sz="1050" dirty="0">
+                <a:solidFill>
+                  <a:srgbClr val="CCCCCC"/>
+                </a:solidFill>
+                <a:latin typeface="Courier New" pitchFamily="34" charset="0"/>
+                <a:ea typeface="Courier New" pitchFamily="34" charset="-122"/>
+                <a:cs typeface="Courier New" pitchFamily="34" charset="-120"/>
+              </a:rPr>
+              <a:t> </a:t>
             </a:r>
             <a:r>
               <a:rPr lang="en-US" sz="1050" dirty="0">
@@ -10032,13 +10716,13 @@
             <a:r>
               <a:rPr lang="en-US" sz="1050" dirty="0">
                 <a:solidFill>
-                  <a:srgbClr val="CE9178"/>
-                </a:solidFill>
-                <a:latin typeface="Courier New" pitchFamily="34" charset="0"/>
-                <a:ea typeface="Courier New" pitchFamily="34" charset="-122"/>
-                <a:cs typeface="Courier New" pitchFamily="34" charset="-120"/>
-              </a:rPr>
-              <a:t>'ABAP Travel'</a:t>
+                  <a:srgbClr val="B5CEA8"/>
+                </a:solidFill>
+                <a:latin typeface="Courier New" pitchFamily="34" charset="0"/>
+                <a:ea typeface="Courier New" pitchFamily="34" charset="-122"/>
+                <a:cs typeface="Courier New" pitchFamily="34" charset="-120"/>
+              </a:rPr>
+              <a:t>40</a:t>
             </a:r>
             <a:r>
               <a:rPr lang="en-US" sz="1050" dirty="0">
@@ -10193,13 +10877,13 @@
             <a:r>
               <a:rPr lang="en-US" sz="1050" dirty="0">
                 <a:solidFill>
-                  <a:srgbClr val="4EC9B0"/>
-                </a:solidFill>
-                <a:latin typeface="Courier New" pitchFamily="34" charset="0"/>
-                <a:ea typeface="Courier New" pitchFamily="34" charset="-122"/>
-                <a:cs typeface="Courier New" pitchFamily="34" charset="-120"/>
-              </a:rPr>
-              <a:t>/dmo/i_agencytp</a:t>
+                  <a:srgbClr val="CCCCCC"/>
+                </a:solidFill>
+                <a:latin typeface="Courier New" pitchFamily="34" charset="0"/>
+                <a:ea typeface="Courier New" pitchFamily="34" charset="-122"/>
+                <a:cs typeface="Courier New" pitchFamily="34" charset="-120"/>
+              </a:rPr>
+              <a:t>zr_pc_item</a:t>
             </a:r>
             <a:endParaRPr lang="en-US" sz="1050" dirty="0"/>
           </a:p>
@@ -10246,13 +10930,13 @@
             <a:r>
               <a:rPr lang="en-US" sz="1050" dirty="0">
                 <a:solidFill>
-                  <a:srgbClr val="4EC9B0"/>
-                </a:solidFill>
-                <a:latin typeface="Courier New" pitchFamily="34" charset="0"/>
-                <a:ea typeface="Courier New" pitchFamily="34" charset="-122"/>
-                <a:cs typeface="Courier New" pitchFamily="34" charset="-120"/>
-              </a:rPr>
-              <a:t>/dmo/agency</a:t>
+                  <a:srgbClr val="CCCCCC"/>
+                </a:solidFill>
+                <a:latin typeface="Courier New" pitchFamily="34" charset="0"/>
+                <a:ea typeface="Courier New" pitchFamily="34" charset="-122"/>
+                <a:cs typeface="Courier New" pitchFamily="34" charset="-120"/>
+              </a:rPr>
+              <a:t>Item</a:t>
             </a:r>
             <a:endParaRPr lang="en-US" sz="1050" dirty="0"/>
           </a:p>
@@ -10349,7 +11033,7 @@
                 <a:ea typeface="Courier New" pitchFamily="34" charset="-122"/>
                 <a:cs typeface="Courier New" pitchFamily="34" charset="-120"/>
               </a:rPr>
-              <a:t>name</a:t>
+              <a:t>QtdeEstoque</a:t>
             </a:r>
             <a:r>
               <a:rPr lang="en-US" sz="1050" dirty="0">
@@ -10424,7 +11108,7 @@
                 <a:ea typeface="Courier New" pitchFamily="34" charset="-122"/>
                 <a:cs typeface="Courier New" pitchFamily="34" charset="-120"/>
               </a:rPr>
-              <a:t>agencies_upd</a:t>
+              <a:t>itens_upd</a:t>
             </a:r>
             <a:endParaRPr lang="en-US" sz="1050" dirty="0"/>
           </a:p>
@@ -10874,7 +11558,7 @@
                 <a:ea typeface="Courier New" pitchFamily="34" charset="-122"/>
                 <a:cs typeface="Courier New" pitchFamily="34" charset="-120"/>
               </a:rPr>
-              <a:t>`Agência atualizada`</a:t>
+              <a:t>`Estoque atualizado`</a:t>
             </a:r>
             <a:r>
               <a:rPr lang="en-US" sz="1050" dirty="0">
@@ -11307,7 +11991,26 @@
                   <a:srgbClr val="556B82"/>
                 </a:solidFill>
               </a:rPr>
-              <a:t>Quais instâncias falharam e as mensagens geradas pelas validações.</a:t>
+              <a:t>Quais instâncias falharam e as mensagens das validações, como </a:t>
+            </a:r>
+            <a:r>
+              <a:rPr lang="en-US" sz="1050" dirty="0">
+                <a:solidFill>
+                  <a:srgbClr val="0064D9"/>
+                </a:solidFill>
+                <a:latin typeface="Courier New" pitchFamily="34" charset="0"/>
+                <a:ea typeface="Courier New" pitchFamily="34" charset="-122"/>
+                <a:cs typeface="Courier New" pitchFamily="34" charset="-120"/>
+              </a:rPr>
+              <a:t>ValidarQuantidades</a:t>
+            </a:r>
+            <a:r>
+              <a:rPr lang="en-US" sz="1050" dirty="0">
+                <a:solidFill>
+                  <a:srgbClr val="556B82"/>
+                </a:solidFill>
+              </a:rPr>
+              <a:t>.</a:t>
             </a:r>
             <a:endParaRPr lang="en-US" sz="1400" dirty="0"/>
           </a:p>
@@ -11738,7 +12441,7 @@
         <p:spPr>
           <a:xfrm>
             <a:off x="640080" y="1700784"/>
-            <a:ext cx="2153412" cy="292608"/>
+            <a:ext cx="2308860" cy="292608"/>
           </a:xfrm>
           <a:prstGeom prst="rect">
             <a:avLst/>
@@ -11758,7 +12461,7 @@
         <p:spPr>
           <a:xfrm>
             <a:off x="640080" y="1700784"/>
-            <a:ext cx="2153412" cy="27432"/>
+            <a:ext cx="2308860" cy="27432"/>
           </a:xfrm>
           <a:prstGeom prst="rect">
             <a:avLst/>
@@ -11778,7 +12481,7 @@
         <p:spPr>
           <a:xfrm>
             <a:off x="731520" y="1719072"/>
-            <a:ext cx="1970532" cy="274320"/>
+            <a:ext cx="2125980" cy="274320"/>
           </a:xfrm>
           <a:prstGeom prst="rect">
             <a:avLst/>
@@ -11799,7 +12502,7 @@
                   <a:srgbClr val="FFFFFF"/>
                 </a:solidFill>
               </a:rPr>
-              <a:t>zcl_07_create.clas.abap</a:t>
+              <a:t>zcl_pc_eml_demo.clas.abap</a:t>
             </a:r>
             <a:endParaRPr lang="en-US" sz="950" dirty="0"/>
           </a:p>
@@ -11835,7 +12538,7 @@
                   <a:srgbClr val="9DA5B4"/>
                 </a:solidFill>
               </a:rPr>
-              <a:t>ZS4D400_## › ZCL_07_CREATE › main</a:t>
+              <a:t>Exemplo sobre o BO ZR_PC_ITEM › main</a:t>
             </a:r>
             <a:endParaRPr lang="en-US" sz="850" dirty="0"/>
           </a:p>
@@ -12101,6 +12804,46 @@
             </a:r>
             <a:endParaRPr lang="en-US" sz="1050" dirty="0"/>
           </a:p>
+          <a:p>
+            <a:pPr algn="r" indent="0" marL="0">
+              <a:lnSpc>
+                <a:spcPct val="105000"/>
+              </a:lnSpc>
+              <a:buNone/>
+            </a:pPr>
+            <a:r>
+              <a:rPr lang="en-US" sz="1050" dirty="0">
+                <a:solidFill>
+                  <a:srgbClr val="6E7681"/>
+                </a:solidFill>
+                <a:latin typeface="Courier New" pitchFamily="34" charset="0"/>
+                <a:ea typeface="Courier New" pitchFamily="34" charset="-122"/>
+                <a:cs typeface="Courier New" pitchFamily="34" charset="-120"/>
+              </a:rPr>
+              <a:t>13</a:t>
+            </a:r>
+            <a:endParaRPr lang="en-US" sz="1050" dirty="0"/>
+          </a:p>
+          <a:p>
+            <a:pPr algn="r" indent="0" marL="0">
+              <a:lnSpc>
+                <a:spcPct val="105000"/>
+              </a:lnSpc>
+              <a:buNone/>
+            </a:pPr>
+            <a:r>
+              <a:rPr lang="en-US" sz="1050" dirty="0">
+                <a:solidFill>
+                  <a:srgbClr val="6E7681"/>
+                </a:solidFill>
+                <a:latin typeface="Courier New" pitchFamily="34" charset="0"/>
+                <a:ea typeface="Courier New" pitchFamily="34" charset="-122"/>
+                <a:cs typeface="Courier New" pitchFamily="34" charset="-120"/>
+              </a:rPr>
+              <a:t>14</a:t>
+            </a:r>
+            <a:endParaRPr lang="en-US" sz="1050" dirty="0"/>
+          </a:p>
         </p:txBody>
       </p:sp>
       <p:sp>
@@ -12199,13 +12942,13 @@
             <a:r>
               <a:rPr lang="en-US" sz="1050" dirty="0">
                 <a:solidFill>
-                  <a:srgbClr val="4EC9B0"/>
-                </a:solidFill>
-                <a:latin typeface="Courier New" pitchFamily="34" charset="0"/>
-                <a:ea typeface="Courier New" pitchFamily="34" charset="-122"/>
-                <a:cs typeface="Courier New" pitchFamily="34" charset="-120"/>
-              </a:rPr>
-              <a:t>/dmo/i_agencytp</a:t>
+                  <a:srgbClr val="CCCCCC"/>
+                </a:solidFill>
+                <a:latin typeface="Courier New" pitchFamily="34" charset="0"/>
+                <a:ea typeface="Courier New" pitchFamily="34" charset="-122"/>
+                <a:cs typeface="Courier New" pitchFamily="34" charset="-120"/>
+              </a:rPr>
+              <a:t>zr_pc_item</a:t>
             </a:r>
             <a:endParaRPr lang="en-US" sz="1050" dirty="0"/>
           </a:p>
@@ -12252,13 +12995,13 @@
             <a:r>
               <a:rPr lang="en-US" sz="1050" dirty="0">
                 <a:solidFill>
-                  <a:srgbClr val="4EC9B0"/>
-                </a:solidFill>
-                <a:latin typeface="Courier New" pitchFamily="34" charset="0"/>
-                <a:ea typeface="Courier New" pitchFamily="34" charset="-122"/>
-                <a:cs typeface="Courier New" pitchFamily="34" charset="-120"/>
-              </a:rPr>
-              <a:t>/dmo/agency</a:t>
+                  <a:srgbClr val="CCCCCC"/>
+                </a:solidFill>
+                <a:latin typeface="Courier New" pitchFamily="34" charset="0"/>
+                <a:ea typeface="Courier New" pitchFamily="34" charset="-122"/>
+                <a:cs typeface="Courier New" pitchFamily="34" charset="-120"/>
+              </a:rPr>
+              <a:t>Item</a:t>
             </a:r>
             <a:endParaRPr lang="en-US" sz="1050" dirty="0"/>
           </a:p>
@@ -12355,7 +13098,7 @@
                 <a:ea typeface="Courier New" pitchFamily="34" charset="-122"/>
                 <a:cs typeface="Courier New" pitchFamily="34" charset="-120"/>
               </a:rPr>
-              <a:t>name</a:t>
+              <a:t>Nome</a:t>
             </a:r>
             <a:r>
               <a:rPr lang="en-US" sz="1050" dirty="0">
@@ -12377,7 +13120,7 @@
                 <a:ea typeface="Courier New" pitchFamily="34" charset="-122"/>
                 <a:cs typeface="Courier New" pitchFamily="34" charset="-120"/>
               </a:rPr>
-              <a:t>city</a:t>
+              <a:t>Categoria</a:t>
             </a:r>
             <a:r>
               <a:rPr lang="en-US" sz="1050" dirty="0">
@@ -12399,7 +13142,51 @@
                 <a:ea typeface="Courier New" pitchFamily="34" charset="-122"/>
                 <a:cs typeface="Courier New" pitchFamily="34" charset="-120"/>
               </a:rPr>
-              <a:t>countrycode</a:t>
+              <a:t>QtdeEstoque</a:t>
+            </a:r>
+            <a:r>
+              <a:rPr lang="en-US" sz="1050" dirty="0">
+                <a:solidFill>
+                  <a:srgbClr val="CCCCCC"/>
+                </a:solidFill>
+                <a:latin typeface="Courier New" pitchFamily="34" charset="0"/>
+                <a:ea typeface="Courier New" pitchFamily="34" charset="-122"/>
+                <a:cs typeface="Courier New" pitchFamily="34" charset="-120"/>
+              </a:rPr>
+              <a:t> </a:t>
+            </a:r>
+            <a:r>
+              <a:rPr lang="en-US" sz="1050" dirty="0">
+                <a:solidFill>
+                  <a:srgbClr val="CCCCCC"/>
+                </a:solidFill>
+                <a:latin typeface="Courier New" pitchFamily="34" charset="0"/>
+                <a:ea typeface="Courier New" pitchFamily="34" charset="-122"/>
+                <a:cs typeface="Courier New" pitchFamily="34" charset="-120"/>
+              </a:rPr>
+              <a:t>PrecoUnitario</a:t>
+            </a:r>
+            <a:r>
+              <a:rPr lang="en-US" sz="1050" dirty="0">
+                <a:solidFill>
+                  <a:srgbClr val="CCCCCC"/>
+                </a:solidFill>
+                <a:latin typeface="Courier New" pitchFamily="34" charset="0"/>
+                <a:ea typeface="Courier New" pitchFamily="34" charset="-122"/>
+                <a:cs typeface="Courier New" pitchFamily="34" charset="-120"/>
+              </a:rPr>
+              <a:t> </a:t>
+            </a:r>
+            <a:r>
+              <a:rPr lang="en-US" sz="1050" dirty="0">
+                <a:solidFill>
+                  <a:srgbClr val="CCCCCC"/>
+                </a:solidFill>
+                <a:latin typeface="Courier New" pitchFamily="34" charset="0"/>
+                <a:ea typeface="Courier New" pitchFamily="34" charset="-122"/>
+                <a:cs typeface="Courier New" pitchFamily="34" charset="-120"/>
+              </a:rPr>
+              <a:t>Currency</a:t>
             </a:r>
             <a:r>
               <a:rPr lang="en-US" sz="1050" dirty="0">
@@ -12573,7 +13360,7 @@
                 <a:ea typeface="Courier New" pitchFamily="34" charset="-122"/>
                 <a:cs typeface="Courier New" pitchFamily="34" charset="-120"/>
               </a:rPr>
-              <a:t>        </a:t>
+              <a:t>          </a:t>
             </a:r>
             <a:r>
               <a:rPr lang="en-US" sz="1050" dirty="0">
@@ -12606,7 +13393,7 @@
                 <a:ea typeface="Courier New" pitchFamily="34" charset="-122"/>
                 <a:cs typeface="Courier New" pitchFamily="34" charset="-120"/>
               </a:rPr>
-              <a:t>'AG1'</a:t>
+              <a:t>'ITM'</a:t>
             </a:r>
             <a:endParaRPr lang="en-US" sz="1050" dirty="0"/>
           </a:p>
@@ -12637,18 +13424,18 @@
                 <a:ea typeface="Courier New" pitchFamily="34" charset="-122"/>
                 <a:cs typeface="Courier New" pitchFamily="34" charset="-120"/>
               </a:rPr>
-              <a:t>name</a:t>
-            </a:r>
-            <a:r>
-              <a:rPr lang="en-US" sz="1050" dirty="0">
-                <a:solidFill>
-                  <a:srgbClr val="CCCCCC"/>
-                </a:solidFill>
-                <a:latin typeface="Courier New" pitchFamily="34" charset="0"/>
-                <a:ea typeface="Courier New" pitchFamily="34" charset="-122"/>
-                <a:cs typeface="Courier New" pitchFamily="34" charset="-120"/>
-              </a:rPr>
-              <a:t>        </a:t>
+              <a:t>Nome</a:t>
+            </a:r>
+            <a:r>
+              <a:rPr lang="en-US" sz="1050" dirty="0">
+                <a:solidFill>
+                  <a:srgbClr val="CCCCCC"/>
+                </a:solidFill>
+                <a:latin typeface="Courier New" pitchFamily="34" charset="0"/>
+                <a:ea typeface="Courier New" pitchFamily="34" charset="-122"/>
+                <a:cs typeface="Courier New" pitchFamily="34" charset="-120"/>
+              </a:rPr>
+              <a:t>          </a:t>
             </a:r>
             <a:r>
               <a:rPr lang="en-US" sz="1050" dirty="0">
@@ -12681,7 +13468,7 @@
                 <a:ea typeface="Courier New" pitchFamily="34" charset="-122"/>
                 <a:cs typeface="Courier New" pitchFamily="34" charset="-120"/>
               </a:rPr>
-              <a:t>'Nova Agência'</a:t>
+              <a:t>'Mouse sem fio'</a:t>
             </a:r>
             <a:endParaRPr lang="en-US" sz="1050" dirty="0"/>
           </a:p>
@@ -12712,18 +13499,18 @@
                 <a:ea typeface="Courier New" pitchFamily="34" charset="-122"/>
                 <a:cs typeface="Courier New" pitchFamily="34" charset="-120"/>
               </a:rPr>
-              <a:t>city</a:t>
-            </a:r>
-            <a:r>
-              <a:rPr lang="en-US" sz="1050" dirty="0">
-                <a:solidFill>
-                  <a:srgbClr val="CCCCCC"/>
-                </a:solidFill>
-                <a:latin typeface="Courier New" pitchFamily="34" charset="0"/>
-                <a:ea typeface="Courier New" pitchFamily="34" charset="-122"/>
-                <a:cs typeface="Courier New" pitchFamily="34" charset="-120"/>
-              </a:rPr>
-              <a:t>        </a:t>
+              <a:t>Categoria</a:t>
+            </a:r>
+            <a:r>
+              <a:rPr lang="en-US" sz="1050" dirty="0">
+                <a:solidFill>
+                  <a:srgbClr val="CCCCCC"/>
+                </a:solidFill>
+                <a:latin typeface="Courier New" pitchFamily="34" charset="0"/>
+                <a:ea typeface="Courier New" pitchFamily="34" charset="-122"/>
+                <a:cs typeface="Courier New" pitchFamily="34" charset="-120"/>
+              </a:rPr>
+              <a:t>     </a:t>
             </a:r>
             <a:r>
               <a:rPr lang="en-US" sz="1050" dirty="0">
@@ -12756,7 +13543,7 @@
                 <a:ea typeface="Courier New" pitchFamily="34" charset="-122"/>
                 <a:cs typeface="Courier New" pitchFamily="34" charset="-120"/>
               </a:rPr>
-              <a:t>'Walldorf'</a:t>
+              <a:t>'INFORMATICA'</a:t>
             </a:r>
             <a:endParaRPr lang="en-US" sz="1050" dirty="0"/>
           </a:p>
@@ -12787,7 +13574,29 @@
                 <a:ea typeface="Courier New" pitchFamily="34" charset="-122"/>
                 <a:cs typeface="Courier New" pitchFamily="34" charset="-120"/>
               </a:rPr>
-              <a:t>countrycode</a:t>
+              <a:t>QtdeEstoque</a:t>
+            </a:r>
+            <a:r>
+              <a:rPr lang="en-US" sz="1050" dirty="0">
+                <a:solidFill>
+                  <a:srgbClr val="CCCCCC"/>
+                </a:solidFill>
+                <a:latin typeface="Courier New" pitchFamily="34" charset="0"/>
+                <a:ea typeface="Courier New" pitchFamily="34" charset="-122"/>
+                <a:cs typeface="Courier New" pitchFamily="34" charset="-120"/>
+              </a:rPr>
+              <a:t>   </a:t>
+            </a:r>
+            <a:r>
+              <a:rPr lang="en-US" sz="1050" dirty="0">
+                <a:solidFill>
+                  <a:srgbClr val="CCCCCC"/>
+                </a:solidFill>
+                <a:latin typeface="Courier New" pitchFamily="34" charset="0"/>
+                <a:ea typeface="Courier New" pitchFamily="34" charset="-122"/>
+                <a:cs typeface="Courier New" pitchFamily="34" charset="-120"/>
+              </a:rPr>
+              <a:t>=</a:t>
             </a:r>
             <a:r>
               <a:rPr lang="en-US" sz="1050" dirty="0">
@@ -12803,6 +13612,59 @@
             <a:r>
               <a:rPr lang="en-US" sz="1050" dirty="0">
                 <a:solidFill>
+                  <a:srgbClr val="B5CEA8"/>
+                </a:solidFill>
+                <a:latin typeface="Courier New" pitchFamily="34" charset="0"/>
+                <a:ea typeface="Courier New" pitchFamily="34" charset="-122"/>
+                <a:cs typeface="Courier New" pitchFamily="34" charset="-120"/>
+              </a:rPr>
+              <a:t>30</a:t>
+            </a:r>
+            <a:endParaRPr lang="en-US" sz="1050" dirty="0"/>
+          </a:p>
+          <a:p>
+            <a:pPr indent="0" marL="0">
+              <a:lnSpc>
+                <a:spcPct val="105000"/>
+              </a:lnSpc>
+              <a:buNone/>
+            </a:pPr>
+            <a:r>
+              <a:rPr lang="en-US" sz="1050" dirty="0">
+                <a:solidFill>
+                  <a:srgbClr val="CCCCCC"/>
+                </a:solidFill>
+                <a:latin typeface="Courier New" pitchFamily="34" charset="0"/>
+                <a:ea typeface="Courier New" pitchFamily="34" charset="-122"/>
+                <a:cs typeface="Courier New" pitchFamily="34" charset="-120"/>
+              </a:rPr>
+              <a:t>                  </a:t>
+            </a:r>
+            <a:r>
+              <a:rPr lang="en-US" sz="1050" dirty="0">
+                <a:solidFill>
+                  <a:srgbClr val="CCCCCC"/>
+                </a:solidFill>
+                <a:latin typeface="Courier New" pitchFamily="34" charset="0"/>
+                <a:ea typeface="Courier New" pitchFamily="34" charset="-122"/>
+                <a:cs typeface="Courier New" pitchFamily="34" charset="-120"/>
+              </a:rPr>
+              <a:t>PrecoUnitario</a:t>
+            </a:r>
+            <a:r>
+              <a:rPr lang="en-US" sz="1050" dirty="0">
+                <a:solidFill>
+                  <a:srgbClr val="CCCCCC"/>
+                </a:solidFill>
+                <a:latin typeface="Courier New" pitchFamily="34" charset="0"/>
+                <a:ea typeface="Courier New" pitchFamily="34" charset="-122"/>
+                <a:cs typeface="Courier New" pitchFamily="34" charset="-120"/>
+              </a:rPr>
+              <a:t> </a:t>
+            </a:r>
+            <a:r>
+              <a:rPr lang="en-US" sz="1050" dirty="0">
+                <a:solidFill>
                   <a:srgbClr val="CCCCCC"/>
                 </a:solidFill>
                 <a:latin typeface="Courier New" pitchFamily="34" charset="0"/>
@@ -12831,7 +13693,82 @@
                 <a:ea typeface="Courier New" pitchFamily="34" charset="-122"/>
                 <a:cs typeface="Courier New" pitchFamily="34" charset="-120"/>
               </a:rPr>
-              <a:t>'DE'</a:t>
+              <a:t>'89.90'</a:t>
+            </a:r>
+            <a:endParaRPr lang="en-US" sz="1050" dirty="0"/>
+          </a:p>
+          <a:p>
+            <a:pPr indent="0" marL="0">
+              <a:lnSpc>
+                <a:spcPct val="105000"/>
+              </a:lnSpc>
+              <a:buNone/>
+            </a:pPr>
+            <a:r>
+              <a:rPr lang="en-US" sz="1050" dirty="0">
+                <a:solidFill>
+                  <a:srgbClr val="CCCCCC"/>
+                </a:solidFill>
+                <a:latin typeface="Courier New" pitchFamily="34" charset="0"/>
+                <a:ea typeface="Courier New" pitchFamily="34" charset="-122"/>
+                <a:cs typeface="Courier New" pitchFamily="34" charset="-120"/>
+              </a:rPr>
+              <a:t>                  </a:t>
+            </a:r>
+            <a:r>
+              <a:rPr lang="en-US" sz="1050" dirty="0">
+                <a:solidFill>
+                  <a:srgbClr val="CCCCCC"/>
+                </a:solidFill>
+                <a:latin typeface="Courier New" pitchFamily="34" charset="0"/>
+                <a:ea typeface="Courier New" pitchFamily="34" charset="-122"/>
+                <a:cs typeface="Courier New" pitchFamily="34" charset="-120"/>
+              </a:rPr>
+              <a:t>Currency</a:t>
+            </a:r>
+            <a:r>
+              <a:rPr lang="en-US" sz="1050" dirty="0">
+                <a:solidFill>
+                  <a:srgbClr val="CCCCCC"/>
+                </a:solidFill>
+                <a:latin typeface="Courier New" pitchFamily="34" charset="0"/>
+                <a:ea typeface="Courier New" pitchFamily="34" charset="-122"/>
+                <a:cs typeface="Courier New" pitchFamily="34" charset="-120"/>
+              </a:rPr>
+              <a:t>      </a:t>
+            </a:r>
+            <a:r>
+              <a:rPr lang="en-US" sz="1050" dirty="0">
+                <a:solidFill>
+                  <a:srgbClr val="CCCCCC"/>
+                </a:solidFill>
+                <a:latin typeface="Courier New" pitchFamily="34" charset="0"/>
+                <a:ea typeface="Courier New" pitchFamily="34" charset="-122"/>
+                <a:cs typeface="Courier New" pitchFamily="34" charset="-120"/>
+              </a:rPr>
+              <a:t>=</a:t>
+            </a:r>
+            <a:r>
+              <a:rPr lang="en-US" sz="1050" dirty="0">
+                <a:solidFill>
+                  <a:srgbClr val="CCCCCC"/>
+                </a:solidFill>
+                <a:latin typeface="Courier New" pitchFamily="34" charset="0"/>
+                <a:ea typeface="Courier New" pitchFamily="34" charset="-122"/>
+                <a:cs typeface="Courier New" pitchFamily="34" charset="-120"/>
+              </a:rPr>
+              <a:t> </a:t>
+            </a:r>
+            <a:r>
+              <a:rPr lang="en-US" sz="1050" dirty="0">
+                <a:solidFill>
+                  <a:srgbClr val="CE9178"/>
+                </a:solidFill>
+                <a:latin typeface="Courier New" pitchFamily="34" charset="0"/>
+                <a:ea typeface="Courier New" pitchFamily="34" charset="-122"/>
+                <a:cs typeface="Courier New" pitchFamily="34" charset="-120"/>
+              </a:rPr>
+              <a:t>'BRL'</a:t>
             </a:r>
             <a:r>
               <a:rPr lang="en-US" sz="1050" dirty="0">
@@ -13494,7 +14431,45 @@
                   <a:srgbClr val="556B82"/>
                 </a:solidFill>
               </a:rPr>
-              <a:t> à chave que o business object gerou.</a:t>
+              <a:t> ao </a:t>
+            </a:r>
+            <a:r>
+              <a:rPr lang="en-US" sz="1050" dirty="0">
+                <a:solidFill>
+                  <a:srgbClr val="0064D9"/>
+                </a:solidFill>
+                <a:latin typeface="Courier New" pitchFamily="34" charset="0"/>
+                <a:ea typeface="Courier New" pitchFamily="34" charset="-122"/>
+                <a:cs typeface="Courier New" pitchFamily="34" charset="-120"/>
+              </a:rPr>
+              <a:t>ItemUUID</a:t>
+            </a:r>
+            <a:r>
+              <a:rPr lang="en-US" sz="1050" dirty="0">
+                <a:solidFill>
+                  <a:srgbClr val="556B82"/>
+                </a:solidFill>
+              </a:rPr>
+              <a:t> que o runtime gerou (</a:t>
+            </a:r>
+            <a:r>
+              <a:rPr lang="en-US" sz="1050" dirty="0">
+                <a:solidFill>
+                  <a:srgbClr val="0064D9"/>
+                </a:solidFill>
+                <a:latin typeface="Courier New" pitchFamily="34" charset="0"/>
+                <a:ea typeface="Courier New" pitchFamily="34" charset="-122"/>
+                <a:cs typeface="Courier New" pitchFamily="34" charset="-120"/>
+              </a:rPr>
+              <a:t>numbering : managed</a:t>
+            </a:r>
+            <a:r>
+              <a:rPr lang="en-US" sz="1050" dirty="0">
+                <a:solidFill>
+                  <a:srgbClr val="556B82"/>
+                </a:solidFill>
+              </a:rPr>
+              <a:t>).</a:t>
             </a:r>
             <a:endParaRPr lang="en-US" sz="1400" dirty="0"/>
           </a:p>
@@ -13603,7 +14578,7 @@
                   <a:srgbClr val="556B82"/>
                 </a:solidFill>
               </a:rPr>
-              <a:t>Se o nome faltar, </a:t>
+              <a:t>Sem nome ou categoria, </a:t>
             </a:r>
             <a:r>
               <a:rPr lang="en-US" sz="1050" dirty="0">
@@ -13641,7 +14616,26 @@
                   <a:srgbClr val="556B82"/>
                 </a:solidFill>
               </a:rPr>
-              <a:t> explicam o motivo.</a:t>
+              <a:t> explicam o motivo; o SKU vem da determination </a:t>
+            </a:r>
+            <a:r>
+              <a:rPr lang="en-US" sz="1050" dirty="0">
+                <a:solidFill>
+                  <a:srgbClr val="0064D9"/>
+                </a:solidFill>
+                <a:latin typeface="Courier New" pitchFamily="34" charset="0"/>
+                <a:ea typeface="Courier New" pitchFamily="34" charset="-122"/>
+                <a:cs typeface="Courier New" pitchFamily="34" charset="-120"/>
+              </a:rPr>
+              <a:t>GerarSku</a:t>
+            </a:r>
+            <a:r>
+              <a:rPr lang="en-US" sz="1050" dirty="0">
+                <a:solidFill>
+                  <a:srgbClr val="556B82"/>
+                </a:solidFill>
+              </a:rPr>
+              <a:t>.</a:t>
             </a:r>
             <a:endParaRPr lang="en-US" sz="1400" dirty="0"/>
           </a:p>
@@ -13737,7 +14731,7 @@
                 <a:ea typeface="Courier New" pitchFamily="34" charset="-122"/>
                 <a:cs typeface="Courier New" pitchFamily="34" charset="-120"/>
               </a:rPr>
-              <a:t>DELETE FROM VALUE #( ( agencyid = '070001' ) )</a:t>
+              <a:t>DELETE FROM VALUE #( ( ItemUUID = item_uuid ) )</a:t>
             </a:r>
             <a:r>
               <a:rPr lang="en-US" sz="1200" dirty="0">
@@ -14652,7 +15646,7 @@
                   <a:srgbClr val="1D2D3E"/>
                 </a:solidFill>
               </a:rPr>
-              <a:t>todas as mudanças de um commit são gravadas juntas ou nenhuma é: a mesma lógica da LUW que você verá no módulo 05.</a:t>
+              <a:t>todas as mudanças de um commit são gravadas juntas ou nenhuma é: a mesma lógica da LUW que você verá no módulo 04.</a:t>
             </a:r>
             <a:endParaRPr lang="en-US" sz="1400" dirty="0"/>
           </a:p>
@@ -14674,7 +15668,7 @@
         </p:blipFill>
         <p:spPr>
           <a:xfrm>
-            <a:off x="2622728" y="3332988"/>
+            <a:off x="5446624" y="3332988"/>
             <a:ext cx="329184" cy="329184"/>
           </a:xfrm>
           <a:prstGeom prst="rect">
@@ -14698,7 +15692,7 @@
         </p:blipFill>
         <p:spPr>
           <a:xfrm>
-            <a:off x="5446624" y="3332988"/>
+            <a:off x="8270519" y="3332988"/>
             <a:ext cx="329184" cy="329184"/>
           </a:xfrm>
           <a:prstGeom prst="rect">
@@ -14722,7 +15716,7 @@
         </p:blipFill>
         <p:spPr>
           <a:xfrm>
-            <a:off x="8270519" y="3332988"/>
+            <a:off x="11094415" y="3332988"/>
             <a:ext cx="329184" cy="329184"/>
           </a:xfrm>
           <a:prstGeom prst="rect">
@@ -14746,8 +15740,8 @@
         </p:blipFill>
         <p:spPr>
           <a:xfrm>
-            <a:off x="11094415" y="3332988"/>
-            <a:ext cx="329184" cy="329184"/>
+            <a:off x="749808" y="5070348"/>
+            <a:ext cx="310896" cy="310896"/>
           </a:xfrm>
           <a:prstGeom prst="rect">
             <a:avLst/>
@@ -14770,8 +15764,8 @@
         </p:blipFill>
         <p:spPr>
           <a:xfrm>
-            <a:off x="749808" y="5070348"/>
-            <a:ext cx="310896" cy="310896"/>
+            <a:off x="2622728" y="3332988"/>
+            <a:ext cx="329184" cy="329184"/>
           </a:xfrm>
           <a:prstGeom prst="rect">
             <a:avLst/>
@@ -15552,7 +16546,7 @@
         </p:blipFill>
         <p:spPr>
           <a:xfrm>
-            <a:off x="822960" y="1965960"/>
+            <a:off x="6355080" y="1965960"/>
             <a:ext cx="256032" cy="256032"/>
           </a:xfrm>
           <a:prstGeom prst="rect">
@@ -15576,7 +16570,7 @@
         </p:blipFill>
         <p:spPr>
           <a:xfrm>
-            <a:off x="6355080" y="1965960"/>
+            <a:off x="822960" y="1965960"/>
             <a:ext cx="256032" cy="256032"/>
           </a:xfrm>
           <a:prstGeom prst="rect">
@@ -17238,7 +18232,7 @@
                   <a:srgbClr val="1D2D3E"/>
                 </a:solidFill>
               </a:rPr>
-              <a:t> direto no banco e passamos a alterar agências de viagem pelo business object </a:t>
+              <a:t> direto no banco e passamos a alterar itens de estoque pelo business object </a:t>
             </a:r>
             <a:r>
               <a:rPr lang="en-US" sz="1200" dirty="0">
@@ -17249,7 +18243,7 @@
                 <a:ea typeface="Courier New" pitchFamily="34" charset="-122"/>
                 <a:cs typeface="Courier New" pitchFamily="34" charset="-120"/>
               </a:rPr>
-              <a:t>/DMO/I_AgencyTP</a:t>
+              <a:t>ZR_PC_ITEM</a:t>
             </a:r>
             <a:r>
               <a:rPr lang="en-US" sz="1200" dirty="0">
@@ -17257,7 +18251,7 @@
                   <a:srgbClr val="1D2D3E"/>
                 </a:solidFill>
               </a:rPr>
-              <a:t>.</a:t>
+              <a:t> do projeto Pedidos de Compras.</a:t>
             </a:r>
             <a:endParaRPr lang="en-US" sz="1400" dirty="0"/>
           </a:p>
@@ -17327,7 +18321,7 @@
         </p:blipFill>
         <p:spPr>
           <a:xfrm>
-            <a:off x="8275091" y="1847088"/>
+            <a:off x="11094415" y="1847088"/>
             <a:ext cx="347472" cy="347472"/>
           </a:xfrm>
           <a:prstGeom prst="rect">
@@ -17351,7 +18345,7 @@
         </p:blipFill>
         <p:spPr>
           <a:xfrm>
-            <a:off x="11094415" y="1847088"/>
+            <a:off x="2636444" y="3858768"/>
             <a:ext cx="347472" cy="347472"/>
           </a:xfrm>
           <a:prstGeom prst="rect">
@@ -17375,7 +18369,7 @@
         </p:blipFill>
         <p:spPr>
           <a:xfrm>
-            <a:off x="2636444" y="3858768"/>
+            <a:off x="8275091" y="1847088"/>
             <a:ext cx="347472" cy="347472"/>
           </a:xfrm>
           <a:prstGeom prst="rect">
@@ -17399,7 +18393,7 @@
         </p:blipFill>
         <p:spPr>
           <a:xfrm>
-            <a:off x="5455768" y="3858768"/>
+            <a:off x="8275091" y="3858768"/>
             <a:ext cx="347472" cy="347472"/>
           </a:xfrm>
           <a:prstGeom prst="rect">
@@ -17423,7 +18417,7 @@
         </p:blipFill>
         <p:spPr>
           <a:xfrm>
-            <a:off x="8275091" y="3858768"/>
+            <a:off x="5455768" y="3858768"/>
             <a:ext cx="347472" cy="347472"/>
           </a:xfrm>
           <a:prstGeom prst="rect">
@@ -18008,7 +19002,7 @@
         </p:blipFill>
         <p:spPr>
           <a:xfrm>
-            <a:off x="4624730" y="3036316"/>
+            <a:off x="8399069" y="3036316"/>
             <a:ext cx="256032" cy="256032"/>
           </a:xfrm>
           <a:prstGeom prst="rect">
@@ -18032,7 +19026,7 @@
         </p:blipFill>
         <p:spPr>
           <a:xfrm>
-            <a:off x="8399069" y="3036316"/>
+            <a:off x="4624730" y="3036316"/>
             <a:ext cx="256032" cy="256032"/>
           </a:xfrm>
           <a:prstGeom prst="rect">
@@ -18751,7 +19745,7 @@
                 <a:ea typeface="Courier New" pitchFamily="34" charset="-122"/>
                 <a:cs typeface="Courier New" pitchFamily="34" charset="-120"/>
               </a:rPr>
-              <a:t>/DMO/R_AgencyTP</a:t>
+              <a:t>ZR_PC_ITEM</a:t>
             </a:r>
             <a:endParaRPr lang="en-US" sz="1400" dirty="0"/>
           </a:p>
@@ -19093,7 +20087,7 @@
                   <a:srgbClr val="556B82"/>
                 </a:solidFill>
               </a:rPr>
-              <a:t>Conferem os dados ao criar ou alterar, ex.: o nome da agência é obrigatório.</a:t>
+              <a:t>Conferem os dados ao criar ou alterar, ex.: nome, categoria e preço do item são obrigatórios.</a:t>
             </a:r>
             <a:endParaRPr lang="en-US" sz="1400" dirty="0"/>
           </a:p>
@@ -19202,7 +20196,7 @@
                   <a:srgbClr val="556B82"/>
                 </a:solidFill>
               </a:rPr>
-              <a:t>Calculam ou ajustam valores quando algo acontece, ex.: preencher um status inicial.</a:t>
+              <a:t>Calculam ou ajustam valores quando algo acontece, ex.: o status do estoque quando a quantidade muda.</a:t>
             </a:r>
             <a:endParaRPr lang="en-US" sz="1400" dirty="0"/>
           </a:p>
@@ -19311,7 +20305,7 @@
                   <a:srgbClr val="556B82"/>
                 </a:solidFill>
               </a:rPr>
-              <a:t>Operações de negócio além de criar, alterar e apagar, ex.: aprovar ou cancelar.</a:t>
+              <a:t>Operações de negócio além de criar, alterar e apagar, ex.: reservar estoque ou aprovar um pedido.</a:t>
             </a:r>
             <a:endParaRPr lang="en-US" sz="1400" dirty="0"/>
           </a:p>
@@ -19333,7 +20327,7 @@
         </p:blipFill>
         <p:spPr>
           <a:xfrm>
-            <a:off x="2077669" y="2084832"/>
+            <a:off x="5912968" y="2084832"/>
             <a:ext cx="365760" cy="365760"/>
           </a:xfrm>
           <a:prstGeom prst="rect">
@@ -19357,8 +20351,8 @@
         </p:blipFill>
         <p:spPr>
           <a:xfrm>
-            <a:off x="9748266" y="2084832"/>
-            <a:ext cx="365760" cy="365760"/>
+            <a:off x="8368711" y="3928994"/>
+            <a:ext cx="225308" cy="225308"/>
           </a:xfrm>
           <a:prstGeom prst="rect">
             <a:avLst/>
@@ -19381,8 +20375,8 @@
         </p:blipFill>
         <p:spPr>
           <a:xfrm>
-            <a:off x="820034" y="3928994"/>
-            <a:ext cx="225308" cy="225308"/>
+            <a:off x="2077669" y="2084832"/>
+            <a:ext cx="365760" cy="365760"/>
           </a:xfrm>
           <a:prstGeom prst="rect">
             <a:avLst/>
@@ -19405,7 +20399,7 @@
         </p:blipFill>
         <p:spPr>
           <a:xfrm>
-            <a:off x="5912968" y="2084832"/>
+            <a:off x="9748266" y="2084832"/>
             <a:ext cx="365760" cy="365760"/>
           </a:xfrm>
           <a:prstGeom prst="rect">
@@ -19429,7 +20423,7 @@
         </p:blipFill>
         <p:spPr>
           <a:xfrm>
-            <a:off x="4594372" y="3928994"/>
+            <a:off x="820034" y="3928994"/>
             <a:ext cx="225308" cy="225308"/>
           </a:xfrm>
           <a:prstGeom prst="rect">
@@ -19453,7 +20447,7 @@
         </p:blipFill>
         <p:spPr>
           <a:xfrm>
-            <a:off x="8368711" y="3928994"/>
+            <a:off x="4594372" y="3928994"/>
             <a:ext cx="225308" cy="225308"/>
           </a:xfrm>
           <a:prstGeom prst="rect">
@@ -19601,7 +20595,7 @@
                   <a:srgbClr val="1D2D3E"/>
                 </a:solidFill>
               </a:rPr>
-              <a:t>O que o business object da agência pode fazer</a:t>
+              <a:t>O que o business object do item pode fazer</a:t>
             </a:r>
             <a:endParaRPr lang="en-US" sz="2800" dirty="0"/>
           </a:p>
@@ -19665,7 +20659,7 @@
         <p:spPr>
           <a:xfrm>
             <a:off x="640080" y="1700784"/>
-            <a:ext cx="1920240" cy="292608"/>
+            <a:ext cx="1531620" cy="292608"/>
           </a:xfrm>
           <a:prstGeom prst="rect">
             <a:avLst/>
@@ -19685,7 +20679,7 @@
         <p:spPr>
           <a:xfrm>
             <a:off x="640080" y="1700784"/>
-            <a:ext cx="1920240" cy="27432"/>
+            <a:ext cx="1531620" cy="27432"/>
           </a:xfrm>
           <a:prstGeom prst="rect">
             <a:avLst/>
@@ -19705,7 +20699,7 @@
         <p:spPr>
           <a:xfrm>
             <a:off x="731520" y="1719072"/>
-            <a:ext cx="1737360" cy="274320"/>
+            <a:ext cx="1348740" cy="274320"/>
           </a:xfrm>
           <a:prstGeom prst="rect">
             <a:avLst/>
@@ -19726,7 +20720,7 @@
                   <a:srgbClr val="FFFFFF"/>
                 </a:solidFill>
               </a:rPr>
-              <a:t>/dmo/r_agencytp.bdef</a:t>
+              <a:t>zr_pc_item.bdef</a:t>
             </a:r>
             <a:endParaRPr lang="en-US" sz="950" dirty="0"/>
           </a:p>
@@ -19762,7 +20756,7 @@
                   <a:srgbClr val="9DA5B4"/>
                 </a:solidFill>
               </a:rPr>
-              <a:t>/DMO/FLIGHT_DRAFT › /DMO/R_AGENCYTP (simplificada)</a:t>
+              <a:t>ZAVBS_PC_ESTOQUE › ZR_PC_ITEM (simplificada)</a:t>
             </a:r>
             <a:endParaRPr lang="en-US" sz="850" dirty="0"/>
           </a:p>
@@ -19796,7 +20790,7 @@
               <a:buNone/>
             </a:pPr>
             <a:r>
-              <a:rPr lang="en-US" sz="1050" dirty="0">
+              <a:rPr lang="en-US" sz="950" dirty="0">
                 <a:solidFill>
                   <a:srgbClr val="6E7681"/>
                 </a:solidFill>
@@ -19806,7 +20800,7 @@
               </a:rPr>
               <a:t>1</a:t>
             </a:r>
-            <a:endParaRPr lang="en-US" sz="1050" dirty="0"/>
+            <a:endParaRPr lang="en-US" sz="950" dirty="0"/>
           </a:p>
           <a:p>
             <a:pPr algn="r" indent="0" marL="0">
@@ -19816,7 +20810,7 @@
               <a:buNone/>
             </a:pPr>
             <a:r>
-              <a:rPr lang="en-US" sz="1050" dirty="0">
+              <a:rPr lang="en-US" sz="950" dirty="0">
                 <a:solidFill>
                   <a:srgbClr val="6E7681"/>
                 </a:solidFill>
@@ -19826,7 +20820,7 @@
               </a:rPr>
               <a:t>2</a:t>
             </a:r>
-            <a:endParaRPr lang="en-US" sz="1050" dirty="0"/>
+            <a:endParaRPr lang="en-US" sz="950" dirty="0"/>
           </a:p>
           <a:p>
             <a:pPr algn="r" indent="0" marL="0">
@@ -19836,7 +20830,7 @@
               <a:buNone/>
             </a:pPr>
             <a:r>
-              <a:rPr lang="en-US" sz="1050" dirty="0">
+              <a:rPr lang="en-US" sz="950" dirty="0">
                 <a:solidFill>
                   <a:srgbClr val="6E7681"/>
                 </a:solidFill>
@@ -19846,7 +20840,7 @@
               </a:rPr>
               <a:t>3</a:t>
             </a:r>
-            <a:endParaRPr lang="en-US" sz="1050" dirty="0"/>
+            <a:endParaRPr lang="en-US" sz="950" dirty="0"/>
           </a:p>
           <a:p>
             <a:pPr algn="r" indent="0" marL="0">
@@ -19856,7 +20850,7 @@
               <a:buNone/>
             </a:pPr>
             <a:r>
-              <a:rPr lang="en-US" sz="1050" dirty="0">
+              <a:rPr lang="en-US" sz="950" dirty="0">
                 <a:solidFill>
                   <a:srgbClr val="6E7681"/>
                 </a:solidFill>
@@ -19866,7 +20860,7 @@
               </a:rPr>
               <a:t>4</a:t>
             </a:r>
-            <a:endParaRPr lang="en-US" sz="1050" dirty="0"/>
+            <a:endParaRPr lang="en-US" sz="950" dirty="0"/>
           </a:p>
           <a:p>
             <a:pPr algn="r" indent="0" marL="0">
@@ -19876,7 +20870,7 @@
               <a:buNone/>
             </a:pPr>
             <a:r>
-              <a:rPr lang="en-US" sz="1050" dirty="0">
+              <a:rPr lang="en-US" sz="950" dirty="0">
                 <a:solidFill>
                   <a:srgbClr val="6E7681"/>
                 </a:solidFill>
@@ -19886,7 +20880,7 @@
               </a:rPr>
               <a:t>5</a:t>
             </a:r>
-            <a:endParaRPr lang="en-US" sz="1050" dirty="0"/>
+            <a:endParaRPr lang="en-US" sz="950" dirty="0"/>
           </a:p>
           <a:p>
             <a:pPr algn="r" indent="0" marL="0">
@@ -19896,7 +20890,7 @@
               <a:buNone/>
             </a:pPr>
             <a:r>
-              <a:rPr lang="en-US" sz="1050" dirty="0">
+              <a:rPr lang="en-US" sz="950" dirty="0">
                 <a:solidFill>
                   <a:srgbClr val="6E7681"/>
                 </a:solidFill>
@@ -19906,7 +20900,7 @@
               </a:rPr>
               <a:t>6</a:t>
             </a:r>
-            <a:endParaRPr lang="en-US" sz="1050" dirty="0"/>
+            <a:endParaRPr lang="en-US" sz="950" dirty="0"/>
           </a:p>
           <a:p>
             <a:pPr algn="r" indent="0" marL="0">
@@ -19916,7 +20910,7 @@
               <a:buNone/>
             </a:pPr>
             <a:r>
-              <a:rPr lang="en-US" sz="1050" dirty="0">
+              <a:rPr lang="en-US" sz="950" dirty="0">
                 <a:solidFill>
                   <a:srgbClr val="6E7681"/>
                 </a:solidFill>
@@ -19926,7 +20920,7 @@
               </a:rPr>
               <a:t>7</a:t>
             </a:r>
-            <a:endParaRPr lang="en-US" sz="1050" dirty="0"/>
+            <a:endParaRPr lang="en-US" sz="950" dirty="0"/>
           </a:p>
           <a:p>
             <a:pPr algn="r" indent="0" marL="0">
@@ -19936,7 +20930,7 @@
               <a:buNone/>
             </a:pPr>
             <a:r>
-              <a:rPr lang="en-US" sz="1050" dirty="0">
+              <a:rPr lang="en-US" sz="950" dirty="0">
                 <a:solidFill>
                   <a:srgbClr val="6E7681"/>
                 </a:solidFill>
@@ -19946,7 +20940,7 @@
               </a:rPr>
               <a:t>8</a:t>
             </a:r>
-            <a:endParaRPr lang="en-US" sz="1050" dirty="0"/>
+            <a:endParaRPr lang="en-US" sz="950" dirty="0"/>
           </a:p>
           <a:p>
             <a:pPr algn="r" indent="0" marL="0">
@@ -19956,7 +20950,7 @@
               <a:buNone/>
             </a:pPr>
             <a:r>
-              <a:rPr lang="en-US" sz="1050" dirty="0">
+              <a:rPr lang="en-US" sz="950" dirty="0">
                 <a:solidFill>
                   <a:srgbClr val="6E7681"/>
                 </a:solidFill>
@@ -19966,7 +20960,7 @@
               </a:rPr>
               <a:t>9</a:t>
             </a:r>
-            <a:endParaRPr lang="en-US" sz="1050" dirty="0"/>
+            <a:endParaRPr lang="en-US" sz="950" dirty="0"/>
           </a:p>
           <a:p>
             <a:pPr algn="r" indent="0" marL="0">
@@ -19976,7 +20970,7 @@
               <a:buNone/>
             </a:pPr>
             <a:r>
-              <a:rPr lang="en-US" sz="1050" dirty="0">
+              <a:rPr lang="en-US" sz="950" dirty="0">
                 <a:solidFill>
                   <a:srgbClr val="6E7681"/>
                 </a:solidFill>
@@ -19986,7 +20980,7 @@
               </a:rPr>
               <a:t>10</a:t>
             </a:r>
-            <a:endParaRPr lang="en-US" sz="1050" dirty="0"/>
+            <a:endParaRPr lang="en-US" sz="950" dirty="0"/>
           </a:p>
           <a:p>
             <a:pPr algn="r" indent="0" marL="0">
@@ -19996,7 +20990,7 @@
               <a:buNone/>
             </a:pPr>
             <a:r>
-              <a:rPr lang="en-US" sz="1050" dirty="0">
+              <a:rPr lang="en-US" sz="950" dirty="0">
                 <a:solidFill>
                   <a:srgbClr val="6E7681"/>
                 </a:solidFill>
@@ -20006,7 +21000,7 @@
               </a:rPr>
               <a:t>11</a:t>
             </a:r>
-            <a:endParaRPr lang="en-US" sz="1050" dirty="0"/>
+            <a:endParaRPr lang="en-US" sz="950" dirty="0"/>
           </a:p>
           <a:p>
             <a:pPr algn="r" indent="0" marL="0">
@@ -20016,7 +21010,7 @@
               <a:buNone/>
             </a:pPr>
             <a:r>
-              <a:rPr lang="en-US" sz="1050" dirty="0">
+              <a:rPr lang="en-US" sz="950" dirty="0">
                 <a:solidFill>
                   <a:srgbClr val="6E7681"/>
                 </a:solidFill>
@@ -20026,7 +21020,7 @@
               </a:rPr>
               <a:t>12</a:t>
             </a:r>
-            <a:endParaRPr lang="en-US" sz="1050" dirty="0"/>
+            <a:endParaRPr lang="en-US" sz="950" dirty="0"/>
           </a:p>
           <a:p>
             <a:pPr algn="r" indent="0" marL="0">
@@ -20036,7 +21030,7 @@
               <a:buNone/>
             </a:pPr>
             <a:r>
-              <a:rPr lang="en-US" sz="1050" dirty="0">
+              <a:rPr lang="en-US" sz="950" dirty="0">
                 <a:solidFill>
                   <a:srgbClr val="6E7681"/>
                 </a:solidFill>
@@ -20046,7 +21040,7 @@
               </a:rPr>
               <a:t>13</a:t>
             </a:r>
-            <a:endParaRPr lang="en-US" sz="1050" dirty="0"/>
+            <a:endParaRPr lang="en-US" sz="950" dirty="0"/>
           </a:p>
           <a:p>
             <a:pPr algn="r" indent="0" marL="0">
@@ -20056,7 +21050,7 @@
               <a:buNone/>
             </a:pPr>
             <a:r>
-              <a:rPr lang="en-US" sz="1050" dirty="0">
+              <a:rPr lang="en-US" sz="950" dirty="0">
                 <a:solidFill>
                   <a:srgbClr val="6E7681"/>
                 </a:solidFill>
@@ -20066,7 +21060,7 @@
               </a:rPr>
               <a:t>14</a:t>
             </a:r>
-            <a:endParaRPr lang="en-US" sz="1050" dirty="0"/>
+            <a:endParaRPr lang="en-US" sz="950" dirty="0"/>
           </a:p>
           <a:p>
             <a:pPr algn="r" indent="0" marL="0">
@@ -20076,7 +21070,7 @@
               <a:buNone/>
             </a:pPr>
             <a:r>
-              <a:rPr lang="en-US" sz="1050" dirty="0">
+              <a:rPr lang="en-US" sz="950" dirty="0">
                 <a:solidFill>
                   <a:srgbClr val="6E7681"/>
                 </a:solidFill>
@@ -20086,7 +21080,7 @@
               </a:rPr>
               <a:t>15</a:t>
             </a:r>
-            <a:endParaRPr lang="en-US" sz="1050" dirty="0"/>
+            <a:endParaRPr lang="en-US" sz="950" dirty="0"/>
           </a:p>
           <a:p>
             <a:pPr algn="r" indent="0" marL="0">
@@ -20096,7 +21090,7 @@
               <a:buNone/>
             </a:pPr>
             <a:r>
-              <a:rPr lang="en-US" sz="1050" dirty="0">
+              <a:rPr lang="en-US" sz="950" dirty="0">
                 <a:solidFill>
                   <a:srgbClr val="6E7681"/>
                 </a:solidFill>
@@ -20106,7 +21100,7 @@
               </a:rPr>
               <a:t>16</a:t>
             </a:r>
-            <a:endParaRPr lang="en-US" sz="1050" dirty="0"/>
+            <a:endParaRPr lang="en-US" sz="950" dirty="0"/>
           </a:p>
           <a:p>
             <a:pPr algn="r" indent="0" marL="0">
@@ -20116,7 +21110,7 @@
               <a:buNone/>
             </a:pPr>
             <a:r>
-              <a:rPr lang="en-US" sz="1050" dirty="0">
+              <a:rPr lang="en-US" sz="950" dirty="0">
                 <a:solidFill>
                   <a:srgbClr val="6E7681"/>
                 </a:solidFill>
@@ -20126,7 +21120,67 @@
               </a:rPr>
               <a:t>17</a:t>
             </a:r>
-            <a:endParaRPr lang="en-US" sz="1050" dirty="0"/>
+            <a:endParaRPr lang="en-US" sz="950" dirty="0"/>
+          </a:p>
+          <a:p>
+            <a:pPr algn="r" indent="0" marL="0">
+              <a:lnSpc>
+                <a:spcPct val="105000"/>
+              </a:lnSpc>
+              <a:buNone/>
+            </a:pPr>
+            <a:r>
+              <a:rPr lang="en-US" sz="950" dirty="0">
+                <a:solidFill>
+                  <a:srgbClr val="6E7681"/>
+                </a:solidFill>
+                <a:latin typeface="Courier New" pitchFamily="34" charset="0"/>
+                <a:ea typeface="Courier New" pitchFamily="34" charset="-122"/>
+                <a:cs typeface="Courier New" pitchFamily="34" charset="-120"/>
+              </a:rPr>
+              <a:t>18</a:t>
+            </a:r>
+            <a:endParaRPr lang="en-US" sz="950" dirty="0"/>
+          </a:p>
+          <a:p>
+            <a:pPr algn="r" indent="0" marL="0">
+              <a:lnSpc>
+                <a:spcPct val="105000"/>
+              </a:lnSpc>
+              <a:buNone/>
+            </a:pPr>
+            <a:r>
+              <a:rPr lang="en-US" sz="950" dirty="0">
+                <a:solidFill>
+                  <a:srgbClr val="6E7681"/>
+                </a:solidFill>
+                <a:latin typeface="Courier New" pitchFamily="34" charset="0"/>
+                <a:ea typeface="Courier New" pitchFamily="34" charset="-122"/>
+                <a:cs typeface="Courier New" pitchFamily="34" charset="-120"/>
+              </a:rPr>
+              <a:t>19</a:t>
+            </a:r>
+            <a:endParaRPr lang="en-US" sz="950" dirty="0"/>
+          </a:p>
+          <a:p>
+            <a:pPr algn="r" indent="0" marL="0">
+              <a:lnSpc>
+                <a:spcPct val="105000"/>
+              </a:lnSpc>
+              <a:buNone/>
+            </a:pPr>
+            <a:r>
+              <a:rPr lang="en-US" sz="950" dirty="0">
+                <a:solidFill>
+                  <a:srgbClr val="6E7681"/>
+                </a:solidFill>
+                <a:latin typeface="Courier New" pitchFamily="34" charset="0"/>
+                <a:ea typeface="Courier New" pitchFamily="34" charset="-122"/>
+                <a:cs typeface="Courier New" pitchFamily="34" charset="-120"/>
+              </a:rPr>
+              <a:t>20</a:t>
+            </a:r>
+            <a:endParaRPr lang="en-US" sz="950" dirty="0"/>
           </a:p>
         </p:txBody>
       </p:sp>
@@ -20158,7 +21212,7 @@
               <a:buNone/>
             </a:pPr>
             <a:r>
-              <a:rPr lang="en-US" sz="1050" dirty="0">
+              <a:rPr lang="en-US" sz="950" dirty="0">
                 <a:solidFill>
                   <a:srgbClr val="569CD6"/>
                 </a:solidFill>
@@ -20169,7 +21223,7 @@
               <a:t>managed</a:t>
             </a:r>
             <a:r>
-              <a:rPr lang="en-US" sz="1050" dirty="0">
+              <a:rPr lang="en-US" sz="950" dirty="0">
                 <a:solidFill>
                   <a:srgbClr val="CCCCCC"/>
                 </a:solidFill>
@@ -20180,7 +21234,7 @@
               <a:t> </a:t>
             </a:r>
             <a:r>
-              <a:rPr lang="en-US" sz="1050" dirty="0">
+              <a:rPr lang="en-US" sz="950" dirty="0">
                 <a:solidFill>
                   <a:srgbClr val="569CD6"/>
                 </a:solidFill>
@@ -20191,7 +21245,7 @@
               <a:t>implementation</a:t>
             </a:r>
             <a:r>
-              <a:rPr lang="en-US" sz="1050" dirty="0">
+              <a:rPr lang="en-US" sz="950" dirty="0">
                 <a:solidFill>
                   <a:srgbClr val="CCCCCC"/>
                 </a:solidFill>
@@ -20202,7 +21256,7 @@
               <a:t> </a:t>
             </a:r>
             <a:r>
-              <a:rPr lang="en-US" sz="1050" dirty="0">
+              <a:rPr lang="en-US" sz="950" dirty="0">
                 <a:solidFill>
                   <a:srgbClr val="569CD6"/>
                 </a:solidFill>
@@ -20213,7 +21267,7 @@
               <a:t>in</a:t>
             </a:r>
             <a:r>
-              <a:rPr lang="en-US" sz="1050" dirty="0">
+              <a:rPr lang="en-US" sz="950" dirty="0">
                 <a:solidFill>
                   <a:srgbClr val="CCCCCC"/>
                 </a:solidFill>
@@ -20224,7 +21278,7 @@
               <a:t> </a:t>
             </a:r>
             <a:r>
-              <a:rPr lang="en-US" sz="1050" dirty="0">
+              <a:rPr lang="en-US" sz="950" dirty="0">
                 <a:solidFill>
                   <a:srgbClr val="569CD6"/>
                 </a:solidFill>
@@ -20235,7 +21289,7 @@
               <a:t>class</a:t>
             </a:r>
             <a:r>
-              <a:rPr lang="en-US" sz="1050" dirty="0">
+              <a:rPr lang="en-US" sz="950" dirty="0">
                 <a:solidFill>
                   <a:srgbClr val="CCCCCC"/>
                 </a:solidFill>
@@ -20246,18 +21300,18 @@
               <a:t> </a:t>
             </a:r>
             <a:r>
-              <a:rPr lang="en-US" sz="1050" dirty="0">
-                <a:solidFill>
-                  <a:srgbClr val="CCCCCC"/>
-                </a:solidFill>
-                <a:latin typeface="Courier New" pitchFamily="34" charset="0"/>
-                <a:ea typeface="Courier New" pitchFamily="34" charset="-122"/>
-                <a:cs typeface="Courier New" pitchFamily="34" charset="-120"/>
-              </a:rPr>
-              <a:t>/dmo/bp_r_agencytp</a:t>
-            </a:r>
-            <a:r>
-              <a:rPr lang="en-US" sz="1050" dirty="0">
+              <a:rPr lang="en-US" sz="950" dirty="0">
+                <a:solidFill>
+                  <a:srgbClr val="CCCCCC"/>
+                </a:solidFill>
+                <a:latin typeface="Courier New" pitchFamily="34" charset="0"/>
+                <a:ea typeface="Courier New" pitchFamily="34" charset="-122"/>
+                <a:cs typeface="Courier New" pitchFamily="34" charset="-120"/>
+              </a:rPr>
+              <a:t>zbp_r_pc_item</a:t>
+            </a:r>
+            <a:r>
+              <a:rPr lang="en-US" sz="950" dirty="0">
                 <a:solidFill>
                   <a:srgbClr val="CCCCCC"/>
                 </a:solidFill>
@@ -20268,7 +21322,7 @@
               <a:t> </a:t>
             </a:r>
             <a:r>
-              <a:rPr lang="en-US" sz="1050" dirty="0">
+              <a:rPr lang="en-US" sz="950" dirty="0">
                 <a:solidFill>
                   <a:srgbClr val="CCCCCC"/>
                 </a:solidFill>
@@ -20279,7 +21333,7 @@
               <a:t>unique</a:t>
             </a:r>
             <a:r>
-              <a:rPr lang="en-US" sz="1050" dirty="0">
+              <a:rPr lang="en-US" sz="950" dirty="0">
                 <a:solidFill>
                   <a:srgbClr val="CCCCCC"/>
                 </a:solidFill>
@@ -20289,7 +21343,7 @@
               </a:rPr>
               <a:t>;</a:t>
             </a:r>
-            <a:endParaRPr lang="en-US" sz="1050" dirty="0"/>
+            <a:endParaRPr lang="en-US" sz="950" dirty="0"/>
           </a:p>
           <a:p>
             <a:pPr indent="0" marL="0">
@@ -20299,7 +21353,7 @@
               <a:buNone/>
             </a:pPr>
             <a:r>
-              <a:rPr lang="en-US" sz="1050" dirty="0">
+              <a:rPr lang="en-US" sz="950" dirty="0">
                 <a:solidFill>
                   <a:srgbClr val="569CD6"/>
                 </a:solidFill>
@@ -20310,7 +21364,7 @@
               <a:t>strict</a:t>
             </a:r>
             <a:r>
-              <a:rPr lang="en-US" sz="1050" dirty="0">
+              <a:rPr lang="en-US" sz="950" dirty="0">
                 <a:solidFill>
                   <a:srgbClr val="CCCCCC"/>
                 </a:solidFill>
@@ -20321,7 +21375,7 @@
               <a:t> </a:t>
             </a:r>
             <a:r>
-              <a:rPr lang="en-US" sz="1050" dirty="0">
+              <a:rPr lang="en-US" sz="950" dirty="0">
                 <a:solidFill>
                   <a:srgbClr val="CCCCCC"/>
                 </a:solidFill>
@@ -20332,7 +21386,7 @@
               <a:t>(</a:t>
             </a:r>
             <a:r>
-              <a:rPr lang="en-US" sz="1050" dirty="0">
+              <a:rPr lang="en-US" sz="950" dirty="0">
                 <a:solidFill>
                   <a:srgbClr val="CCCCCC"/>
                 </a:solidFill>
@@ -20343,7 +21397,7 @@
               <a:t> </a:t>
             </a:r>
             <a:r>
-              <a:rPr lang="en-US" sz="1050" dirty="0">
+              <a:rPr lang="en-US" sz="950" dirty="0">
                 <a:solidFill>
                   <a:srgbClr val="B5CEA8"/>
                 </a:solidFill>
@@ -20354,7 +21408,7 @@
               <a:t>2</a:t>
             </a:r>
             <a:r>
-              <a:rPr lang="en-US" sz="1050" dirty="0">
+              <a:rPr lang="en-US" sz="950" dirty="0">
                 <a:solidFill>
                   <a:srgbClr val="CCCCCC"/>
                 </a:solidFill>
@@ -20365,7 +21419,7 @@
               <a:t> </a:t>
             </a:r>
             <a:r>
-              <a:rPr lang="en-US" sz="1050" dirty="0">
+              <a:rPr lang="en-US" sz="950" dirty="0">
                 <a:solidFill>
                   <a:srgbClr val="CCCCCC"/>
                 </a:solidFill>
@@ -20376,7 +21430,7 @@
               <a:t>)</a:t>
             </a:r>
             <a:r>
-              <a:rPr lang="en-US" sz="1050" dirty="0">
+              <a:rPr lang="en-US" sz="950" dirty="0">
                 <a:solidFill>
                   <a:srgbClr val="CCCCCC"/>
                 </a:solidFill>
@@ -20386,7 +21440,7 @@
               </a:rPr>
               <a:t>;</a:t>
             </a:r>
-            <a:endParaRPr lang="en-US" sz="1050" dirty="0"/>
+            <a:endParaRPr lang="en-US" sz="950" dirty="0"/>
           </a:p>
           <a:p>
             <a:pPr indent="0" marL="0">
@@ -20396,7 +21450,7 @@
               <a:buNone/>
             </a:pPr>
             <a:r>
-              <a:rPr lang="en-US" sz="1050" dirty="0">
+              <a:rPr lang="en-US" sz="950" dirty="0">
                 <a:solidFill>
                   <a:srgbClr val="569CD6"/>
                 </a:solidFill>
@@ -20407,7 +21461,7 @@
               <a:t>with</a:t>
             </a:r>
             <a:r>
-              <a:rPr lang="en-US" sz="1050" dirty="0">
+              <a:rPr lang="en-US" sz="950" dirty="0">
                 <a:solidFill>
                   <a:srgbClr val="CCCCCC"/>
                 </a:solidFill>
@@ -20418,7 +21472,7 @@
               <a:t> </a:t>
             </a:r>
             <a:r>
-              <a:rPr lang="en-US" sz="1050" dirty="0">
+              <a:rPr lang="en-US" sz="950" dirty="0">
                 <a:solidFill>
                   <a:srgbClr val="569CD6"/>
                 </a:solidFill>
@@ -20429,7 +21483,7 @@
               <a:t>draft</a:t>
             </a:r>
             <a:r>
-              <a:rPr lang="en-US" sz="1050" dirty="0">
+              <a:rPr lang="en-US" sz="950" dirty="0">
                 <a:solidFill>
                   <a:srgbClr val="CCCCCC"/>
                 </a:solidFill>
@@ -20439,7 +21493,7 @@
               </a:rPr>
               <a:t>;</a:t>
             </a:r>
-            <a:endParaRPr lang="en-US" sz="1050" dirty="0"/>
+            <a:endParaRPr lang="en-US" sz="950" dirty="0"/>
           </a:p>
           <a:p>
             <a:pPr indent="0" marL="0">
@@ -20449,7 +21503,7 @@
               <a:buNone/>
             </a:pPr>
             <a:r>
-              <a:rPr lang="en-US" sz="1050" dirty="0">
+              <a:rPr lang="en-US" sz="950" dirty="0">
                 <a:solidFill>
                   <a:srgbClr val="000000"/>
                 </a:solidFill>
@@ -20459,7 +21513,7 @@
               </a:rPr>
               <a:t> </a:t>
             </a:r>
-            <a:endParaRPr lang="en-US" sz="1050" dirty="0"/>
+            <a:endParaRPr lang="en-US" sz="950" dirty="0"/>
           </a:p>
           <a:p>
             <a:pPr indent="0" marL="0">
@@ -20469,7 +21523,7 @@
               <a:buNone/>
             </a:pPr>
             <a:r>
-              <a:rPr lang="en-US" sz="1050" dirty="0">
+              <a:rPr lang="en-US" sz="950" dirty="0">
                 <a:solidFill>
                   <a:srgbClr val="569CD6"/>
                 </a:solidFill>
@@ -20480,7 +21534,7 @@
               <a:t>define</a:t>
             </a:r>
             <a:r>
-              <a:rPr lang="en-US" sz="1050" dirty="0">
+              <a:rPr lang="en-US" sz="950" dirty="0">
                 <a:solidFill>
                   <a:srgbClr val="CCCCCC"/>
                 </a:solidFill>
@@ -20491,7 +21545,7 @@
               <a:t> </a:t>
             </a:r>
             <a:r>
-              <a:rPr lang="en-US" sz="1050" dirty="0">
+              <a:rPr lang="en-US" sz="950" dirty="0">
                 <a:solidFill>
                   <a:srgbClr val="569CD6"/>
                 </a:solidFill>
@@ -20502,7 +21556,7 @@
               <a:t>behavior</a:t>
             </a:r>
             <a:r>
-              <a:rPr lang="en-US" sz="1050" dirty="0">
+              <a:rPr lang="en-US" sz="950" dirty="0">
                 <a:solidFill>
                   <a:srgbClr val="CCCCCC"/>
                 </a:solidFill>
@@ -20513,7 +21567,7 @@
               <a:t> </a:t>
             </a:r>
             <a:r>
-              <a:rPr lang="en-US" sz="1050" dirty="0">
+              <a:rPr lang="en-US" sz="950" dirty="0">
                 <a:solidFill>
                   <a:srgbClr val="569CD6"/>
                 </a:solidFill>
@@ -20524,7 +21578,7 @@
               <a:t>for</a:t>
             </a:r>
             <a:r>
-              <a:rPr lang="en-US" sz="1050" dirty="0">
+              <a:rPr lang="en-US" sz="950" dirty="0">
                 <a:solidFill>
                   <a:srgbClr val="CCCCCC"/>
                 </a:solidFill>
@@ -20535,18 +21589,18 @@
               <a:t> </a:t>
             </a:r>
             <a:r>
-              <a:rPr lang="en-US" sz="1050" dirty="0">
-                <a:solidFill>
-                  <a:srgbClr val="CCCCCC"/>
-                </a:solidFill>
-                <a:latin typeface="Courier New" pitchFamily="34" charset="0"/>
-                <a:ea typeface="Courier New" pitchFamily="34" charset="-122"/>
-                <a:cs typeface="Courier New" pitchFamily="34" charset="-120"/>
-              </a:rPr>
-              <a:t>/DMO/R_AgencyTP</a:t>
-            </a:r>
-            <a:r>
-              <a:rPr lang="en-US" sz="1050" dirty="0">
+              <a:rPr lang="en-US" sz="950" dirty="0">
+                <a:solidFill>
+                  <a:srgbClr val="CCCCCC"/>
+                </a:solidFill>
+                <a:latin typeface="Courier New" pitchFamily="34" charset="0"/>
+                <a:ea typeface="Courier New" pitchFamily="34" charset="-122"/>
+                <a:cs typeface="Courier New" pitchFamily="34" charset="-120"/>
+              </a:rPr>
+              <a:t>ZR_PC_ITEM</a:t>
+            </a:r>
+            <a:r>
+              <a:rPr lang="en-US" sz="950" dirty="0">
                 <a:solidFill>
                   <a:srgbClr val="CCCCCC"/>
                 </a:solidFill>
@@ -20557,7 +21611,7 @@
               <a:t> </a:t>
             </a:r>
             <a:r>
-              <a:rPr lang="en-US" sz="1050" dirty="0">
+              <a:rPr lang="en-US" sz="950" dirty="0">
                 <a:solidFill>
                   <a:srgbClr val="569CD6"/>
                 </a:solidFill>
@@ -20568,7 +21622,7 @@
               <a:t>alias</a:t>
             </a:r>
             <a:r>
-              <a:rPr lang="en-US" sz="1050" dirty="0">
+              <a:rPr lang="en-US" sz="950" dirty="0">
                 <a:solidFill>
                   <a:srgbClr val="CCCCCC"/>
                 </a:solidFill>
@@ -20579,17 +21633,17 @@
               <a:t> </a:t>
             </a:r>
             <a:r>
-              <a:rPr lang="en-US" sz="1050" dirty="0">
-                <a:solidFill>
-                  <a:srgbClr val="CCCCCC"/>
-                </a:solidFill>
-                <a:latin typeface="Courier New" pitchFamily="34" charset="0"/>
-                <a:ea typeface="Courier New" pitchFamily="34" charset="-122"/>
-                <a:cs typeface="Courier New" pitchFamily="34" charset="-120"/>
-              </a:rPr>
-              <a:t>/DMO/Agency</a:t>
-            </a:r>
-            <a:endParaRPr lang="en-US" sz="1050" dirty="0"/>
+              <a:rPr lang="en-US" sz="950" dirty="0">
+                <a:solidFill>
+                  <a:srgbClr val="CCCCCC"/>
+                </a:solidFill>
+                <a:latin typeface="Courier New" pitchFamily="34" charset="0"/>
+                <a:ea typeface="Courier New" pitchFamily="34" charset="-122"/>
+                <a:cs typeface="Courier New" pitchFamily="34" charset="-120"/>
+              </a:rPr>
+              <a:t>Item</a:t>
+            </a:r>
+            <a:endParaRPr lang="en-US" sz="950" dirty="0"/>
           </a:p>
           <a:p>
             <a:pPr indent="0" marL="0">
@@ -20599,7 +21653,7 @@
               <a:buNone/>
             </a:pPr>
             <a:r>
-              <a:rPr lang="en-US" sz="1050" dirty="0">
+              <a:rPr lang="en-US" sz="950" dirty="0">
                 <a:solidFill>
                   <a:srgbClr val="569CD6"/>
                 </a:solidFill>
@@ -20610,7 +21664,7 @@
               <a:t>persistent</a:t>
             </a:r>
             <a:r>
-              <a:rPr lang="en-US" sz="1050" dirty="0">
+              <a:rPr lang="en-US" sz="950" dirty="0">
                 <a:solidFill>
                   <a:srgbClr val="CCCCCC"/>
                 </a:solidFill>
@@ -20621,7 +21675,7 @@
               <a:t> </a:t>
             </a:r>
             <a:r>
-              <a:rPr lang="en-US" sz="1050" dirty="0">
+              <a:rPr lang="en-US" sz="950" dirty="0">
                 <a:solidFill>
                   <a:srgbClr val="569CD6"/>
                 </a:solidFill>
@@ -20632,7 +21686,7 @@
               <a:t>table</a:t>
             </a:r>
             <a:r>
-              <a:rPr lang="en-US" sz="1050" dirty="0">
+              <a:rPr lang="en-US" sz="950" dirty="0">
                 <a:solidFill>
                   <a:srgbClr val="CCCCCC"/>
                 </a:solidFill>
@@ -20643,17 +21697,17 @@
               <a:t> </a:t>
             </a:r>
             <a:r>
-              <a:rPr lang="en-US" sz="1050" dirty="0">
-                <a:solidFill>
-                  <a:srgbClr val="CCCCCC"/>
-                </a:solidFill>
-                <a:latin typeface="Courier New" pitchFamily="34" charset="0"/>
-                <a:ea typeface="Courier New" pitchFamily="34" charset="-122"/>
-                <a:cs typeface="Courier New" pitchFamily="34" charset="-120"/>
-              </a:rPr>
-              <a:t>/dmo/agency</a:t>
-            </a:r>
-            <a:endParaRPr lang="en-US" sz="1050" dirty="0"/>
+              <a:rPr lang="en-US" sz="950" dirty="0">
+                <a:solidFill>
+                  <a:srgbClr val="CCCCCC"/>
+                </a:solidFill>
+                <a:latin typeface="Courier New" pitchFamily="34" charset="0"/>
+                <a:ea typeface="Courier New" pitchFamily="34" charset="-122"/>
+                <a:cs typeface="Courier New" pitchFamily="34" charset="-120"/>
+              </a:rPr>
+              <a:t>zta_pc_item</a:t>
+            </a:r>
+            <a:endParaRPr lang="en-US" sz="950" dirty="0"/>
           </a:p>
           <a:p>
             <a:pPr indent="0" marL="0">
@@ -20663,7 +21717,7 @@
               <a:buNone/>
             </a:pPr>
             <a:r>
-              <a:rPr lang="en-US" sz="1050" dirty="0">
+              <a:rPr lang="en-US" sz="950" dirty="0">
                 <a:solidFill>
                   <a:srgbClr val="569CD6"/>
                 </a:solidFill>
@@ -20674,7 +21728,7 @@
               <a:t>draft</a:t>
             </a:r>
             <a:r>
-              <a:rPr lang="en-US" sz="1050" dirty="0">
+              <a:rPr lang="en-US" sz="950" dirty="0">
                 <a:solidFill>
                   <a:srgbClr val="CCCCCC"/>
                 </a:solidFill>
@@ -20685,7 +21739,7 @@
               <a:t> </a:t>
             </a:r>
             <a:r>
-              <a:rPr lang="en-US" sz="1050" dirty="0">
+              <a:rPr lang="en-US" sz="950" dirty="0">
                 <a:solidFill>
                   <a:srgbClr val="569CD6"/>
                 </a:solidFill>
@@ -20696,7 +21750,7 @@
               <a:t>table</a:t>
             </a:r>
             <a:r>
-              <a:rPr lang="en-US" sz="1050" dirty="0">
+              <a:rPr lang="en-US" sz="950" dirty="0">
                 <a:solidFill>
                   <a:srgbClr val="CCCCCC"/>
                 </a:solidFill>
@@ -20707,17 +21761,17 @@
               <a:t> </a:t>
             </a:r>
             <a:r>
-              <a:rPr lang="en-US" sz="1050" dirty="0">
-                <a:solidFill>
-                  <a:srgbClr val="CCCCCC"/>
-                </a:solidFill>
-                <a:latin typeface="Courier New" pitchFamily="34" charset="0"/>
-                <a:ea typeface="Courier New" pitchFamily="34" charset="-122"/>
-                <a:cs typeface="Courier New" pitchFamily="34" charset="-120"/>
-              </a:rPr>
-              <a:t>/dmo/agency_d</a:t>
-            </a:r>
-            <a:endParaRPr lang="en-US" sz="1050" dirty="0"/>
+              <a:rPr lang="en-US" sz="950" dirty="0">
+                <a:solidFill>
+                  <a:srgbClr val="CCCCCC"/>
+                </a:solidFill>
+                <a:latin typeface="Courier New" pitchFamily="34" charset="0"/>
+                <a:ea typeface="Courier New" pitchFamily="34" charset="-122"/>
+                <a:cs typeface="Courier New" pitchFamily="34" charset="-120"/>
+              </a:rPr>
+              <a:t>zta_pc_item_d</a:t>
+            </a:r>
+            <a:endParaRPr lang="en-US" sz="950" dirty="0"/>
           </a:p>
           <a:p>
             <a:pPr indent="0" marL="0">
@@ -20727,7 +21781,7 @@
               <a:buNone/>
             </a:pPr>
             <a:r>
-              <a:rPr lang="en-US" sz="1050" dirty="0">
+              <a:rPr lang="en-US" sz="950" dirty="0">
                 <a:solidFill>
                   <a:srgbClr val="569CD6"/>
                 </a:solidFill>
@@ -20738,7 +21792,7 @@
               <a:t>lock</a:t>
             </a:r>
             <a:r>
-              <a:rPr lang="en-US" sz="1050" dirty="0">
+              <a:rPr lang="en-US" sz="950" dirty="0">
                 <a:solidFill>
                   <a:srgbClr val="CCCCCC"/>
                 </a:solidFill>
@@ -20749,7 +21803,7 @@
               <a:t> </a:t>
             </a:r>
             <a:r>
-              <a:rPr lang="en-US" sz="1050" dirty="0">
+              <a:rPr lang="en-US" sz="950" dirty="0">
                 <a:solidFill>
                   <a:srgbClr val="569CD6"/>
                 </a:solidFill>
@@ -20760,7 +21814,7 @@
               <a:t>master</a:t>
             </a:r>
             <a:r>
-              <a:rPr lang="en-US" sz="1050" dirty="0">
+              <a:rPr lang="en-US" sz="950" dirty="0">
                 <a:solidFill>
                   <a:srgbClr val="CCCCCC"/>
                 </a:solidFill>
@@ -20771,7 +21825,7 @@
               <a:t> </a:t>
             </a:r>
             <a:r>
-              <a:rPr lang="en-US" sz="1050" dirty="0">
+              <a:rPr lang="en-US" sz="950" dirty="0">
                 <a:solidFill>
                   <a:srgbClr val="CCCCCC"/>
                 </a:solidFill>
@@ -20782,7 +21836,7 @@
               <a:t>total</a:t>
             </a:r>
             <a:r>
-              <a:rPr lang="en-US" sz="1050" dirty="0">
+              <a:rPr lang="en-US" sz="950" dirty="0">
                 <a:solidFill>
                   <a:srgbClr val="CCCCCC"/>
                 </a:solidFill>
@@ -20793,7 +21847,7 @@
               <a:t> </a:t>
             </a:r>
             <a:r>
-              <a:rPr lang="en-US" sz="1050" dirty="0">
+              <a:rPr lang="en-US" sz="950" dirty="0">
                 <a:solidFill>
                   <a:srgbClr val="569CD6"/>
                 </a:solidFill>
@@ -20804,7 +21858,7 @@
               <a:t>etag</a:t>
             </a:r>
             <a:r>
-              <a:rPr lang="en-US" sz="1050" dirty="0">
+              <a:rPr lang="en-US" sz="950" dirty="0">
                 <a:solidFill>
                   <a:srgbClr val="CCCCCC"/>
                 </a:solidFill>
@@ -20815,7 +21869,7 @@
               <a:t> </a:t>
             </a:r>
             <a:r>
-              <a:rPr lang="en-US" sz="1050" dirty="0">
+              <a:rPr lang="en-US" sz="950" dirty="0">
                 <a:solidFill>
                   <a:srgbClr val="CCCCCC"/>
                 </a:solidFill>
@@ -20825,7 +21879,7 @@
               </a:rPr>
               <a:t>LastChangedAt</a:t>
             </a:r>
-            <a:endParaRPr lang="en-US" sz="1050" dirty="0"/>
+            <a:endParaRPr lang="en-US" sz="950" dirty="0"/>
           </a:p>
           <a:p>
             <a:pPr indent="0" marL="0">
@@ -20835,7 +21889,7 @@
               <a:buNone/>
             </a:pPr>
             <a:r>
-              <a:rPr lang="en-US" sz="1050" dirty="0">
+              <a:rPr lang="en-US" sz="950" dirty="0">
                 <a:solidFill>
                   <a:srgbClr val="569CD6"/>
                 </a:solidFill>
@@ -20846,7 +21900,7 @@
               <a:t>authorization</a:t>
             </a:r>
             <a:r>
-              <a:rPr lang="en-US" sz="1050" dirty="0">
+              <a:rPr lang="en-US" sz="950" dirty="0">
                 <a:solidFill>
                   <a:srgbClr val="CCCCCC"/>
                 </a:solidFill>
@@ -20857,7 +21911,7 @@
               <a:t> </a:t>
             </a:r>
             <a:r>
-              <a:rPr lang="en-US" sz="1050" dirty="0">
+              <a:rPr lang="en-US" sz="950" dirty="0">
                 <a:solidFill>
                   <a:srgbClr val="569CD6"/>
                 </a:solidFill>
@@ -20868,7 +21922,7 @@
               <a:t>master</a:t>
             </a:r>
             <a:r>
-              <a:rPr lang="en-US" sz="1050" dirty="0">
+              <a:rPr lang="en-US" sz="950" dirty="0">
                 <a:solidFill>
                   <a:srgbClr val="CCCCCC"/>
                 </a:solidFill>
@@ -20879,7 +21933,7 @@
               <a:t> </a:t>
             </a:r>
             <a:r>
-              <a:rPr lang="en-US" sz="1050" dirty="0">
+              <a:rPr lang="en-US" sz="950" dirty="0">
                 <a:solidFill>
                   <a:srgbClr val="CCCCCC"/>
                 </a:solidFill>
@@ -20890,7 +21944,7 @@
               <a:t>(</a:t>
             </a:r>
             <a:r>
-              <a:rPr lang="en-US" sz="1050" dirty="0">
+              <a:rPr lang="en-US" sz="950" dirty="0">
                 <a:solidFill>
                   <a:srgbClr val="CCCCCC"/>
                 </a:solidFill>
@@ -20901,7 +21955,7 @@
               <a:t> </a:t>
             </a:r>
             <a:r>
-              <a:rPr lang="en-US" sz="1050" dirty="0">
+              <a:rPr lang="en-US" sz="950" dirty="0">
                 <a:solidFill>
                   <a:srgbClr val="569CD6"/>
                 </a:solidFill>
@@ -20912,7 +21966,7 @@
               <a:t>global</a:t>
             </a:r>
             <a:r>
-              <a:rPr lang="en-US" sz="1050" dirty="0">
+              <a:rPr lang="en-US" sz="950" dirty="0">
                 <a:solidFill>
                   <a:srgbClr val="CCCCCC"/>
                 </a:solidFill>
@@ -20923,7 +21977,7 @@
               <a:t> </a:t>
             </a:r>
             <a:r>
-              <a:rPr lang="en-US" sz="1050" dirty="0">
+              <a:rPr lang="en-US" sz="950" dirty="0">
                 <a:solidFill>
                   <a:srgbClr val="CCCCCC"/>
                 </a:solidFill>
@@ -20933,7 +21987,7 @@
               </a:rPr>
               <a:t>)</a:t>
             </a:r>
-            <a:endParaRPr lang="en-US" sz="1050" dirty="0"/>
+            <a:endParaRPr lang="en-US" sz="950" dirty="0"/>
           </a:p>
           <a:p>
             <a:pPr indent="0" marL="0">
@@ -20943,7 +21997,7 @@
               <a:buNone/>
             </a:pPr>
             <a:r>
-              <a:rPr lang="en-US" sz="1050" dirty="0">
+              <a:rPr lang="en-US" sz="950" dirty="0">
                 <a:solidFill>
                   <a:srgbClr val="CCCCCC"/>
                 </a:solidFill>
@@ -20953,7 +22007,7 @@
               </a:rPr>
               <a:t>{</a:t>
             </a:r>
-            <a:endParaRPr lang="en-US" sz="1050" dirty="0"/>
+            <a:endParaRPr lang="en-US" sz="950" dirty="0"/>
           </a:p>
           <a:p>
             <a:pPr indent="0" marL="0">
@@ -20963,7 +22017,7 @@
               <a:buNone/>
             </a:pPr>
             <a:r>
-              <a:rPr lang="en-US" sz="1050" dirty="0">
+              <a:rPr lang="en-US" sz="950" dirty="0">
                 <a:solidFill>
                   <a:srgbClr val="CCCCCC"/>
                 </a:solidFill>
@@ -20974,7 +22028,7 @@
               <a:t>  </a:t>
             </a:r>
             <a:r>
-              <a:rPr lang="en-US" sz="1050" dirty="0">
+              <a:rPr lang="en-US" sz="950" dirty="0">
                 <a:solidFill>
                   <a:srgbClr val="569CD6"/>
                 </a:solidFill>
@@ -20985,7 +22039,7 @@
               <a:t>create</a:t>
             </a:r>
             <a:r>
-              <a:rPr lang="en-US" sz="1050" dirty="0">
+              <a:rPr lang="en-US" sz="950" dirty="0">
                 <a:solidFill>
                   <a:srgbClr val="CCCCCC"/>
                 </a:solidFill>
@@ -20995,7 +22049,7 @@
               </a:rPr>
               <a:t>;</a:t>
             </a:r>
-            <a:endParaRPr lang="en-US" sz="1050" dirty="0"/>
+            <a:endParaRPr lang="en-US" sz="950" dirty="0"/>
           </a:p>
           <a:p>
             <a:pPr indent="0" marL="0">
@@ -21005,7 +22059,7 @@
               <a:buNone/>
             </a:pPr>
             <a:r>
-              <a:rPr lang="en-US" sz="1050" dirty="0">
+              <a:rPr lang="en-US" sz="950" dirty="0">
                 <a:solidFill>
                   <a:srgbClr val="CCCCCC"/>
                 </a:solidFill>
@@ -21016,7 +22070,7 @@
               <a:t>  </a:t>
             </a:r>
             <a:r>
-              <a:rPr lang="en-US" sz="1050" dirty="0">
+              <a:rPr lang="en-US" sz="950" dirty="0">
                 <a:solidFill>
                   <a:srgbClr val="569CD6"/>
                 </a:solidFill>
@@ -21027,7 +22081,7 @@
               <a:t>update</a:t>
             </a:r>
             <a:r>
-              <a:rPr lang="en-US" sz="1050" dirty="0">
+              <a:rPr lang="en-US" sz="950" dirty="0">
                 <a:solidFill>
                   <a:srgbClr val="CCCCCC"/>
                 </a:solidFill>
@@ -21037,7 +22091,7 @@
               </a:rPr>
               <a:t>;</a:t>
             </a:r>
-            <a:endParaRPr lang="en-US" sz="1050" dirty="0"/>
+            <a:endParaRPr lang="en-US" sz="950" dirty="0"/>
           </a:p>
           <a:p>
             <a:pPr indent="0" marL="0">
@@ -21047,7 +22101,7 @@
               <a:buNone/>
             </a:pPr>
             <a:r>
-              <a:rPr lang="en-US" sz="1050" dirty="0">
+              <a:rPr lang="en-US" sz="950" dirty="0">
                 <a:solidFill>
                   <a:srgbClr val="CCCCCC"/>
                 </a:solidFill>
@@ -21058,7 +22112,7 @@
               <a:t>  </a:t>
             </a:r>
             <a:r>
-              <a:rPr lang="en-US" sz="1050" dirty="0">
+              <a:rPr lang="en-US" sz="950" dirty="0">
                 <a:solidFill>
                   <a:srgbClr val="569CD6"/>
                 </a:solidFill>
@@ -21069,7 +22123,150 @@
               <a:t>delete</a:t>
             </a:r>
             <a:r>
-              <a:rPr lang="en-US" sz="1050" dirty="0">
+              <a:rPr lang="en-US" sz="950" dirty="0">
+                <a:solidFill>
+                  <a:srgbClr val="CCCCCC"/>
+                </a:solidFill>
+                <a:latin typeface="Courier New" pitchFamily="34" charset="0"/>
+                <a:ea typeface="Courier New" pitchFamily="34" charset="-122"/>
+                <a:cs typeface="Courier New" pitchFamily="34" charset="-120"/>
+              </a:rPr>
+              <a:t> </a:t>
+            </a:r>
+            <a:r>
+              <a:rPr lang="en-US" sz="950" dirty="0">
+                <a:solidFill>
+                  <a:srgbClr val="CCCCCC"/>
+                </a:solidFill>
+                <a:latin typeface="Courier New" pitchFamily="34" charset="0"/>
+                <a:ea typeface="Courier New" pitchFamily="34" charset="-122"/>
+                <a:cs typeface="Courier New" pitchFamily="34" charset="-120"/>
+              </a:rPr>
+              <a:t>(</a:t>
+            </a:r>
+            <a:r>
+              <a:rPr lang="en-US" sz="950" dirty="0">
+                <a:solidFill>
+                  <a:srgbClr val="CCCCCC"/>
+                </a:solidFill>
+                <a:latin typeface="Courier New" pitchFamily="34" charset="0"/>
+                <a:ea typeface="Courier New" pitchFamily="34" charset="-122"/>
+                <a:cs typeface="Courier New" pitchFamily="34" charset="-120"/>
+              </a:rPr>
+              <a:t> </a:t>
+            </a:r>
+            <a:r>
+              <a:rPr lang="en-US" sz="950" dirty="0">
+                <a:solidFill>
+                  <a:srgbClr val="CCCCCC"/>
+                </a:solidFill>
+                <a:latin typeface="Courier New" pitchFamily="34" charset="0"/>
+                <a:ea typeface="Courier New" pitchFamily="34" charset="-122"/>
+                <a:cs typeface="Courier New" pitchFamily="34" charset="-120"/>
+              </a:rPr>
+              <a:t>features</a:t>
+            </a:r>
+            <a:r>
+              <a:rPr lang="en-US" sz="950" dirty="0">
+                <a:solidFill>
+                  <a:srgbClr val="CCCCCC"/>
+                </a:solidFill>
+                <a:latin typeface="Courier New" pitchFamily="34" charset="0"/>
+                <a:ea typeface="Courier New" pitchFamily="34" charset="-122"/>
+                <a:cs typeface="Courier New" pitchFamily="34" charset="-120"/>
+              </a:rPr>
+              <a:t> </a:t>
+            </a:r>
+            <a:r>
+              <a:rPr lang="en-US" sz="950" dirty="0">
+                <a:solidFill>
+                  <a:srgbClr val="CCCCCC"/>
+                </a:solidFill>
+                <a:latin typeface="Courier New" pitchFamily="34" charset="0"/>
+                <a:ea typeface="Courier New" pitchFamily="34" charset="-122"/>
+                <a:cs typeface="Courier New" pitchFamily="34" charset="-120"/>
+              </a:rPr>
+              <a:t>:</a:t>
+            </a:r>
+            <a:r>
+              <a:rPr lang="en-US" sz="950" dirty="0">
+                <a:solidFill>
+                  <a:srgbClr val="CCCCCC"/>
+                </a:solidFill>
+                <a:latin typeface="Courier New" pitchFamily="34" charset="0"/>
+                <a:ea typeface="Courier New" pitchFamily="34" charset="-122"/>
+                <a:cs typeface="Courier New" pitchFamily="34" charset="-120"/>
+              </a:rPr>
+              <a:t> </a:t>
+            </a:r>
+            <a:r>
+              <a:rPr lang="en-US" sz="950" dirty="0">
+                <a:solidFill>
+                  <a:srgbClr val="569CD6"/>
+                </a:solidFill>
+                <a:latin typeface="Courier New" pitchFamily="34" charset="0"/>
+                <a:ea typeface="Courier New" pitchFamily="34" charset="-122"/>
+                <a:cs typeface="Courier New" pitchFamily="34" charset="-120"/>
+              </a:rPr>
+              <a:t>instance</a:t>
+            </a:r>
+            <a:r>
+              <a:rPr lang="en-US" sz="950" dirty="0">
+                <a:solidFill>
+                  <a:srgbClr val="CCCCCC"/>
+                </a:solidFill>
+                <a:latin typeface="Courier New" pitchFamily="34" charset="0"/>
+                <a:ea typeface="Courier New" pitchFamily="34" charset="-122"/>
+                <a:cs typeface="Courier New" pitchFamily="34" charset="-120"/>
+              </a:rPr>
+              <a:t>,</a:t>
+            </a:r>
+            <a:r>
+              <a:rPr lang="en-US" sz="950" dirty="0">
+                <a:solidFill>
+                  <a:srgbClr val="CCCCCC"/>
+                </a:solidFill>
+                <a:latin typeface="Courier New" pitchFamily="34" charset="0"/>
+                <a:ea typeface="Courier New" pitchFamily="34" charset="-122"/>
+                <a:cs typeface="Courier New" pitchFamily="34" charset="-120"/>
+              </a:rPr>
+              <a:t> </a:t>
+            </a:r>
+            <a:r>
+              <a:rPr lang="en-US" sz="950" dirty="0">
+                <a:solidFill>
+                  <a:srgbClr val="CCCCCC"/>
+                </a:solidFill>
+                <a:latin typeface="Courier New" pitchFamily="34" charset="0"/>
+                <a:ea typeface="Courier New" pitchFamily="34" charset="-122"/>
+                <a:cs typeface="Courier New" pitchFamily="34" charset="-120"/>
+              </a:rPr>
+              <a:t>precheck</a:t>
+            </a:r>
+            <a:r>
+              <a:rPr lang="en-US" sz="950" dirty="0">
+                <a:solidFill>
+                  <a:srgbClr val="CCCCCC"/>
+                </a:solidFill>
+                <a:latin typeface="Courier New" pitchFamily="34" charset="0"/>
+                <a:ea typeface="Courier New" pitchFamily="34" charset="-122"/>
+                <a:cs typeface="Courier New" pitchFamily="34" charset="-120"/>
+              </a:rPr>
+              <a:t> </a:t>
+            </a:r>
+            <a:r>
+              <a:rPr lang="en-US" sz="950" dirty="0">
+                <a:solidFill>
+                  <a:srgbClr val="CCCCCC"/>
+                </a:solidFill>
+                <a:latin typeface="Courier New" pitchFamily="34" charset="0"/>
+                <a:ea typeface="Courier New" pitchFamily="34" charset="-122"/>
+                <a:cs typeface="Courier New" pitchFamily="34" charset="-120"/>
+              </a:rPr>
+              <a:t>)</a:t>
+            </a:r>
+            <a:r>
+              <a:rPr lang="en-US" sz="950" dirty="0">
                 <a:solidFill>
                   <a:srgbClr val="CCCCCC"/>
                 </a:solidFill>
@@ -21079,7 +22276,7 @@
               </a:rPr>
               <a:t>;</a:t>
             </a:r>
-            <a:endParaRPr lang="en-US" sz="1050" dirty="0"/>
+            <a:endParaRPr lang="en-US" sz="950" dirty="0"/>
           </a:p>
           <a:p>
             <a:pPr indent="0" marL="0">
@@ -21089,7 +22286,7 @@
               <a:buNone/>
             </a:pPr>
             <a:r>
-              <a:rPr lang="en-US" sz="1050" dirty="0">
+              <a:rPr lang="en-US" sz="950" dirty="0">
                 <a:solidFill>
                   <a:srgbClr val="CCCCCC"/>
                 </a:solidFill>
@@ -21100,7 +22297,7 @@
               <a:t>  </a:t>
             </a:r>
             <a:r>
-              <a:rPr lang="en-US" sz="1050" dirty="0">
+              <a:rPr lang="en-US" sz="950" dirty="0">
                 <a:solidFill>
                   <a:srgbClr val="569CD6"/>
                 </a:solidFill>
@@ -21111,7 +22308,7 @@
               <a:t>field</a:t>
             </a:r>
             <a:r>
-              <a:rPr lang="en-US" sz="1050" dirty="0">
+              <a:rPr lang="en-US" sz="950" dirty="0">
                 <a:solidFill>
                   <a:srgbClr val="CCCCCC"/>
                 </a:solidFill>
@@ -21122,7 +22319,7 @@
               <a:t> </a:t>
             </a:r>
             <a:r>
-              <a:rPr lang="en-US" sz="1050" dirty="0">
+              <a:rPr lang="en-US" sz="950" dirty="0">
                 <a:solidFill>
                   <a:srgbClr val="CCCCCC"/>
                 </a:solidFill>
@@ -21133,7 +22330,7 @@
               <a:t>(</a:t>
             </a:r>
             <a:r>
-              <a:rPr lang="en-US" sz="1050" dirty="0">
+              <a:rPr lang="en-US" sz="950" dirty="0">
                 <a:solidFill>
                   <a:srgbClr val="CCCCCC"/>
                 </a:solidFill>
@@ -21144,7 +22341,7 @@
               <a:t> </a:t>
             </a:r>
             <a:r>
-              <a:rPr lang="en-US" sz="1050" dirty="0">
+              <a:rPr lang="en-US" sz="950" dirty="0">
                 <a:solidFill>
                   <a:srgbClr val="569CD6"/>
                 </a:solidFill>
@@ -21155,7 +22352,7 @@
               <a:t>readonly</a:t>
             </a:r>
             <a:r>
-              <a:rPr lang="en-US" sz="1050" dirty="0">
+              <a:rPr lang="en-US" sz="950" dirty="0">
                 <a:solidFill>
                   <a:srgbClr val="CCCCCC"/>
                 </a:solidFill>
@@ -21166,7 +22363,7 @@
               <a:t> </a:t>
             </a:r>
             <a:r>
-              <a:rPr lang="en-US" sz="1050" dirty="0">
+              <a:rPr lang="en-US" sz="950" dirty="0">
                 <a:solidFill>
                   <a:srgbClr val="CCCCCC"/>
                 </a:solidFill>
@@ -21177,7 +22374,7 @@
               <a:t>)</a:t>
             </a:r>
             <a:r>
-              <a:rPr lang="en-US" sz="1050" dirty="0">
+              <a:rPr lang="en-US" sz="950" dirty="0">
                 <a:solidFill>
                   <a:srgbClr val="CCCCCC"/>
                 </a:solidFill>
@@ -21188,18 +22385,84 @@
               <a:t> </a:t>
             </a:r>
             <a:r>
-              <a:rPr lang="en-US" sz="1050" dirty="0">
-                <a:solidFill>
-                  <a:srgbClr val="CCCCCC"/>
-                </a:solidFill>
-                <a:latin typeface="Courier New" pitchFamily="34" charset="0"/>
-                <a:ea typeface="Courier New" pitchFamily="34" charset="-122"/>
-                <a:cs typeface="Courier New" pitchFamily="34" charset="-120"/>
-              </a:rPr>
-              <a:t>AgencyID</a:t>
-            </a:r>
-            <a:r>
-              <a:rPr lang="en-US" sz="1050" dirty="0">
+              <a:rPr lang="en-US" sz="950" dirty="0">
+                <a:solidFill>
+                  <a:srgbClr val="CCCCCC"/>
+                </a:solidFill>
+                <a:latin typeface="Courier New" pitchFamily="34" charset="0"/>
+                <a:ea typeface="Courier New" pitchFamily="34" charset="-122"/>
+                <a:cs typeface="Courier New" pitchFamily="34" charset="-120"/>
+              </a:rPr>
+              <a:t>Sku</a:t>
+            </a:r>
+            <a:r>
+              <a:rPr lang="en-US" sz="950" dirty="0">
+                <a:solidFill>
+                  <a:srgbClr val="CCCCCC"/>
+                </a:solidFill>
+                <a:latin typeface="Courier New" pitchFamily="34" charset="0"/>
+                <a:ea typeface="Courier New" pitchFamily="34" charset="-122"/>
+                <a:cs typeface="Courier New" pitchFamily="34" charset="-120"/>
+              </a:rPr>
+              <a:t>,</a:t>
+            </a:r>
+            <a:r>
+              <a:rPr lang="en-US" sz="950" dirty="0">
+                <a:solidFill>
+                  <a:srgbClr val="CCCCCC"/>
+                </a:solidFill>
+                <a:latin typeface="Courier New" pitchFamily="34" charset="0"/>
+                <a:ea typeface="Courier New" pitchFamily="34" charset="-122"/>
+                <a:cs typeface="Courier New" pitchFamily="34" charset="-120"/>
+              </a:rPr>
+              <a:t> </a:t>
+            </a:r>
+            <a:r>
+              <a:rPr lang="en-US" sz="950" dirty="0">
+                <a:solidFill>
+                  <a:srgbClr val="CCCCCC"/>
+                </a:solidFill>
+                <a:latin typeface="Courier New" pitchFamily="34" charset="0"/>
+                <a:ea typeface="Courier New" pitchFamily="34" charset="-122"/>
+                <a:cs typeface="Courier New" pitchFamily="34" charset="-120"/>
+              </a:rPr>
+              <a:t>QtdeReservada</a:t>
+            </a:r>
+            <a:r>
+              <a:rPr lang="en-US" sz="950" dirty="0">
+                <a:solidFill>
+                  <a:srgbClr val="CCCCCC"/>
+                </a:solidFill>
+                <a:latin typeface="Courier New" pitchFamily="34" charset="0"/>
+                <a:ea typeface="Courier New" pitchFamily="34" charset="-122"/>
+                <a:cs typeface="Courier New" pitchFamily="34" charset="-120"/>
+              </a:rPr>
+              <a:t>,</a:t>
+            </a:r>
+            <a:r>
+              <a:rPr lang="en-US" sz="950" dirty="0">
+                <a:solidFill>
+                  <a:srgbClr val="CCCCCC"/>
+                </a:solidFill>
+                <a:latin typeface="Courier New" pitchFamily="34" charset="0"/>
+                <a:ea typeface="Courier New" pitchFamily="34" charset="-122"/>
+                <a:cs typeface="Courier New" pitchFamily="34" charset="-120"/>
+              </a:rPr>
+              <a:t> </a:t>
+            </a:r>
+            <a:r>
+              <a:rPr lang="en-US" sz="950" dirty="0">
+                <a:solidFill>
+                  <a:srgbClr val="CCCCCC"/>
+                </a:solidFill>
+                <a:latin typeface="Courier New" pitchFamily="34" charset="0"/>
+                <a:ea typeface="Courier New" pitchFamily="34" charset="-122"/>
+                <a:cs typeface="Courier New" pitchFamily="34" charset="-120"/>
+              </a:rPr>
+              <a:t>QtdeDisponivel</a:t>
+            </a:r>
+            <a:r>
+              <a:rPr lang="en-US" sz="950" dirty="0">
                 <a:solidFill>
                   <a:srgbClr val="CCCCCC"/>
                 </a:solidFill>
@@ -21209,7 +22472,7 @@
               </a:rPr>
               <a:t>;</a:t>
             </a:r>
-            <a:endParaRPr lang="en-US" sz="1050" dirty="0"/>
+            <a:endParaRPr lang="en-US" sz="950" dirty="0"/>
           </a:p>
           <a:p>
             <a:pPr indent="0" marL="0">
@@ -21219,7 +22482,7 @@
               <a:buNone/>
             </a:pPr>
             <a:r>
-              <a:rPr lang="en-US" sz="1050" dirty="0">
+              <a:rPr lang="en-US" sz="950" dirty="0">
                 <a:solidFill>
                   <a:srgbClr val="CCCCCC"/>
                 </a:solidFill>
@@ -21230,7 +22493,7 @@
               <a:t>  </a:t>
             </a:r>
             <a:r>
-              <a:rPr lang="en-US" sz="1050" dirty="0">
+              <a:rPr lang="en-US" sz="950" dirty="0">
                 <a:solidFill>
                   <a:srgbClr val="569CD6"/>
                 </a:solidFill>
@@ -21241,7 +22504,7 @@
               <a:t>validation</a:t>
             </a:r>
             <a:r>
-              <a:rPr lang="en-US" sz="1050" dirty="0">
+              <a:rPr lang="en-US" sz="950" dirty="0">
                 <a:solidFill>
                   <a:srgbClr val="CCCCCC"/>
                 </a:solidFill>
@@ -21252,18 +22515,18 @@
               <a:t> </a:t>
             </a:r>
             <a:r>
-              <a:rPr lang="en-US" sz="1050" dirty="0">
-                <a:solidFill>
-                  <a:srgbClr val="CCCCCC"/>
-                </a:solidFill>
-                <a:latin typeface="Courier New" pitchFamily="34" charset="0"/>
-                <a:ea typeface="Courier New" pitchFamily="34" charset="-122"/>
-                <a:cs typeface="Courier New" pitchFamily="34" charset="-120"/>
-              </a:rPr>
-              <a:t>validateName</a:t>
-            </a:r>
-            <a:r>
-              <a:rPr lang="en-US" sz="1050" dirty="0">
+              <a:rPr lang="en-US" sz="950" dirty="0">
+                <a:solidFill>
+                  <a:srgbClr val="CCCCCC"/>
+                </a:solidFill>
+                <a:latin typeface="Courier New" pitchFamily="34" charset="0"/>
+                <a:ea typeface="Courier New" pitchFamily="34" charset="-122"/>
+                <a:cs typeface="Courier New" pitchFamily="34" charset="-120"/>
+              </a:rPr>
+              <a:t>ValidarItem</a:t>
+            </a:r>
+            <a:r>
+              <a:rPr lang="en-US" sz="950" dirty="0">
                 <a:solidFill>
                   <a:srgbClr val="CCCCCC"/>
                 </a:solidFill>
@@ -21274,7 +22537,7 @@
               <a:t> </a:t>
             </a:r>
             <a:r>
-              <a:rPr lang="en-US" sz="1050" dirty="0">
+              <a:rPr lang="en-US" sz="950" dirty="0">
                 <a:solidFill>
                   <a:srgbClr val="569CD6"/>
                 </a:solidFill>
@@ -21285,7 +22548,7 @@
               <a:t>on</a:t>
             </a:r>
             <a:r>
-              <a:rPr lang="en-US" sz="1050" dirty="0">
+              <a:rPr lang="en-US" sz="950" dirty="0">
                 <a:solidFill>
                   <a:srgbClr val="CCCCCC"/>
                 </a:solidFill>
@@ -21296,7 +22559,7 @@
               <a:t> </a:t>
             </a:r>
             <a:r>
-              <a:rPr lang="en-US" sz="1050" dirty="0">
+              <a:rPr lang="en-US" sz="950" dirty="0">
                 <a:solidFill>
                   <a:srgbClr val="569CD6"/>
                 </a:solidFill>
@@ -21306,139 +22569,7 @@
               </a:rPr>
               <a:t>save</a:t>
             </a:r>
-            <a:r>
-              <a:rPr lang="en-US" sz="1050" dirty="0">
-                <a:solidFill>
-                  <a:srgbClr val="CCCCCC"/>
-                </a:solidFill>
-                <a:latin typeface="Courier New" pitchFamily="34" charset="0"/>
-                <a:ea typeface="Courier New" pitchFamily="34" charset="-122"/>
-                <a:cs typeface="Courier New" pitchFamily="34" charset="-120"/>
-              </a:rPr>
-              <a:t> </a:t>
-            </a:r>
-            <a:r>
-              <a:rPr lang="en-US" sz="1050" dirty="0">
-                <a:solidFill>
-                  <a:srgbClr val="CCCCCC"/>
-                </a:solidFill>
-                <a:latin typeface="Courier New" pitchFamily="34" charset="0"/>
-                <a:ea typeface="Courier New" pitchFamily="34" charset="-122"/>
-                <a:cs typeface="Courier New" pitchFamily="34" charset="-120"/>
-              </a:rPr>
-              <a:t>{</a:t>
-            </a:r>
-            <a:r>
-              <a:rPr lang="en-US" sz="1050" dirty="0">
-                <a:solidFill>
-                  <a:srgbClr val="CCCCCC"/>
-                </a:solidFill>
-                <a:latin typeface="Courier New" pitchFamily="34" charset="0"/>
-                <a:ea typeface="Courier New" pitchFamily="34" charset="-122"/>
-                <a:cs typeface="Courier New" pitchFamily="34" charset="-120"/>
-              </a:rPr>
-              <a:t> </a:t>
-            </a:r>
-            <a:r>
-              <a:rPr lang="en-US" sz="1050" dirty="0">
-                <a:solidFill>
-                  <a:srgbClr val="569CD6"/>
-                </a:solidFill>
-                <a:latin typeface="Courier New" pitchFamily="34" charset="0"/>
-                <a:ea typeface="Courier New" pitchFamily="34" charset="-122"/>
-                <a:cs typeface="Courier New" pitchFamily="34" charset="-120"/>
-              </a:rPr>
-              <a:t>create</a:t>
-            </a:r>
-            <a:r>
-              <a:rPr lang="en-US" sz="1050" dirty="0">
-                <a:solidFill>
-                  <a:srgbClr val="CCCCCC"/>
-                </a:solidFill>
-                <a:latin typeface="Courier New" pitchFamily="34" charset="0"/>
-                <a:ea typeface="Courier New" pitchFamily="34" charset="-122"/>
-                <a:cs typeface="Courier New" pitchFamily="34" charset="-120"/>
-              </a:rPr>
-              <a:t>;</a:t>
-            </a:r>
-            <a:r>
-              <a:rPr lang="en-US" sz="1050" dirty="0">
-                <a:solidFill>
-                  <a:srgbClr val="CCCCCC"/>
-                </a:solidFill>
-                <a:latin typeface="Courier New" pitchFamily="34" charset="0"/>
-                <a:ea typeface="Courier New" pitchFamily="34" charset="-122"/>
-                <a:cs typeface="Courier New" pitchFamily="34" charset="-120"/>
-              </a:rPr>
-              <a:t> </a:t>
-            </a:r>
-            <a:r>
-              <a:rPr lang="en-US" sz="1050" dirty="0">
-                <a:solidFill>
-                  <a:srgbClr val="569CD6"/>
-                </a:solidFill>
-                <a:latin typeface="Courier New" pitchFamily="34" charset="0"/>
-                <a:ea typeface="Courier New" pitchFamily="34" charset="-122"/>
-                <a:cs typeface="Courier New" pitchFamily="34" charset="-120"/>
-              </a:rPr>
-              <a:t>field</a:t>
-            </a:r>
-            <a:r>
-              <a:rPr lang="en-US" sz="1050" dirty="0">
-                <a:solidFill>
-                  <a:srgbClr val="CCCCCC"/>
-                </a:solidFill>
-                <a:latin typeface="Courier New" pitchFamily="34" charset="0"/>
-                <a:ea typeface="Courier New" pitchFamily="34" charset="-122"/>
-                <a:cs typeface="Courier New" pitchFamily="34" charset="-120"/>
-              </a:rPr>
-              <a:t> </a:t>
-            </a:r>
-            <a:r>
-              <a:rPr lang="en-US" sz="1050" dirty="0">
-                <a:solidFill>
-                  <a:srgbClr val="CCCCCC"/>
-                </a:solidFill>
-                <a:latin typeface="Courier New" pitchFamily="34" charset="0"/>
-                <a:ea typeface="Courier New" pitchFamily="34" charset="-122"/>
-                <a:cs typeface="Courier New" pitchFamily="34" charset="-120"/>
-              </a:rPr>
-              <a:t>Name</a:t>
-            </a:r>
-            <a:r>
-              <a:rPr lang="en-US" sz="1050" dirty="0">
-                <a:solidFill>
-                  <a:srgbClr val="CCCCCC"/>
-                </a:solidFill>
-                <a:latin typeface="Courier New" pitchFamily="34" charset="0"/>
-                <a:ea typeface="Courier New" pitchFamily="34" charset="-122"/>
-                <a:cs typeface="Courier New" pitchFamily="34" charset="-120"/>
-              </a:rPr>
-              <a:t>;</a:t>
-            </a:r>
-            <a:r>
-              <a:rPr lang="en-US" sz="1050" dirty="0">
-                <a:solidFill>
-                  <a:srgbClr val="CCCCCC"/>
-                </a:solidFill>
-                <a:latin typeface="Courier New" pitchFamily="34" charset="0"/>
-                <a:ea typeface="Courier New" pitchFamily="34" charset="-122"/>
-                <a:cs typeface="Courier New" pitchFamily="34" charset="-120"/>
-              </a:rPr>
-              <a:t> </a:t>
-            </a:r>
-            <a:r>
-              <a:rPr lang="en-US" sz="1050" dirty="0">
-                <a:solidFill>
-                  <a:srgbClr val="CCCCCC"/>
-                </a:solidFill>
-                <a:latin typeface="Courier New" pitchFamily="34" charset="0"/>
-                <a:ea typeface="Courier New" pitchFamily="34" charset="-122"/>
-                <a:cs typeface="Courier New" pitchFamily="34" charset="-120"/>
-              </a:rPr>
-              <a:t>}</a:t>
-            </a:r>
-            <a:endParaRPr lang="en-US" sz="1050" dirty="0"/>
+            <a:endParaRPr lang="en-US" sz="950" dirty="0"/>
           </a:p>
           <a:p>
             <a:pPr indent="0" marL="0">
@@ -21448,17 +22579,237 @@
               <a:buNone/>
             </a:pPr>
             <a:r>
-              <a:rPr lang="en-US" sz="1050" i="1" dirty="0">
-                <a:solidFill>
-                  <a:srgbClr val="6A9955"/>
-                </a:solidFill>
-                <a:latin typeface="Courier New" pitchFamily="34" charset="0"/>
-                <a:ea typeface="Courier New" pitchFamily="34" charset="-122"/>
-                <a:cs typeface="Courier New" pitchFamily="34" charset="-120"/>
-              </a:rPr>
-              <a:t>  // … ações de rascunho e mapeamento de campos</a:t>
-            </a:r>
-            <a:endParaRPr lang="en-US" sz="1050" dirty="0"/>
+              <a:rPr lang="en-US" sz="950" dirty="0">
+                <a:solidFill>
+                  <a:srgbClr val="CCCCCC"/>
+                </a:solidFill>
+                <a:latin typeface="Courier New" pitchFamily="34" charset="0"/>
+                <a:ea typeface="Courier New" pitchFamily="34" charset="-122"/>
+                <a:cs typeface="Courier New" pitchFamily="34" charset="-120"/>
+              </a:rPr>
+              <a:t>    </a:t>
+            </a:r>
+            <a:r>
+              <a:rPr lang="en-US" sz="950" dirty="0">
+                <a:solidFill>
+                  <a:srgbClr val="CCCCCC"/>
+                </a:solidFill>
+                <a:latin typeface="Courier New" pitchFamily="34" charset="0"/>
+                <a:ea typeface="Courier New" pitchFamily="34" charset="-122"/>
+                <a:cs typeface="Courier New" pitchFamily="34" charset="-120"/>
+              </a:rPr>
+              <a:t>{</a:t>
+            </a:r>
+            <a:r>
+              <a:rPr lang="en-US" sz="950" dirty="0">
+                <a:solidFill>
+                  <a:srgbClr val="CCCCCC"/>
+                </a:solidFill>
+                <a:latin typeface="Courier New" pitchFamily="34" charset="0"/>
+                <a:ea typeface="Courier New" pitchFamily="34" charset="-122"/>
+                <a:cs typeface="Courier New" pitchFamily="34" charset="-120"/>
+              </a:rPr>
+              <a:t> </a:t>
+            </a:r>
+            <a:r>
+              <a:rPr lang="en-US" sz="950" dirty="0">
+                <a:solidFill>
+                  <a:srgbClr val="569CD6"/>
+                </a:solidFill>
+                <a:latin typeface="Courier New" pitchFamily="34" charset="0"/>
+                <a:ea typeface="Courier New" pitchFamily="34" charset="-122"/>
+                <a:cs typeface="Courier New" pitchFamily="34" charset="-120"/>
+              </a:rPr>
+              <a:t>create</a:t>
+            </a:r>
+            <a:r>
+              <a:rPr lang="en-US" sz="950" dirty="0">
+                <a:solidFill>
+                  <a:srgbClr val="CCCCCC"/>
+                </a:solidFill>
+                <a:latin typeface="Courier New" pitchFamily="34" charset="0"/>
+                <a:ea typeface="Courier New" pitchFamily="34" charset="-122"/>
+                <a:cs typeface="Courier New" pitchFamily="34" charset="-120"/>
+              </a:rPr>
+              <a:t>;</a:t>
+            </a:r>
+            <a:r>
+              <a:rPr lang="en-US" sz="950" dirty="0">
+                <a:solidFill>
+                  <a:srgbClr val="CCCCCC"/>
+                </a:solidFill>
+                <a:latin typeface="Courier New" pitchFamily="34" charset="0"/>
+                <a:ea typeface="Courier New" pitchFamily="34" charset="-122"/>
+                <a:cs typeface="Courier New" pitchFamily="34" charset="-120"/>
+              </a:rPr>
+              <a:t> </a:t>
+            </a:r>
+            <a:r>
+              <a:rPr lang="en-US" sz="950" dirty="0">
+                <a:solidFill>
+                  <a:srgbClr val="569CD6"/>
+                </a:solidFill>
+                <a:latin typeface="Courier New" pitchFamily="34" charset="0"/>
+                <a:ea typeface="Courier New" pitchFamily="34" charset="-122"/>
+                <a:cs typeface="Courier New" pitchFamily="34" charset="-120"/>
+              </a:rPr>
+              <a:t>field</a:t>
+            </a:r>
+            <a:r>
+              <a:rPr lang="en-US" sz="950" dirty="0">
+                <a:solidFill>
+                  <a:srgbClr val="CCCCCC"/>
+                </a:solidFill>
+                <a:latin typeface="Courier New" pitchFamily="34" charset="0"/>
+                <a:ea typeface="Courier New" pitchFamily="34" charset="-122"/>
+                <a:cs typeface="Courier New" pitchFamily="34" charset="-120"/>
+              </a:rPr>
+              <a:t> </a:t>
+            </a:r>
+            <a:r>
+              <a:rPr lang="en-US" sz="950" dirty="0">
+                <a:solidFill>
+                  <a:srgbClr val="CCCCCC"/>
+                </a:solidFill>
+                <a:latin typeface="Courier New" pitchFamily="34" charset="0"/>
+                <a:ea typeface="Courier New" pitchFamily="34" charset="-122"/>
+                <a:cs typeface="Courier New" pitchFamily="34" charset="-120"/>
+              </a:rPr>
+              <a:t>Nome</a:t>
+            </a:r>
+            <a:r>
+              <a:rPr lang="en-US" sz="950" dirty="0">
+                <a:solidFill>
+                  <a:srgbClr val="CCCCCC"/>
+                </a:solidFill>
+                <a:latin typeface="Courier New" pitchFamily="34" charset="0"/>
+                <a:ea typeface="Courier New" pitchFamily="34" charset="-122"/>
+                <a:cs typeface="Courier New" pitchFamily="34" charset="-120"/>
+              </a:rPr>
+              <a:t>,</a:t>
+            </a:r>
+            <a:r>
+              <a:rPr lang="en-US" sz="950" dirty="0">
+                <a:solidFill>
+                  <a:srgbClr val="CCCCCC"/>
+                </a:solidFill>
+                <a:latin typeface="Courier New" pitchFamily="34" charset="0"/>
+                <a:ea typeface="Courier New" pitchFamily="34" charset="-122"/>
+                <a:cs typeface="Courier New" pitchFamily="34" charset="-120"/>
+              </a:rPr>
+              <a:t> </a:t>
+            </a:r>
+            <a:r>
+              <a:rPr lang="en-US" sz="950" dirty="0">
+                <a:solidFill>
+                  <a:srgbClr val="CCCCCC"/>
+                </a:solidFill>
+                <a:latin typeface="Courier New" pitchFamily="34" charset="0"/>
+                <a:ea typeface="Courier New" pitchFamily="34" charset="-122"/>
+                <a:cs typeface="Courier New" pitchFamily="34" charset="-120"/>
+              </a:rPr>
+              <a:t>Categoria</a:t>
+            </a:r>
+            <a:r>
+              <a:rPr lang="en-US" sz="950" dirty="0">
+                <a:solidFill>
+                  <a:srgbClr val="CCCCCC"/>
+                </a:solidFill>
+                <a:latin typeface="Courier New" pitchFamily="34" charset="0"/>
+                <a:ea typeface="Courier New" pitchFamily="34" charset="-122"/>
+                <a:cs typeface="Courier New" pitchFamily="34" charset="-120"/>
+              </a:rPr>
+              <a:t>,</a:t>
+            </a:r>
+            <a:r>
+              <a:rPr lang="en-US" sz="950" dirty="0">
+                <a:solidFill>
+                  <a:srgbClr val="CCCCCC"/>
+                </a:solidFill>
+                <a:latin typeface="Courier New" pitchFamily="34" charset="0"/>
+                <a:ea typeface="Courier New" pitchFamily="34" charset="-122"/>
+                <a:cs typeface="Courier New" pitchFamily="34" charset="-120"/>
+              </a:rPr>
+              <a:t> </a:t>
+            </a:r>
+            <a:r>
+              <a:rPr lang="en-US" sz="950" dirty="0">
+                <a:solidFill>
+                  <a:srgbClr val="CCCCCC"/>
+                </a:solidFill>
+                <a:latin typeface="Courier New" pitchFamily="34" charset="0"/>
+                <a:ea typeface="Courier New" pitchFamily="34" charset="-122"/>
+                <a:cs typeface="Courier New" pitchFamily="34" charset="-120"/>
+              </a:rPr>
+              <a:t>PrecoUnitario</a:t>
+            </a:r>
+            <a:r>
+              <a:rPr lang="en-US" sz="950" dirty="0">
+                <a:solidFill>
+                  <a:srgbClr val="CCCCCC"/>
+                </a:solidFill>
+                <a:latin typeface="Courier New" pitchFamily="34" charset="0"/>
+                <a:ea typeface="Courier New" pitchFamily="34" charset="-122"/>
+                <a:cs typeface="Courier New" pitchFamily="34" charset="-120"/>
+              </a:rPr>
+              <a:t>,</a:t>
+            </a:r>
+            <a:r>
+              <a:rPr lang="en-US" sz="950" dirty="0">
+                <a:solidFill>
+                  <a:srgbClr val="CCCCCC"/>
+                </a:solidFill>
+                <a:latin typeface="Courier New" pitchFamily="34" charset="0"/>
+                <a:ea typeface="Courier New" pitchFamily="34" charset="-122"/>
+                <a:cs typeface="Courier New" pitchFamily="34" charset="-120"/>
+              </a:rPr>
+              <a:t> </a:t>
+            </a:r>
+            <a:r>
+              <a:rPr lang="en-US" sz="950" dirty="0">
+                <a:solidFill>
+                  <a:srgbClr val="CCCCCC"/>
+                </a:solidFill>
+                <a:latin typeface="Courier New" pitchFamily="34" charset="0"/>
+                <a:ea typeface="Courier New" pitchFamily="34" charset="-122"/>
+                <a:cs typeface="Courier New" pitchFamily="34" charset="-120"/>
+              </a:rPr>
+              <a:t>Currency</a:t>
+            </a:r>
+            <a:r>
+              <a:rPr lang="en-US" sz="950" dirty="0">
+                <a:solidFill>
+                  <a:srgbClr val="CCCCCC"/>
+                </a:solidFill>
+                <a:latin typeface="Courier New" pitchFamily="34" charset="0"/>
+                <a:ea typeface="Courier New" pitchFamily="34" charset="-122"/>
+                <a:cs typeface="Courier New" pitchFamily="34" charset="-120"/>
+              </a:rPr>
+              <a:t>;</a:t>
+            </a:r>
+            <a:r>
+              <a:rPr lang="en-US" sz="950" dirty="0">
+                <a:solidFill>
+                  <a:srgbClr val="CCCCCC"/>
+                </a:solidFill>
+                <a:latin typeface="Courier New" pitchFamily="34" charset="0"/>
+                <a:ea typeface="Courier New" pitchFamily="34" charset="-122"/>
+                <a:cs typeface="Courier New" pitchFamily="34" charset="-120"/>
+              </a:rPr>
+              <a:t> </a:t>
+            </a:r>
+            <a:r>
+              <a:rPr lang="en-US" sz="950" dirty="0">
+                <a:solidFill>
+                  <a:srgbClr val="CCCCCC"/>
+                </a:solidFill>
+                <a:latin typeface="Courier New" pitchFamily="34" charset="0"/>
+                <a:ea typeface="Courier New" pitchFamily="34" charset="-122"/>
+                <a:cs typeface="Courier New" pitchFamily="34" charset="-120"/>
+              </a:rPr>
+              <a:t>}</a:t>
+            </a:r>
+            <a:endParaRPr lang="en-US" sz="950" dirty="0"/>
           </a:p>
           <a:p>
             <a:pPr indent="0" marL="0">
@@ -21468,7 +22819,342 @@
               <a:buNone/>
             </a:pPr>
             <a:r>
-              <a:rPr lang="en-US" sz="1050" dirty="0">
+              <a:rPr lang="en-US" sz="950" dirty="0">
+                <a:solidFill>
+                  <a:srgbClr val="CCCCCC"/>
+                </a:solidFill>
+                <a:latin typeface="Courier New" pitchFamily="34" charset="0"/>
+                <a:ea typeface="Courier New" pitchFamily="34" charset="-122"/>
+                <a:cs typeface="Courier New" pitchFamily="34" charset="-120"/>
+              </a:rPr>
+              <a:t>  </a:t>
+            </a:r>
+            <a:r>
+              <a:rPr lang="en-US" sz="950" dirty="0">
+                <a:solidFill>
+                  <a:srgbClr val="569CD6"/>
+                </a:solidFill>
+                <a:latin typeface="Courier New" pitchFamily="34" charset="0"/>
+                <a:ea typeface="Courier New" pitchFamily="34" charset="-122"/>
+                <a:cs typeface="Courier New" pitchFamily="34" charset="-120"/>
+              </a:rPr>
+              <a:t>action</a:t>
+            </a:r>
+            <a:r>
+              <a:rPr lang="en-US" sz="950" dirty="0">
+                <a:solidFill>
+                  <a:srgbClr val="CCCCCC"/>
+                </a:solidFill>
+                <a:latin typeface="Courier New" pitchFamily="34" charset="0"/>
+                <a:ea typeface="Courier New" pitchFamily="34" charset="-122"/>
+                <a:cs typeface="Courier New" pitchFamily="34" charset="-120"/>
+              </a:rPr>
+              <a:t> </a:t>
+            </a:r>
+            <a:r>
+              <a:rPr lang="en-US" sz="950" dirty="0">
+                <a:solidFill>
+                  <a:srgbClr val="CCCCCC"/>
+                </a:solidFill>
+                <a:latin typeface="Courier New" pitchFamily="34" charset="0"/>
+                <a:ea typeface="Courier New" pitchFamily="34" charset="-122"/>
+                <a:cs typeface="Courier New" pitchFamily="34" charset="-120"/>
+              </a:rPr>
+              <a:t>(</a:t>
+            </a:r>
+            <a:r>
+              <a:rPr lang="en-US" sz="950" dirty="0">
+                <a:solidFill>
+                  <a:srgbClr val="CCCCCC"/>
+                </a:solidFill>
+                <a:latin typeface="Courier New" pitchFamily="34" charset="0"/>
+                <a:ea typeface="Courier New" pitchFamily="34" charset="-122"/>
+                <a:cs typeface="Courier New" pitchFamily="34" charset="-120"/>
+              </a:rPr>
+              <a:t> </a:t>
+            </a:r>
+            <a:r>
+              <a:rPr lang="en-US" sz="950" dirty="0">
+                <a:solidFill>
+                  <a:srgbClr val="569CD6"/>
+                </a:solidFill>
+                <a:latin typeface="Courier New" pitchFamily="34" charset="0"/>
+                <a:ea typeface="Courier New" pitchFamily="34" charset="-122"/>
+                <a:cs typeface="Courier New" pitchFamily="34" charset="-120"/>
+              </a:rPr>
+              <a:t>authorization</a:t>
+            </a:r>
+            <a:r>
+              <a:rPr lang="en-US" sz="950" dirty="0">
+                <a:solidFill>
+                  <a:srgbClr val="CCCCCC"/>
+                </a:solidFill>
+                <a:latin typeface="Courier New" pitchFamily="34" charset="0"/>
+                <a:ea typeface="Courier New" pitchFamily="34" charset="-122"/>
+                <a:cs typeface="Courier New" pitchFamily="34" charset="-120"/>
+              </a:rPr>
+              <a:t> </a:t>
+            </a:r>
+            <a:r>
+              <a:rPr lang="en-US" sz="950" dirty="0">
+                <a:solidFill>
+                  <a:srgbClr val="CCCCCC"/>
+                </a:solidFill>
+                <a:latin typeface="Courier New" pitchFamily="34" charset="0"/>
+                <a:ea typeface="Courier New" pitchFamily="34" charset="-122"/>
+                <a:cs typeface="Courier New" pitchFamily="34" charset="-120"/>
+              </a:rPr>
+              <a:t>:</a:t>
+            </a:r>
+            <a:r>
+              <a:rPr lang="en-US" sz="950" dirty="0">
+                <a:solidFill>
+                  <a:srgbClr val="CCCCCC"/>
+                </a:solidFill>
+                <a:latin typeface="Courier New" pitchFamily="34" charset="0"/>
+                <a:ea typeface="Courier New" pitchFamily="34" charset="-122"/>
+                <a:cs typeface="Courier New" pitchFamily="34" charset="-120"/>
+              </a:rPr>
+              <a:t> </a:t>
+            </a:r>
+            <a:r>
+              <a:rPr lang="en-US" sz="950" dirty="0">
+                <a:solidFill>
+                  <a:srgbClr val="CCCCCC"/>
+                </a:solidFill>
+                <a:latin typeface="Courier New" pitchFamily="34" charset="0"/>
+                <a:ea typeface="Courier New" pitchFamily="34" charset="-122"/>
+                <a:cs typeface="Courier New" pitchFamily="34" charset="-120"/>
+              </a:rPr>
+              <a:t>none</a:t>
+            </a:r>
+            <a:r>
+              <a:rPr lang="en-US" sz="950" dirty="0">
+                <a:solidFill>
+                  <a:srgbClr val="CCCCCC"/>
+                </a:solidFill>
+                <a:latin typeface="Courier New" pitchFamily="34" charset="0"/>
+                <a:ea typeface="Courier New" pitchFamily="34" charset="-122"/>
+                <a:cs typeface="Courier New" pitchFamily="34" charset="-120"/>
+              </a:rPr>
+              <a:t> </a:t>
+            </a:r>
+            <a:r>
+              <a:rPr lang="en-US" sz="950" dirty="0">
+                <a:solidFill>
+                  <a:srgbClr val="CCCCCC"/>
+                </a:solidFill>
+                <a:latin typeface="Courier New" pitchFamily="34" charset="0"/>
+                <a:ea typeface="Courier New" pitchFamily="34" charset="-122"/>
+                <a:cs typeface="Courier New" pitchFamily="34" charset="-120"/>
+              </a:rPr>
+              <a:t>)</a:t>
+            </a:r>
+            <a:r>
+              <a:rPr lang="en-US" sz="950" dirty="0">
+                <a:solidFill>
+                  <a:srgbClr val="CCCCCC"/>
+                </a:solidFill>
+                <a:latin typeface="Courier New" pitchFamily="34" charset="0"/>
+                <a:ea typeface="Courier New" pitchFamily="34" charset="-122"/>
+                <a:cs typeface="Courier New" pitchFamily="34" charset="-120"/>
+              </a:rPr>
+              <a:t> </a:t>
+            </a:r>
+            <a:r>
+              <a:rPr lang="en-US" sz="950" dirty="0">
+                <a:solidFill>
+                  <a:srgbClr val="CCCCCC"/>
+                </a:solidFill>
+                <a:latin typeface="Courier New" pitchFamily="34" charset="0"/>
+                <a:ea typeface="Courier New" pitchFamily="34" charset="-122"/>
+                <a:cs typeface="Courier New" pitchFamily="34" charset="-120"/>
+              </a:rPr>
+              <a:t>ReservarEstoque</a:t>
+            </a:r>
+            <a:endParaRPr lang="en-US" sz="950" dirty="0"/>
+          </a:p>
+          <a:p>
+            <a:pPr indent="0" marL="0">
+              <a:lnSpc>
+                <a:spcPct val="105000"/>
+              </a:lnSpc>
+              <a:buNone/>
+            </a:pPr>
+            <a:r>
+              <a:rPr lang="en-US" sz="950" dirty="0">
+                <a:solidFill>
+                  <a:srgbClr val="CCCCCC"/>
+                </a:solidFill>
+                <a:latin typeface="Courier New" pitchFamily="34" charset="0"/>
+                <a:ea typeface="Courier New" pitchFamily="34" charset="-122"/>
+                <a:cs typeface="Courier New" pitchFamily="34" charset="-120"/>
+              </a:rPr>
+              <a:t>    </a:t>
+            </a:r>
+            <a:r>
+              <a:rPr lang="en-US" sz="950" dirty="0">
+                <a:solidFill>
+                  <a:srgbClr val="CCCCCC"/>
+                </a:solidFill>
+                <a:latin typeface="Courier New" pitchFamily="34" charset="0"/>
+                <a:ea typeface="Courier New" pitchFamily="34" charset="-122"/>
+                <a:cs typeface="Courier New" pitchFamily="34" charset="-120"/>
+              </a:rPr>
+              <a:t>parameter</a:t>
+            </a:r>
+            <a:r>
+              <a:rPr lang="en-US" sz="950" dirty="0">
+                <a:solidFill>
+                  <a:srgbClr val="CCCCCC"/>
+                </a:solidFill>
+                <a:latin typeface="Courier New" pitchFamily="34" charset="0"/>
+                <a:ea typeface="Courier New" pitchFamily="34" charset="-122"/>
+                <a:cs typeface="Courier New" pitchFamily="34" charset="-120"/>
+              </a:rPr>
+              <a:t> </a:t>
+            </a:r>
+            <a:r>
+              <a:rPr lang="en-US" sz="950" dirty="0">
+                <a:solidFill>
+                  <a:srgbClr val="CCCCCC"/>
+                </a:solidFill>
+                <a:latin typeface="Courier New" pitchFamily="34" charset="0"/>
+                <a:ea typeface="Courier New" pitchFamily="34" charset="-122"/>
+                <a:cs typeface="Courier New" pitchFamily="34" charset="-120"/>
+              </a:rPr>
+              <a:t>ZPC_A_QTDE_INPUT</a:t>
+            </a:r>
+            <a:r>
+              <a:rPr lang="en-US" sz="950" dirty="0">
+                <a:solidFill>
+                  <a:srgbClr val="CCCCCC"/>
+                </a:solidFill>
+                <a:latin typeface="Courier New" pitchFamily="34" charset="0"/>
+                <a:ea typeface="Courier New" pitchFamily="34" charset="-122"/>
+                <a:cs typeface="Courier New" pitchFamily="34" charset="-120"/>
+              </a:rPr>
+              <a:t> </a:t>
+            </a:r>
+            <a:r>
+              <a:rPr lang="en-US" sz="950" dirty="0">
+                <a:solidFill>
+                  <a:srgbClr val="CCCCCC"/>
+                </a:solidFill>
+                <a:latin typeface="Courier New" pitchFamily="34" charset="0"/>
+                <a:ea typeface="Courier New" pitchFamily="34" charset="-122"/>
+                <a:cs typeface="Courier New" pitchFamily="34" charset="-120"/>
+              </a:rPr>
+              <a:t>result</a:t>
+            </a:r>
+            <a:r>
+              <a:rPr lang="en-US" sz="950" dirty="0">
+                <a:solidFill>
+                  <a:srgbClr val="CCCCCC"/>
+                </a:solidFill>
+                <a:latin typeface="Courier New" pitchFamily="34" charset="0"/>
+                <a:ea typeface="Courier New" pitchFamily="34" charset="-122"/>
+                <a:cs typeface="Courier New" pitchFamily="34" charset="-120"/>
+              </a:rPr>
+              <a:t> </a:t>
+            </a:r>
+            <a:r>
+              <a:rPr lang="en-US" sz="950" dirty="0">
+                <a:solidFill>
+                  <a:srgbClr val="CCCCCC"/>
+                </a:solidFill>
+                <a:latin typeface="Courier New" pitchFamily="34" charset="0"/>
+                <a:ea typeface="Courier New" pitchFamily="34" charset="-122"/>
+                <a:cs typeface="Courier New" pitchFamily="34" charset="-120"/>
+              </a:rPr>
+              <a:t>[</a:t>
+            </a:r>
+            <a:r>
+              <a:rPr lang="en-US" sz="950" dirty="0">
+                <a:solidFill>
+                  <a:srgbClr val="B5CEA8"/>
+                </a:solidFill>
+                <a:latin typeface="Courier New" pitchFamily="34" charset="0"/>
+                <a:ea typeface="Courier New" pitchFamily="34" charset="-122"/>
+                <a:cs typeface="Courier New" pitchFamily="34" charset="-120"/>
+              </a:rPr>
+              <a:t>1</a:t>
+            </a:r>
+            <a:r>
+              <a:rPr lang="en-US" sz="950" dirty="0">
+                <a:solidFill>
+                  <a:srgbClr val="CCCCCC"/>
+                </a:solidFill>
+                <a:latin typeface="Courier New" pitchFamily="34" charset="0"/>
+                <a:ea typeface="Courier New" pitchFamily="34" charset="-122"/>
+                <a:cs typeface="Courier New" pitchFamily="34" charset="-120"/>
+              </a:rPr>
+              <a:t>]</a:t>
+            </a:r>
+            <a:r>
+              <a:rPr lang="en-US" sz="950" dirty="0">
+                <a:solidFill>
+                  <a:srgbClr val="CCCCCC"/>
+                </a:solidFill>
+                <a:latin typeface="Courier New" pitchFamily="34" charset="0"/>
+                <a:ea typeface="Courier New" pitchFamily="34" charset="-122"/>
+                <a:cs typeface="Courier New" pitchFamily="34" charset="-120"/>
+              </a:rPr>
+              <a:t> </a:t>
+            </a:r>
+            <a:r>
+              <a:rPr lang="en-US" sz="950" dirty="0">
+                <a:solidFill>
+                  <a:srgbClr val="C586C0"/>
+                </a:solidFill>
+                <a:latin typeface="Courier New" pitchFamily="34" charset="0"/>
+                <a:ea typeface="Courier New" pitchFamily="34" charset="-122"/>
+                <a:cs typeface="Courier New" pitchFamily="34" charset="-120"/>
+              </a:rPr>
+              <a:t>$self</a:t>
+            </a:r>
+            <a:r>
+              <a:rPr lang="en-US" sz="950" dirty="0">
+                <a:solidFill>
+                  <a:srgbClr val="CCCCCC"/>
+                </a:solidFill>
+                <a:latin typeface="Courier New" pitchFamily="34" charset="0"/>
+                <a:ea typeface="Courier New" pitchFamily="34" charset="-122"/>
+                <a:cs typeface="Courier New" pitchFamily="34" charset="-120"/>
+              </a:rPr>
+              <a:t>;</a:t>
+            </a:r>
+            <a:endParaRPr lang="en-US" sz="950" dirty="0"/>
+          </a:p>
+          <a:p>
+            <a:pPr indent="0" marL="0">
+              <a:lnSpc>
+                <a:spcPct val="105000"/>
+              </a:lnSpc>
+              <a:buNone/>
+            </a:pPr>
+            <a:r>
+              <a:rPr lang="en-US" sz="950" i="1" dirty="0">
+                <a:solidFill>
+                  <a:srgbClr val="6A9955"/>
+                </a:solidFill>
+                <a:latin typeface="Courier New" pitchFamily="34" charset="0"/>
+                <a:ea typeface="Courier New" pitchFamily="34" charset="-122"/>
+                <a:cs typeface="Courier New" pitchFamily="34" charset="-120"/>
+              </a:rPr>
+              <a:t>  // … ações de rascunho, determinações e mapeamento</a:t>
+            </a:r>
+            <a:endParaRPr lang="en-US" sz="950" dirty="0"/>
+          </a:p>
+          <a:p>
+            <a:pPr indent="0" marL="0">
+              <a:lnSpc>
+                <a:spcPct val="105000"/>
+              </a:lnSpc>
+              <a:buNone/>
+            </a:pPr>
+            <a:r>
+              <a:rPr lang="en-US" sz="950" dirty="0">
                 <a:solidFill>
                   <a:srgbClr val="CCCCCC"/>
                 </a:solidFill>
@@ -21478,7 +23164,7 @@
               </a:rPr>
               <a:t>}</a:t>
             </a:r>
-            <a:endParaRPr lang="en-US" sz="1050" dirty="0"/>
+            <a:endParaRPr lang="en-US" sz="950" dirty="0"/>
           </a:p>
         </p:txBody>
       </p:sp>
@@ -21745,7 +23431,7 @@
                 <a:ea typeface="Courier New" pitchFamily="34" charset="-122"/>
                 <a:cs typeface="Courier New" pitchFamily="34" charset="-120"/>
               </a:rPr>
-              <a:t>ENTITY /dmo/agency</a:t>
+              <a:t>ENTITY Item</a:t>
             </a:r>
             <a:r>
               <a:rPr lang="en-US" sz="1050" dirty="0">
@@ -21946,9 +23632,6 @@
           <a:lstStyle/>
           <a:p>
             <a:pPr indent="0" marL="0">
-              <a:spcAft>
-                <a:spcPts val="300"/>
-              </a:spcAft>
               <a:buNone/>
             </a:pPr>
             <a:r>
@@ -21960,7 +23643,26 @@
                 <a:ea typeface="Courier New" pitchFamily="34" charset="-122"/>
                 <a:cs typeface="Courier New" pitchFamily="34" charset="-120"/>
               </a:rPr>
-              <a:t>validation … on save</a:t>
+              <a:t>validation</a:t>
+            </a:r>
+            <a:r>
+              <a:rPr lang="en-US" sz="1250" b="1" dirty="0">
+                <a:solidFill>
+                  <a:srgbClr val="1D2D3E"/>
+                </a:solidFill>
+              </a:rPr>
+              <a:t> · </a:t>
+            </a:r>
+            <a:r>
+              <a:rPr lang="en-US" sz="1250" b="1" dirty="0">
+                <a:solidFill>
+                  <a:srgbClr val="0064D9"/>
+                </a:solidFill>
+                <a:latin typeface="Courier New" pitchFamily="34" charset="0"/>
+                <a:ea typeface="Courier New" pitchFamily="34" charset="-122"/>
+                <a:cs typeface="Courier New" pitchFamily="34" charset="-120"/>
+              </a:rPr>
+              <a:t>action</a:t>
             </a:r>
             <a:endParaRPr lang="en-US" sz="1400" dirty="0"/>
           </a:p>
@@ -21971,10 +23673,21 @@
             <a:r>
               <a:rPr lang="en-US" sz="1050" dirty="0">
                 <a:solidFill>
+                  <a:srgbClr val="0064D9"/>
+                </a:solidFill>
+                <a:latin typeface="Courier New" pitchFamily="34" charset="0"/>
+                <a:ea typeface="Courier New" pitchFamily="34" charset="-122"/>
+                <a:cs typeface="Courier New" pitchFamily="34" charset="-120"/>
+              </a:rPr>
+              <a:t>ValidarItem</a:t>
+            </a:r>
+            <a:r>
+              <a:rPr lang="en-US" sz="1050" dirty="0">
+                <a:solidFill>
                   <a:srgbClr val="556B82"/>
                 </a:solidFill>
               </a:rPr>
-              <a:t>Roda ao criar e quando </a:t>
+              <a:t> roda ao criar e quando os campos mudam; </a:t>
             </a:r>
             <a:r>
               <a:rPr lang="en-US" sz="1050" dirty="0">
@@ -21985,7 +23698,7 @@
                 <a:ea typeface="Courier New" pitchFamily="34" charset="-122"/>
                 <a:cs typeface="Courier New" pitchFamily="34" charset="-120"/>
               </a:rPr>
-              <a:t>Name</a:t>
+              <a:t>ReservarEstoque</a:t>
             </a:r>
             <a:r>
               <a:rPr lang="en-US" sz="1050" dirty="0">
@@ -21993,7 +23706,7 @@
                   <a:srgbClr val="556B82"/>
                 </a:solidFill>
               </a:rPr>
-              <a:t> muda; o código fica no behavior pool.</a:t>
+              <a:t> é chamada pelo BO Pedido.</a:t>
             </a:r>
             <a:endParaRPr lang="en-US" sz="1400" dirty="0"/>
           </a:p>
@@ -23563,7 +25276,7 @@
         </p:blipFill>
         <p:spPr>
           <a:xfrm>
-            <a:off x="850392" y="3036316"/>
+            <a:off x="8399069" y="3036316"/>
             <a:ext cx="256032" cy="256032"/>
           </a:xfrm>
           <a:prstGeom prst="rect">
@@ -23611,7 +25324,7 @@
         </p:blipFill>
         <p:spPr>
           <a:xfrm>
-            <a:off x="8399069" y="3036316"/>
+            <a:off x="850392" y="3036316"/>
             <a:ext cx="256032" cy="256032"/>
           </a:xfrm>
           <a:prstGeom prst="rect">
